--- a/marketing/Cap-Track-PZPW.pptx
+++ b/marketing/Cap-Track-PZPW.pptx
@@ -4023,27 +4023,51 @@
           </a:p>
         </p:txBody>
       </p:sp>
-      <p:sp>
-        <p:nvSpPr>
-          <p:cNvPr id="14" name="Rounded Rectangle 13"/>
+      <p:pic>
+        <p:nvPicPr>
+          <p:cNvPr id="14" name="Picture 13" descr="pulpit.png"/>
+          <p:cNvPicPr>
+            <a:picLocks noChangeAspect="1"/>
+          </p:cNvPicPr>
+          <p:nvPr/>
+        </p:nvPicPr>
+        <p:blipFill>
+          <a:blip r:embed="rId2"/>
+          <a:stretch>
+            <a:fillRect/>
+          </a:stretch>
+        </p:blipFill>
+        <p:spPr>
+          <a:xfrm>
+            <a:off x="1214472" y="2340864"/>
+            <a:ext cx="5105711" cy="3474720"/>
+          </a:xfrm>
+          <a:prstGeom prst="rect">
+            <a:avLst/>
+          </a:prstGeom>
+        </p:spPr>
+      </p:pic>
+      <p:sp>
+        <p:nvSpPr>
+          <p:cNvPr id="15" name="Rounded Rectangle 14"/>
           <p:cNvSpPr/>
           <p:nvPr/>
         </p:nvSpPr>
         <p:spPr>
           <a:xfrm>
-            <a:off x="795528" y="2432304"/>
-            <a:ext cx="1376172" cy="914400"/>
+            <a:off x="1214472" y="2340864"/>
+            <a:ext cx="5105711" cy="3474720"/>
           </a:xfrm>
           <a:prstGeom prst="roundRect">
             <a:avLst>
-              <a:gd name="adj" fmla="val 10000"/>
+              <a:gd name="adj" fmla="val 1500"/>
             </a:avLst>
           </a:prstGeom>
-          <a:solidFill>
-            <a:srgbClr val="1A2332"/>
-          </a:solidFill>
-          <a:ln>
-            <a:noFill/>
+          <a:noFill/>
+          <a:ln w="9525">
+            <a:solidFill>
+              <a:srgbClr val="1E2D3D"/>
+            </a:solidFill>
           </a:ln>
           <a:effectLst/>
         </p:spPr>
@@ -4071,1417 +4095,7 @@
       </p:sp>
       <p:sp>
         <p:nvSpPr>
-          <p:cNvPr id="15" name="TextBox 14"/>
-          <p:cNvSpPr txBox="1"/>
-          <p:nvPr/>
-        </p:nvSpPr>
-        <p:spPr>
-          <a:xfrm>
-            <a:off x="795528" y="2560320"/>
-            <a:ext cx="1376172" cy="274320"/>
-          </a:xfrm>
-          <a:prstGeom prst="rect">
-            <a:avLst/>
-          </a:prstGeom>
-          <a:noFill/>
-        </p:spPr>
-        <p:txBody>
-          <a:bodyPr wrap="square" anchor="t" lIns="0" rIns="0" tIns="0" bIns="0">
-            <a:spAutoFit/>
-          </a:bodyPr>
-          <a:lstStyle/>
-          <a:p>
-            <a:pPr algn="ctr">
-              <a:lnSpc>
-                <a:spcPct val="100000"/>
-              </a:lnSpc>
-            </a:pPr>
-            <a:r>
-              <a:rPr sz="900" b="1">
-                <a:solidFill>
-                  <a:srgbClr val="8B97A5"/>
-                </a:solidFill>
-                <a:latin typeface="Calibri"/>
-              </a:rPr>
-              <a:t>MECZE</a:t>
-            </a:r>
-          </a:p>
-        </p:txBody>
-      </p:sp>
-      <p:sp>
-        <p:nvSpPr>
           <p:cNvPr id="16" name="TextBox 15"/>
-          <p:cNvSpPr txBox="1"/>
-          <p:nvPr/>
-        </p:nvSpPr>
-        <p:spPr>
-          <a:xfrm>
-            <a:off x="795528" y="2816352"/>
-            <a:ext cx="1376172" cy="457200"/>
-          </a:xfrm>
-          <a:prstGeom prst="rect">
-            <a:avLst/>
-          </a:prstGeom>
-          <a:noFill/>
-        </p:spPr>
-        <p:txBody>
-          <a:bodyPr wrap="square" anchor="t" lIns="0" rIns="0" tIns="0" bIns="0">
-            <a:spAutoFit/>
-          </a:bodyPr>
-          <a:lstStyle/>
-          <a:p>
-            <a:pPr algn="ctr">
-              <a:lnSpc>
-                <a:spcPct val="100000"/>
-              </a:lnSpc>
-            </a:pPr>
-            <a:r>
-              <a:rPr sz="2200" b="1">
-                <a:solidFill>
-                  <a:srgbClr val="4CC9F0"/>
-                </a:solidFill>
-                <a:latin typeface="Calibri"/>
-              </a:rPr>
-              <a:t>18</a:t>
-            </a:r>
-          </a:p>
-        </p:txBody>
-      </p:sp>
-      <p:sp>
-        <p:nvSpPr>
-          <p:cNvPr id="17" name="Rounded Rectangle 16"/>
-          <p:cNvSpPr/>
-          <p:nvPr/>
-        </p:nvSpPr>
-        <p:spPr>
-          <a:xfrm>
-            <a:off x="2318003" y="2432304"/>
-            <a:ext cx="1376172" cy="914400"/>
-          </a:xfrm>
-          <a:prstGeom prst="roundRect">
-            <a:avLst>
-              <a:gd name="adj" fmla="val 10000"/>
-            </a:avLst>
-          </a:prstGeom>
-          <a:solidFill>
-            <a:srgbClr val="1A2332"/>
-          </a:solidFill>
-          <a:ln>
-            <a:noFill/>
-          </a:ln>
-          <a:effectLst/>
-        </p:spPr>
-        <p:style>
-          <a:lnRef idx="1">
-            <a:schemeClr val="accent1"/>
-          </a:lnRef>
-          <a:fillRef idx="3">
-            <a:schemeClr val="accent1"/>
-          </a:fillRef>
-          <a:effectRef idx="2">
-            <a:schemeClr val="accent1"/>
-          </a:effectRef>
-          <a:fontRef idx="minor">
-            <a:schemeClr val="lt1"/>
-          </a:fontRef>
-        </p:style>
-        <p:txBody>
-          <a:bodyPr rtlCol="0" anchor="ctr"/>
-          <a:lstStyle/>
-          <a:p>
-            <a:pPr algn="ctr"/>
-          </a:p>
-        </p:txBody>
-      </p:sp>
-      <p:sp>
-        <p:nvSpPr>
-          <p:cNvPr id="18" name="TextBox 17"/>
-          <p:cNvSpPr txBox="1"/>
-          <p:nvPr/>
-        </p:nvSpPr>
-        <p:spPr>
-          <a:xfrm>
-            <a:off x="2318003" y="2560320"/>
-            <a:ext cx="1376172" cy="274320"/>
-          </a:xfrm>
-          <a:prstGeom prst="rect">
-            <a:avLst/>
-          </a:prstGeom>
-          <a:noFill/>
-        </p:spPr>
-        <p:txBody>
-          <a:bodyPr wrap="square" anchor="t" lIns="0" rIns="0" tIns="0" bIns="0">
-            <a:spAutoFit/>
-          </a:bodyPr>
-          <a:lstStyle/>
-          <a:p>
-            <a:pPr algn="ctr">
-              <a:lnSpc>
-                <a:spcPct val="100000"/>
-              </a:lnSpc>
-            </a:pPr>
-            <a:r>
-              <a:rPr sz="900" b="1">
-                <a:solidFill>
-                  <a:srgbClr val="8B97A5"/>
-                </a:solidFill>
-                <a:latin typeface="Calibri"/>
-              </a:rPr>
-              <a:t>BILANS</a:t>
-            </a:r>
-          </a:p>
-        </p:txBody>
-      </p:sp>
-      <p:sp>
-        <p:nvSpPr>
-          <p:cNvPr id="19" name="TextBox 18"/>
-          <p:cNvSpPr txBox="1"/>
-          <p:nvPr/>
-        </p:nvSpPr>
-        <p:spPr>
-          <a:xfrm>
-            <a:off x="2318003" y="2816352"/>
-            <a:ext cx="1376172" cy="457200"/>
-          </a:xfrm>
-          <a:prstGeom prst="rect">
-            <a:avLst/>
-          </a:prstGeom>
-          <a:noFill/>
-        </p:spPr>
-        <p:txBody>
-          <a:bodyPr wrap="square" anchor="t" lIns="0" rIns="0" tIns="0" bIns="0">
-            <a:spAutoFit/>
-          </a:bodyPr>
-          <a:lstStyle/>
-          <a:p>
-            <a:pPr algn="ctr">
-              <a:lnSpc>
-                <a:spcPct val="100000"/>
-              </a:lnSpc>
-            </a:pPr>
-            <a:r>
-              <a:rPr sz="2200" b="1">
-                <a:solidFill>
-                  <a:srgbClr val="4CC9F0"/>
-                </a:solidFill>
-                <a:latin typeface="Calibri"/>
-              </a:rPr>
-              <a:t>12-2-4</a:t>
-            </a:r>
-          </a:p>
-        </p:txBody>
-      </p:sp>
-      <p:sp>
-        <p:nvSpPr>
-          <p:cNvPr id="20" name="Rounded Rectangle 19"/>
-          <p:cNvSpPr/>
-          <p:nvPr/>
-        </p:nvSpPr>
-        <p:spPr>
-          <a:xfrm>
-            <a:off x="3840479" y="2432304"/>
-            <a:ext cx="1376172" cy="914400"/>
-          </a:xfrm>
-          <a:prstGeom prst="roundRect">
-            <a:avLst>
-              <a:gd name="adj" fmla="val 10000"/>
-            </a:avLst>
-          </a:prstGeom>
-          <a:solidFill>
-            <a:srgbClr val="1A2332"/>
-          </a:solidFill>
-          <a:ln>
-            <a:noFill/>
-          </a:ln>
-          <a:effectLst/>
-        </p:spPr>
-        <p:style>
-          <a:lnRef idx="1">
-            <a:schemeClr val="accent1"/>
-          </a:lnRef>
-          <a:fillRef idx="3">
-            <a:schemeClr val="accent1"/>
-          </a:fillRef>
-          <a:effectRef idx="2">
-            <a:schemeClr val="accent1"/>
-          </a:effectRef>
-          <a:fontRef idx="minor">
-            <a:schemeClr val="lt1"/>
-          </a:fontRef>
-        </p:style>
-        <p:txBody>
-          <a:bodyPr rtlCol="0" anchor="ctr"/>
-          <a:lstStyle/>
-          <a:p>
-            <a:pPr algn="ctr"/>
-          </a:p>
-        </p:txBody>
-      </p:sp>
-      <p:sp>
-        <p:nvSpPr>
-          <p:cNvPr id="21" name="TextBox 20"/>
-          <p:cNvSpPr txBox="1"/>
-          <p:nvPr/>
-        </p:nvSpPr>
-        <p:spPr>
-          <a:xfrm>
-            <a:off x="3840479" y="2560320"/>
-            <a:ext cx="1376172" cy="274320"/>
-          </a:xfrm>
-          <a:prstGeom prst="rect">
-            <a:avLst/>
-          </a:prstGeom>
-          <a:noFill/>
-        </p:spPr>
-        <p:txBody>
-          <a:bodyPr wrap="square" anchor="t" lIns="0" rIns="0" tIns="0" bIns="0">
-            <a:spAutoFit/>
-          </a:bodyPr>
-          <a:lstStyle/>
-          <a:p>
-            <a:pPr algn="ctr">
-              <a:lnSpc>
-                <a:spcPct val="100000"/>
-              </a:lnSpc>
-            </a:pPr>
-            <a:r>
-              <a:rPr sz="900" b="1">
-                <a:solidFill>
-                  <a:srgbClr val="8B97A5"/>
-                </a:solidFill>
-                <a:latin typeface="Calibri"/>
-              </a:rPr>
-              <a:t>GOLE +</a:t>
-            </a:r>
-          </a:p>
-        </p:txBody>
-      </p:sp>
-      <p:sp>
-        <p:nvSpPr>
-          <p:cNvPr id="22" name="TextBox 21"/>
-          <p:cNvSpPr txBox="1"/>
-          <p:nvPr/>
-        </p:nvSpPr>
-        <p:spPr>
-          <a:xfrm>
-            <a:off x="3840479" y="2816352"/>
-            <a:ext cx="1376172" cy="457200"/>
-          </a:xfrm>
-          <a:prstGeom prst="rect">
-            <a:avLst/>
-          </a:prstGeom>
-          <a:noFill/>
-        </p:spPr>
-        <p:txBody>
-          <a:bodyPr wrap="square" anchor="t" lIns="0" rIns="0" tIns="0" bIns="0">
-            <a:spAutoFit/>
-          </a:bodyPr>
-          <a:lstStyle/>
-          <a:p>
-            <a:pPr algn="ctr">
-              <a:lnSpc>
-                <a:spcPct val="100000"/>
-              </a:lnSpc>
-            </a:pPr>
-            <a:r>
-              <a:rPr sz="2200" b="1">
-                <a:solidFill>
-                  <a:srgbClr val="4CC9F0"/>
-                </a:solidFill>
-                <a:latin typeface="Calibri"/>
-              </a:rPr>
-              <a:t>214</a:t>
-            </a:r>
-          </a:p>
-        </p:txBody>
-      </p:sp>
-      <p:sp>
-        <p:nvSpPr>
-          <p:cNvPr id="23" name="Rounded Rectangle 22"/>
-          <p:cNvSpPr/>
-          <p:nvPr/>
-        </p:nvSpPr>
-        <p:spPr>
-          <a:xfrm>
-            <a:off x="5362955" y="2432304"/>
-            <a:ext cx="1376172" cy="914400"/>
-          </a:xfrm>
-          <a:prstGeom prst="roundRect">
-            <a:avLst>
-              <a:gd name="adj" fmla="val 10000"/>
-            </a:avLst>
-          </a:prstGeom>
-          <a:solidFill>
-            <a:srgbClr val="1A2332"/>
-          </a:solidFill>
-          <a:ln>
-            <a:noFill/>
-          </a:ln>
-          <a:effectLst/>
-        </p:spPr>
-        <p:style>
-          <a:lnRef idx="1">
-            <a:schemeClr val="accent1"/>
-          </a:lnRef>
-          <a:fillRef idx="3">
-            <a:schemeClr val="accent1"/>
-          </a:fillRef>
-          <a:effectRef idx="2">
-            <a:schemeClr val="accent1"/>
-          </a:effectRef>
-          <a:fontRef idx="minor">
-            <a:schemeClr val="lt1"/>
-          </a:fontRef>
-        </p:style>
-        <p:txBody>
-          <a:bodyPr rtlCol="0" anchor="ctr"/>
-          <a:lstStyle/>
-          <a:p>
-            <a:pPr algn="ctr"/>
-          </a:p>
-        </p:txBody>
-      </p:sp>
-      <p:sp>
-        <p:nvSpPr>
-          <p:cNvPr id="24" name="TextBox 23"/>
-          <p:cNvSpPr txBox="1"/>
-          <p:nvPr/>
-        </p:nvSpPr>
-        <p:spPr>
-          <a:xfrm>
-            <a:off x="5362955" y="2560320"/>
-            <a:ext cx="1376172" cy="274320"/>
-          </a:xfrm>
-          <a:prstGeom prst="rect">
-            <a:avLst/>
-          </a:prstGeom>
-          <a:noFill/>
-        </p:spPr>
-        <p:txBody>
-          <a:bodyPr wrap="square" anchor="t" lIns="0" rIns="0" tIns="0" bIns="0">
-            <a:spAutoFit/>
-          </a:bodyPr>
-          <a:lstStyle/>
-          <a:p>
-            <a:pPr algn="ctr">
-              <a:lnSpc>
-                <a:spcPct val="100000"/>
-              </a:lnSpc>
-            </a:pPr>
-            <a:r>
-              <a:rPr sz="900" b="1">
-                <a:solidFill>
-                  <a:srgbClr val="8B97A5"/>
-                </a:solidFill>
-                <a:latin typeface="Calibri"/>
-              </a:rPr>
-              <a:t>GOLE −</a:t>
-            </a:r>
-          </a:p>
-        </p:txBody>
-      </p:sp>
-      <p:sp>
-        <p:nvSpPr>
-          <p:cNvPr id="25" name="TextBox 24"/>
-          <p:cNvSpPr txBox="1"/>
-          <p:nvPr/>
-        </p:nvSpPr>
-        <p:spPr>
-          <a:xfrm>
-            <a:off x="5362955" y="2816352"/>
-            <a:ext cx="1376172" cy="457200"/>
-          </a:xfrm>
-          <a:prstGeom prst="rect">
-            <a:avLst/>
-          </a:prstGeom>
-          <a:noFill/>
-        </p:spPr>
-        <p:txBody>
-          <a:bodyPr wrap="square" anchor="t" lIns="0" rIns="0" tIns="0" bIns="0">
-            <a:spAutoFit/>
-          </a:bodyPr>
-          <a:lstStyle/>
-          <a:p>
-            <a:pPr algn="ctr">
-              <a:lnSpc>
-                <a:spcPct val="100000"/>
-              </a:lnSpc>
-            </a:pPr>
-            <a:r>
-              <a:rPr sz="2200" b="1">
-                <a:solidFill>
-                  <a:srgbClr val="4CC9F0"/>
-                </a:solidFill>
-                <a:latin typeface="Calibri"/>
-              </a:rPr>
-              <a:t>151</a:t>
-            </a:r>
-          </a:p>
-        </p:txBody>
-      </p:sp>
-      <p:sp>
-        <p:nvSpPr>
-          <p:cNvPr id="26" name="TextBox 25"/>
-          <p:cNvSpPr txBox="1"/>
-          <p:nvPr/>
-        </p:nvSpPr>
-        <p:spPr>
-          <a:xfrm>
-            <a:off x="795528" y="3621024"/>
-            <a:ext cx="3657600" cy="274320"/>
-          </a:xfrm>
-          <a:prstGeom prst="rect">
-            <a:avLst/>
-          </a:prstGeom>
-          <a:noFill/>
-        </p:spPr>
-        <p:txBody>
-          <a:bodyPr wrap="square" anchor="t" lIns="0" rIns="0" tIns="0" bIns="0">
-            <a:spAutoFit/>
-          </a:bodyPr>
-          <a:lstStyle/>
-          <a:p>
-            <a:pPr algn="l">
-              <a:lnSpc>
-                <a:spcPct val="100000"/>
-              </a:lnSpc>
-            </a:pPr>
-            <a:r>
-              <a:rPr sz="1000" b="1">
-                <a:solidFill>
-                  <a:srgbClr val="8B97A5"/>
-                </a:solidFill>
-                <a:latin typeface="Calibri"/>
-              </a:rPr>
-              <a:t>Forma — ostatnie 6</a:t>
-            </a:r>
-          </a:p>
-        </p:txBody>
-      </p:sp>
-      <p:sp>
-        <p:nvSpPr>
-          <p:cNvPr id="27" name="Rounded Rectangle 26"/>
-          <p:cNvSpPr/>
-          <p:nvPr/>
-        </p:nvSpPr>
-        <p:spPr>
-          <a:xfrm>
-            <a:off x="795528" y="3931920"/>
-            <a:ext cx="384048" cy="384048"/>
-          </a:xfrm>
-          <a:prstGeom prst="roundRect">
-            <a:avLst>
-              <a:gd name="adj" fmla="val 20000"/>
-            </a:avLst>
-          </a:prstGeom>
-          <a:solidFill>
-            <a:srgbClr val="51CF66"/>
-          </a:solidFill>
-          <a:ln>
-            <a:noFill/>
-          </a:ln>
-          <a:effectLst/>
-        </p:spPr>
-        <p:style>
-          <a:lnRef idx="1">
-            <a:schemeClr val="accent1"/>
-          </a:lnRef>
-          <a:fillRef idx="3">
-            <a:schemeClr val="accent1"/>
-          </a:fillRef>
-          <a:effectRef idx="2">
-            <a:schemeClr val="accent1"/>
-          </a:effectRef>
-          <a:fontRef idx="minor">
-            <a:schemeClr val="lt1"/>
-          </a:fontRef>
-        </p:style>
-        <p:txBody>
-          <a:bodyPr rtlCol="0" anchor="ctr"/>
-          <a:lstStyle/>
-          <a:p>
-            <a:pPr algn="ctr"/>
-          </a:p>
-        </p:txBody>
-      </p:sp>
-      <p:sp>
-        <p:nvSpPr>
-          <p:cNvPr id="28" name="TextBox 27"/>
-          <p:cNvSpPr txBox="1"/>
-          <p:nvPr/>
-        </p:nvSpPr>
-        <p:spPr>
-          <a:xfrm>
-            <a:off x="795528" y="3931920"/>
-            <a:ext cx="384048" cy="384048"/>
-          </a:xfrm>
-          <a:prstGeom prst="rect">
-            <a:avLst/>
-          </a:prstGeom>
-          <a:noFill/>
-        </p:spPr>
-        <p:txBody>
-          <a:bodyPr wrap="square" anchor="ctr" lIns="0" rIns="0" tIns="0" bIns="0">
-            <a:spAutoFit/>
-          </a:bodyPr>
-          <a:lstStyle/>
-          <a:p>
-            <a:pPr algn="ctr">
-              <a:lnSpc>
-                <a:spcPct val="100000"/>
-              </a:lnSpc>
-            </a:pPr>
-            <a:r>
-              <a:rPr sz="1200" b="1">
-                <a:solidFill>
-                  <a:srgbClr val="001018"/>
-                </a:solidFill>
-                <a:latin typeface="Calibri"/>
-              </a:rPr>
-              <a:t>W</a:t>
-            </a:r>
-          </a:p>
-        </p:txBody>
-      </p:sp>
-      <p:sp>
-        <p:nvSpPr>
-          <p:cNvPr id="29" name="Rounded Rectangle 28"/>
-          <p:cNvSpPr/>
-          <p:nvPr/>
-        </p:nvSpPr>
-        <p:spPr>
-          <a:xfrm>
-            <a:off x="1298448" y="3931920"/>
-            <a:ext cx="384048" cy="384048"/>
-          </a:xfrm>
-          <a:prstGeom prst="roundRect">
-            <a:avLst>
-              <a:gd name="adj" fmla="val 20000"/>
-            </a:avLst>
-          </a:prstGeom>
-          <a:solidFill>
-            <a:srgbClr val="51CF66"/>
-          </a:solidFill>
-          <a:ln>
-            <a:noFill/>
-          </a:ln>
-          <a:effectLst/>
-        </p:spPr>
-        <p:style>
-          <a:lnRef idx="1">
-            <a:schemeClr val="accent1"/>
-          </a:lnRef>
-          <a:fillRef idx="3">
-            <a:schemeClr val="accent1"/>
-          </a:fillRef>
-          <a:effectRef idx="2">
-            <a:schemeClr val="accent1"/>
-          </a:effectRef>
-          <a:fontRef idx="minor">
-            <a:schemeClr val="lt1"/>
-          </a:fontRef>
-        </p:style>
-        <p:txBody>
-          <a:bodyPr rtlCol="0" anchor="ctr"/>
-          <a:lstStyle/>
-          <a:p>
-            <a:pPr algn="ctr"/>
-          </a:p>
-        </p:txBody>
-      </p:sp>
-      <p:sp>
-        <p:nvSpPr>
-          <p:cNvPr id="30" name="TextBox 29"/>
-          <p:cNvSpPr txBox="1"/>
-          <p:nvPr/>
-        </p:nvSpPr>
-        <p:spPr>
-          <a:xfrm>
-            <a:off x="1298448" y="3931920"/>
-            <a:ext cx="384048" cy="384048"/>
-          </a:xfrm>
-          <a:prstGeom prst="rect">
-            <a:avLst/>
-          </a:prstGeom>
-          <a:noFill/>
-        </p:spPr>
-        <p:txBody>
-          <a:bodyPr wrap="square" anchor="ctr" lIns="0" rIns="0" tIns="0" bIns="0">
-            <a:spAutoFit/>
-          </a:bodyPr>
-          <a:lstStyle/>
-          <a:p>
-            <a:pPr algn="ctr">
-              <a:lnSpc>
-                <a:spcPct val="100000"/>
-              </a:lnSpc>
-            </a:pPr>
-            <a:r>
-              <a:rPr sz="1200" b="1">
-                <a:solidFill>
-                  <a:srgbClr val="001018"/>
-                </a:solidFill>
-                <a:latin typeface="Calibri"/>
-              </a:rPr>
-              <a:t>W</a:t>
-            </a:r>
-          </a:p>
-        </p:txBody>
-      </p:sp>
-      <p:sp>
-        <p:nvSpPr>
-          <p:cNvPr id="31" name="Rounded Rectangle 30"/>
-          <p:cNvSpPr/>
-          <p:nvPr/>
-        </p:nvSpPr>
-        <p:spPr>
-          <a:xfrm>
-            <a:off x="1801368" y="3931920"/>
-            <a:ext cx="384048" cy="384048"/>
-          </a:xfrm>
-          <a:prstGeom prst="roundRect">
-            <a:avLst>
-              <a:gd name="adj" fmla="val 20000"/>
-            </a:avLst>
-          </a:prstGeom>
-          <a:solidFill>
-            <a:srgbClr val="FF6B6B"/>
-          </a:solidFill>
-          <a:ln>
-            <a:noFill/>
-          </a:ln>
-          <a:effectLst/>
-        </p:spPr>
-        <p:style>
-          <a:lnRef idx="1">
-            <a:schemeClr val="accent1"/>
-          </a:lnRef>
-          <a:fillRef idx="3">
-            <a:schemeClr val="accent1"/>
-          </a:fillRef>
-          <a:effectRef idx="2">
-            <a:schemeClr val="accent1"/>
-          </a:effectRef>
-          <a:fontRef idx="minor">
-            <a:schemeClr val="lt1"/>
-          </a:fontRef>
-        </p:style>
-        <p:txBody>
-          <a:bodyPr rtlCol="0" anchor="ctr"/>
-          <a:lstStyle/>
-          <a:p>
-            <a:pPr algn="ctr"/>
-          </a:p>
-        </p:txBody>
-      </p:sp>
-      <p:sp>
-        <p:nvSpPr>
-          <p:cNvPr id="32" name="TextBox 31"/>
-          <p:cNvSpPr txBox="1"/>
-          <p:nvPr/>
-        </p:nvSpPr>
-        <p:spPr>
-          <a:xfrm>
-            <a:off x="1801368" y="3931920"/>
-            <a:ext cx="384048" cy="384048"/>
-          </a:xfrm>
-          <a:prstGeom prst="rect">
-            <a:avLst/>
-          </a:prstGeom>
-          <a:noFill/>
-        </p:spPr>
-        <p:txBody>
-          <a:bodyPr wrap="square" anchor="ctr" lIns="0" rIns="0" tIns="0" bIns="0">
-            <a:spAutoFit/>
-          </a:bodyPr>
-          <a:lstStyle/>
-          <a:p>
-            <a:pPr algn="ctr">
-              <a:lnSpc>
-                <a:spcPct val="100000"/>
-              </a:lnSpc>
-            </a:pPr>
-            <a:r>
-              <a:rPr sz="1200" b="1">
-                <a:solidFill>
-                  <a:srgbClr val="001018"/>
-                </a:solidFill>
-                <a:latin typeface="Calibri"/>
-              </a:rPr>
-              <a:t>P</a:t>
-            </a:r>
-          </a:p>
-        </p:txBody>
-      </p:sp>
-      <p:sp>
-        <p:nvSpPr>
-          <p:cNvPr id="33" name="Rounded Rectangle 32"/>
-          <p:cNvSpPr/>
-          <p:nvPr/>
-        </p:nvSpPr>
-        <p:spPr>
-          <a:xfrm>
-            <a:off x="2304288" y="3931920"/>
-            <a:ext cx="384048" cy="384048"/>
-          </a:xfrm>
-          <a:prstGeom prst="roundRect">
-            <a:avLst>
-              <a:gd name="adj" fmla="val 20000"/>
-            </a:avLst>
-          </a:prstGeom>
-          <a:solidFill>
-            <a:srgbClr val="51CF66"/>
-          </a:solidFill>
-          <a:ln>
-            <a:noFill/>
-          </a:ln>
-          <a:effectLst/>
-        </p:spPr>
-        <p:style>
-          <a:lnRef idx="1">
-            <a:schemeClr val="accent1"/>
-          </a:lnRef>
-          <a:fillRef idx="3">
-            <a:schemeClr val="accent1"/>
-          </a:fillRef>
-          <a:effectRef idx="2">
-            <a:schemeClr val="accent1"/>
-          </a:effectRef>
-          <a:fontRef idx="minor">
-            <a:schemeClr val="lt1"/>
-          </a:fontRef>
-        </p:style>
-        <p:txBody>
-          <a:bodyPr rtlCol="0" anchor="ctr"/>
-          <a:lstStyle/>
-          <a:p>
-            <a:pPr algn="ctr"/>
-          </a:p>
-        </p:txBody>
-      </p:sp>
-      <p:sp>
-        <p:nvSpPr>
-          <p:cNvPr id="34" name="TextBox 33"/>
-          <p:cNvSpPr txBox="1"/>
-          <p:nvPr/>
-        </p:nvSpPr>
-        <p:spPr>
-          <a:xfrm>
-            <a:off x="2304288" y="3931920"/>
-            <a:ext cx="384048" cy="384048"/>
-          </a:xfrm>
-          <a:prstGeom prst="rect">
-            <a:avLst/>
-          </a:prstGeom>
-          <a:noFill/>
-        </p:spPr>
-        <p:txBody>
-          <a:bodyPr wrap="square" anchor="ctr" lIns="0" rIns="0" tIns="0" bIns="0">
-            <a:spAutoFit/>
-          </a:bodyPr>
-          <a:lstStyle/>
-          <a:p>
-            <a:pPr algn="ctr">
-              <a:lnSpc>
-                <a:spcPct val="100000"/>
-              </a:lnSpc>
-            </a:pPr>
-            <a:r>
-              <a:rPr sz="1200" b="1">
-                <a:solidFill>
-                  <a:srgbClr val="001018"/>
-                </a:solidFill>
-                <a:latin typeface="Calibri"/>
-              </a:rPr>
-              <a:t>W</a:t>
-            </a:r>
-          </a:p>
-        </p:txBody>
-      </p:sp>
-      <p:sp>
-        <p:nvSpPr>
-          <p:cNvPr id="35" name="Rounded Rectangle 34"/>
-          <p:cNvSpPr/>
-          <p:nvPr/>
-        </p:nvSpPr>
-        <p:spPr>
-          <a:xfrm>
-            <a:off x="2807208" y="3931920"/>
-            <a:ext cx="384048" cy="384048"/>
-          </a:xfrm>
-          <a:prstGeom prst="roundRect">
-            <a:avLst>
-              <a:gd name="adj" fmla="val 20000"/>
-            </a:avLst>
-          </a:prstGeom>
-          <a:solidFill>
-            <a:srgbClr val="FFD43B"/>
-          </a:solidFill>
-          <a:ln>
-            <a:noFill/>
-          </a:ln>
-          <a:effectLst/>
-        </p:spPr>
-        <p:style>
-          <a:lnRef idx="1">
-            <a:schemeClr val="accent1"/>
-          </a:lnRef>
-          <a:fillRef idx="3">
-            <a:schemeClr val="accent1"/>
-          </a:fillRef>
-          <a:effectRef idx="2">
-            <a:schemeClr val="accent1"/>
-          </a:effectRef>
-          <a:fontRef idx="minor">
-            <a:schemeClr val="lt1"/>
-          </a:fontRef>
-        </p:style>
-        <p:txBody>
-          <a:bodyPr rtlCol="0" anchor="ctr"/>
-          <a:lstStyle/>
-          <a:p>
-            <a:pPr algn="ctr"/>
-          </a:p>
-        </p:txBody>
-      </p:sp>
-      <p:sp>
-        <p:nvSpPr>
-          <p:cNvPr id="36" name="TextBox 35"/>
-          <p:cNvSpPr txBox="1"/>
-          <p:nvPr/>
-        </p:nvSpPr>
-        <p:spPr>
-          <a:xfrm>
-            <a:off x="2807208" y="3931920"/>
-            <a:ext cx="384048" cy="384048"/>
-          </a:xfrm>
-          <a:prstGeom prst="rect">
-            <a:avLst/>
-          </a:prstGeom>
-          <a:noFill/>
-        </p:spPr>
-        <p:txBody>
-          <a:bodyPr wrap="square" anchor="ctr" lIns="0" rIns="0" tIns="0" bIns="0">
-            <a:spAutoFit/>
-          </a:bodyPr>
-          <a:lstStyle/>
-          <a:p>
-            <a:pPr algn="ctr">
-              <a:lnSpc>
-                <a:spcPct val="100000"/>
-              </a:lnSpc>
-            </a:pPr>
-            <a:r>
-              <a:rPr sz="1200" b="1">
-                <a:solidFill>
-                  <a:srgbClr val="001018"/>
-                </a:solidFill>
-                <a:latin typeface="Calibri"/>
-              </a:rPr>
-              <a:t>R</a:t>
-            </a:r>
-          </a:p>
-        </p:txBody>
-      </p:sp>
-      <p:sp>
-        <p:nvSpPr>
-          <p:cNvPr id="37" name="Rounded Rectangle 36"/>
-          <p:cNvSpPr/>
-          <p:nvPr/>
-        </p:nvSpPr>
-        <p:spPr>
-          <a:xfrm>
-            <a:off x="3310128" y="3931920"/>
-            <a:ext cx="384048" cy="384048"/>
-          </a:xfrm>
-          <a:prstGeom prst="roundRect">
-            <a:avLst>
-              <a:gd name="adj" fmla="val 20000"/>
-            </a:avLst>
-          </a:prstGeom>
-          <a:solidFill>
-            <a:srgbClr val="51CF66"/>
-          </a:solidFill>
-          <a:ln>
-            <a:noFill/>
-          </a:ln>
-          <a:effectLst/>
-        </p:spPr>
-        <p:style>
-          <a:lnRef idx="1">
-            <a:schemeClr val="accent1"/>
-          </a:lnRef>
-          <a:fillRef idx="3">
-            <a:schemeClr val="accent1"/>
-          </a:fillRef>
-          <a:effectRef idx="2">
-            <a:schemeClr val="accent1"/>
-          </a:effectRef>
-          <a:fontRef idx="minor">
-            <a:schemeClr val="lt1"/>
-          </a:fontRef>
-        </p:style>
-        <p:txBody>
-          <a:bodyPr rtlCol="0" anchor="ctr"/>
-          <a:lstStyle/>
-          <a:p>
-            <a:pPr algn="ctr"/>
-          </a:p>
-        </p:txBody>
-      </p:sp>
-      <p:sp>
-        <p:nvSpPr>
-          <p:cNvPr id="38" name="TextBox 37"/>
-          <p:cNvSpPr txBox="1"/>
-          <p:nvPr/>
-        </p:nvSpPr>
-        <p:spPr>
-          <a:xfrm>
-            <a:off x="3310128" y="3931920"/>
-            <a:ext cx="384048" cy="384048"/>
-          </a:xfrm>
-          <a:prstGeom prst="rect">
-            <a:avLst/>
-          </a:prstGeom>
-          <a:noFill/>
-        </p:spPr>
-        <p:txBody>
-          <a:bodyPr wrap="square" anchor="ctr" lIns="0" rIns="0" tIns="0" bIns="0">
-            <a:spAutoFit/>
-          </a:bodyPr>
-          <a:lstStyle/>
-          <a:p>
-            <a:pPr algn="ctr">
-              <a:lnSpc>
-                <a:spcPct val="100000"/>
-              </a:lnSpc>
-            </a:pPr>
-            <a:r>
-              <a:rPr sz="1200" b="1">
-                <a:solidFill>
-                  <a:srgbClr val="001018"/>
-                </a:solidFill>
-                <a:latin typeface="Calibri"/>
-              </a:rPr>
-              <a:t>W</a:t>
-            </a:r>
-          </a:p>
-        </p:txBody>
-      </p:sp>
-      <p:sp>
-        <p:nvSpPr>
-          <p:cNvPr id="39" name="TextBox 38"/>
-          <p:cNvSpPr txBox="1"/>
-          <p:nvPr/>
-        </p:nvSpPr>
-        <p:spPr>
-          <a:xfrm>
-            <a:off x="4407408" y="3621024"/>
-            <a:ext cx="3657600" cy="274320"/>
-          </a:xfrm>
-          <a:prstGeom prst="rect">
-            <a:avLst/>
-          </a:prstGeom>
-          <a:noFill/>
-        </p:spPr>
-        <p:txBody>
-          <a:bodyPr wrap="square" anchor="t" lIns="0" rIns="0" tIns="0" bIns="0">
-            <a:spAutoFit/>
-          </a:bodyPr>
-          <a:lstStyle/>
-          <a:p>
-            <a:pPr algn="l">
-              <a:lnSpc>
-                <a:spcPct val="100000"/>
-              </a:lnSpc>
-            </a:pPr>
-            <a:r>
-              <a:rPr sz="1000" b="1">
-                <a:solidFill>
-                  <a:srgbClr val="8B97A5"/>
-                </a:solidFill>
-                <a:latin typeface="Calibri"/>
-              </a:rPr>
-              <a:t>Najlepsi strzelcy</a:t>
-            </a:r>
-          </a:p>
-        </p:txBody>
-      </p:sp>
-      <p:sp>
-        <p:nvSpPr>
-          <p:cNvPr id="40" name="Rounded Rectangle 39"/>
-          <p:cNvSpPr/>
-          <p:nvPr/>
-        </p:nvSpPr>
-        <p:spPr>
-          <a:xfrm>
-            <a:off x="4407408" y="3931920"/>
-            <a:ext cx="2194560" cy="310896"/>
-          </a:xfrm>
-          <a:prstGeom prst="roundRect">
-            <a:avLst>
-              <a:gd name="adj" fmla="val 16000"/>
-            </a:avLst>
-          </a:prstGeom>
-          <a:solidFill>
-            <a:srgbClr val="1A2332"/>
-          </a:solidFill>
-          <a:ln>
-            <a:noFill/>
-          </a:ln>
-          <a:effectLst/>
-        </p:spPr>
-        <p:style>
-          <a:lnRef idx="1">
-            <a:schemeClr val="accent1"/>
-          </a:lnRef>
-          <a:fillRef idx="3">
-            <a:schemeClr val="accent1"/>
-          </a:fillRef>
-          <a:effectRef idx="2">
-            <a:schemeClr val="accent1"/>
-          </a:effectRef>
-          <a:fontRef idx="minor">
-            <a:schemeClr val="lt1"/>
-          </a:fontRef>
-        </p:style>
-        <p:txBody>
-          <a:bodyPr rtlCol="0" anchor="ctr"/>
-          <a:lstStyle/>
-          <a:p>
-            <a:pPr algn="ctr"/>
-          </a:p>
-        </p:txBody>
-      </p:sp>
-      <p:sp>
-        <p:nvSpPr>
-          <p:cNvPr id="41" name="TextBox 40"/>
-          <p:cNvSpPr txBox="1"/>
-          <p:nvPr/>
-        </p:nvSpPr>
-        <p:spPr>
-          <a:xfrm>
-            <a:off x="4590288" y="3931920"/>
-            <a:ext cx="1280160" cy="310896"/>
-          </a:xfrm>
-          <a:prstGeom prst="rect">
-            <a:avLst/>
-          </a:prstGeom>
-          <a:noFill/>
-        </p:spPr>
-        <p:txBody>
-          <a:bodyPr wrap="square" anchor="ctr" lIns="0" rIns="0" tIns="0" bIns="0">
-            <a:spAutoFit/>
-          </a:bodyPr>
-          <a:lstStyle/>
-          <a:p>
-            <a:pPr algn="l">
-              <a:lnSpc>
-                <a:spcPct val="100000"/>
-              </a:lnSpc>
-            </a:pPr>
-            <a:r>
-              <a:rPr sz="1100" b="0">
-                <a:solidFill>
-                  <a:srgbClr val="E6EDF3"/>
-                </a:solidFill>
-                <a:latin typeface="Calibri"/>
-              </a:rPr>
-              <a:t>#12 Kowalski</a:t>
-            </a:r>
-          </a:p>
-        </p:txBody>
-      </p:sp>
-      <p:sp>
-        <p:nvSpPr>
-          <p:cNvPr id="42" name="TextBox 41"/>
-          <p:cNvSpPr txBox="1"/>
-          <p:nvPr/>
-        </p:nvSpPr>
-        <p:spPr>
-          <a:xfrm>
-            <a:off x="5779008" y="3931920"/>
-            <a:ext cx="822960" cy="310896"/>
-          </a:xfrm>
-          <a:prstGeom prst="rect">
-            <a:avLst/>
-          </a:prstGeom>
-          <a:noFill/>
-        </p:spPr>
-        <p:txBody>
-          <a:bodyPr wrap="square" anchor="ctr" lIns="0" rIns="0" tIns="0" bIns="0">
-            <a:spAutoFit/>
-          </a:bodyPr>
-          <a:lstStyle/>
-          <a:p>
-            <a:pPr algn="r">
-              <a:lnSpc>
-                <a:spcPct val="100000"/>
-              </a:lnSpc>
-            </a:pPr>
-            <a:r>
-              <a:rPr sz="1100" b="1">
-                <a:solidFill>
-                  <a:srgbClr val="4CC9F0"/>
-                </a:solidFill>
-                <a:latin typeface="Calibri"/>
-              </a:rPr>
-              <a:t>41</a:t>
-            </a:r>
-          </a:p>
-        </p:txBody>
-      </p:sp>
-      <p:sp>
-        <p:nvSpPr>
-          <p:cNvPr id="43" name="Rounded Rectangle 42"/>
-          <p:cNvSpPr/>
-          <p:nvPr/>
-        </p:nvSpPr>
-        <p:spPr>
-          <a:xfrm>
-            <a:off x="4407408" y="4315968"/>
-            <a:ext cx="2194560" cy="310896"/>
-          </a:xfrm>
-          <a:prstGeom prst="roundRect">
-            <a:avLst>
-              <a:gd name="adj" fmla="val 16000"/>
-            </a:avLst>
-          </a:prstGeom>
-          <a:solidFill>
-            <a:srgbClr val="1A2332"/>
-          </a:solidFill>
-          <a:ln>
-            <a:noFill/>
-          </a:ln>
-          <a:effectLst/>
-        </p:spPr>
-        <p:style>
-          <a:lnRef idx="1">
-            <a:schemeClr val="accent1"/>
-          </a:lnRef>
-          <a:fillRef idx="3">
-            <a:schemeClr val="accent1"/>
-          </a:fillRef>
-          <a:effectRef idx="2">
-            <a:schemeClr val="accent1"/>
-          </a:effectRef>
-          <a:fontRef idx="minor">
-            <a:schemeClr val="lt1"/>
-          </a:fontRef>
-        </p:style>
-        <p:txBody>
-          <a:bodyPr rtlCol="0" anchor="ctr"/>
-          <a:lstStyle/>
-          <a:p>
-            <a:pPr algn="ctr"/>
-          </a:p>
-        </p:txBody>
-      </p:sp>
-      <p:sp>
-        <p:nvSpPr>
-          <p:cNvPr id="44" name="TextBox 43"/>
-          <p:cNvSpPr txBox="1"/>
-          <p:nvPr/>
-        </p:nvSpPr>
-        <p:spPr>
-          <a:xfrm>
-            <a:off x="4590288" y="4315968"/>
-            <a:ext cx="1280160" cy="310896"/>
-          </a:xfrm>
-          <a:prstGeom prst="rect">
-            <a:avLst/>
-          </a:prstGeom>
-          <a:noFill/>
-        </p:spPr>
-        <p:txBody>
-          <a:bodyPr wrap="square" anchor="ctr" lIns="0" rIns="0" tIns="0" bIns="0">
-            <a:spAutoFit/>
-          </a:bodyPr>
-          <a:lstStyle/>
-          <a:p>
-            <a:pPr algn="l">
-              <a:lnSpc>
-                <a:spcPct val="100000"/>
-              </a:lnSpc>
-            </a:pPr>
-            <a:r>
-              <a:rPr sz="1100" b="0">
-                <a:solidFill>
-                  <a:srgbClr val="E6EDF3"/>
-                </a:solidFill>
-                <a:latin typeface="Calibri"/>
-              </a:rPr>
-              <a:t>#7 Nowak</a:t>
-            </a:r>
-          </a:p>
-        </p:txBody>
-      </p:sp>
-      <p:sp>
-        <p:nvSpPr>
-          <p:cNvPr id="45" name="TextBox 44"/>
-          <p:cNvSpPr txBox="1"/>
-          <p:nvPr/>
-        </p:nvSpPr>
-        <p:spPr>
-          <a:xfrm>
-            <a:off x="5779008" y="4315968"/>
-            <a:ext cx="822960" cy="310896"/>
-          </a:xfrm>
-          <a:prstGeom prst="rect">
-            <a:avLst/>
-          </a:prstGeom>
-          <a:noFill/>
-        </p:spPr>
-        <p:txBody>
-          <a:bodyPr wrap="square" anchor="ctr" lIns="0" rIns="0" tIns="0" bIns="0">
-            <a:spAutoFit/>
-          </a:bodyPr>
-          <a:lstStyle/>
-          <a:p>
-            <a:pPr algn="r">
-              <a:lnSpc>
-                <a:spcPct val="100000"/>
-              </a:lnSpc>
-            </a:pPr>
-            <a:r>
-              <a:rPr sz="1100" b="1">
-                <a:solidFill>
-                  <a:srgbClr val="4CC9F0"/>
-                </a:solidFill>
-                <a:latin typeface="Calibri"/>
-              </a:rPr>
-              <a:t>33</a:t>
-            </a:r>
-          </a:p>
-        </p:txBody>
-      </p:sp>
-      <p:sp>
-        <p:nvSpPr>
-          <p:cNvPr id="46" name="Rounded Rectangle 45"/>
-          <p:cNvSpPr/>
-          <p:nvPr/>
-        </p:nvSpPr>
-        <p:spPr>
-          <a:xfrm>
-            <a:off x="4407408" y="4700016"/>
-            <a:ext cx="2194560" cy="310896"/>
-          </a:xfrm>
-          <a:prstGeom prst="roundRect">
-            <a:avLst>
-              <a:gd name="adj" fmla="val 16000"/>
-            </a:avLst>
-          </a:prstGeom>
-          <a:solidFill>
-            <a:srgbClr val="1A2332"/>
-          </a:solidFill>
-          <a:ln>
-            <a:noFill/>
-          </a:ln>
-          <a:effectLst/>
-        </p:spPr>
-        <p:style>
-          <a:lnRef idx="1">
-            <a:schemeClr val="accent1"/>
-          </a:lnRef>
-          <a:fillRef idx="3">
-            <a:schemeClr val="accent1"/>
-          </a:fillRef>
-          <a:effectRef idx="2">
-            <a:schemeClr val="accent1"/>
-          </a:effectRef>
-          <a:fontRef idx="minor">
-            <a:schemeClr val="lt1"/>
-          </a:fontRef>
-        </p:style>
-        <p:txBody>
-          <a:bodyPr rtlCol="0" anchor="ctr"/>
-          <a:lstStyle/>
-          <a:p>
-            <a:pPr algn="ctr"/>
-          </a:p>
-        </p:txBody>
-      </p:sp>
-      <p:sp>
-        <p:nvSpPr>
-          <p:cNvPr id="47" name="TextBox 46"/>
-          <p:cNvSpPr txBox="1"/>
-          <p:nvPr/>
-        </p:nvSpPr>
-        <p:spPr>
-          <a:xfrm>
-            <a:off x="4590288" y="4700016"/>
-            <a:ext cx="1280160" cy="310896"/>
-          </a:xfrm>
-          <a:prstGeom prst="rect">
-            <a:avLst/>
-          </a:prstGeom>
-          <a:noFill/>
-        </p:spPr>
-        <p:txBody>
-          <a:bodyPr wrap="square" anchor="ctr" lIns="0" rIns="0" tIns="0" bIns="0">
-            <a:spAutoFit/>
-          </a:bodyPr>
-          <a:lstStyle/>
-          <a:p>
-            <a:pPr algn="l">
-              <a:lnSpc>
-                <a:spcPct val="100000"/>
-              </a:lnSpc>
-            </a:pPr>
-            <a:r>
-              <a:rPr sz="1100" b="0">
-                <a:solidFill>
-                  <a:srgbClr val="E6EDF3"/>
-                </a:solidFill>
-                <a:latin typeface="Calibri"/>
-              </a:rPr>
-              <a:t>#9 Wiśniewski</a:t>
-            </a:r>
-          </a:p>
-        </p:txBody>
-      </p:sp>
-      <p:sp>
-        <p:nvSpPr>
-          <p:cNvPr id="48" name="TextBox 47"/>
-          <p:cNvSpPr txBox="1"/>
-          <p:nvPr/>
-        </p:nvSpPr>
-        <p:spPr>
-          <a:xfrm>
-            <a:off x="5779008" y="4700016"/>
-            <a:ext cx="822960" cy="310896"/>
-          </a:xfrm>
-          <a:prstGeom prst="rect">
-            <a:avLst/>
-          </a:prstGeom>
-          <a:noFill/>
-        </p:spPr>
-        <p:txBody>
-          <a:bodyPr wrap="square" anchor="ctr" lIns="0" rIns="0" tIns="0" bIns="0">
-            <a:spAutoFit/>
-          </a:bodyPr>
-          <a:lstStyle/>
-          <a:p>
-            <a:pPr algn="r">
-              <a:lnSpc>
-                <a:spcPct val="100000"/>
-              </a:lnSpc>
-            </a:pPr>
-            <a:r>
-              <a:rPr sz="1100" b="1">
-                <a:solidFill>
-                  <a:srgbClr val="4CC9F0"/>
-                </a:solidFill>
-                <a:latin typeface="Calibri"/>
-              </a:rPr>
-              <a:t>28</a:t>
-            </a:r>
-          </a:p>
-        </p:txBody>
-      </p:sp>
-      <p:sp>
-        <p:nvSpPr>
-          <p:cNvPr id="49" name="TextBox 48"/>
           <p:cNvSpPr txBox="1"/>
           <p:nvPr/>
         </p:nvSpPr>
@@ -6185,28 +4799,50 @@
           </a:p>
         </p:txBody>
       </p:sp>
-      <p:sp>
-        <p:nvSpPr>
-          <p:cNvPr id="14" name="Rounded Rectangle 13"/>
+      <p:pic>
+        <p:nvPicPr>
+          <p:cNvPr id="14" name="Picture 13" descr="mvp.png"/>
+          <p:cNvPicPr>
+            <a:picLocks noChangeAspect="1"/>
+          </p:cNvPicPr>
+          <p:nvPr/>
+        </p:nvPicPr>
+        <p:blipFill>
+          <a:blip r:embed="rId2"/>
+          <a:stretch>
+            <a:fillRect/>
+          </a:stretch>
+        </p:blipFill>
+        <p:spPr>
+          <a:xfrm>
+            <a:off x="676656" y="2415844"/>
+            <a:ext cx="5541264" cy="3324758"/>
+          </a:xfrm>
+          <a:prstGeom prst="rect">
+            <a:avLst/>
+          </a:prstGeom>
+        </p:spPr>
+      </p:pic>
+      <p:sp>
+        <p:nvSpPr>
+          <p:cNvPr id="15" name="Rounded Rectangle 14"/>
           <p:cNvSpPr/>
           <p:nvPr/>
         </p:nvSpPr>
         <p:spPr>
           <a:xfrm>
-            <a:off x="795528" y="2432304"/>
-            <a:ext cx="5303520" cy="1143000"/>
+            <a:off x="676656" y="2415844"/>
+            <a:ext cx="5541264" cy="3324758"/>
           </a:xfrm>
           <a:prstGeom prst="roundRect">
             <a:avLst>
-              <a:gd name="adj" fmla="val 8000"/>
+              <a:gd name="adj" fmla="val 1500"/>
             </a:avLst>
           </a:prstGeom>
-          <a:solidFill>
-            <a:srgbClr val="102A33"/>
-          </a:solidFill>
-          <a:ln w="15875">
+          <a:noFill/>
+          <a:ln w="9525">
             <a:solidFill>
-              <a:srgbClr val="4CC9F0"/>
+              <a:srgbClr val="1E2D3D"/>
             </a:solidFill>
           </a:ln>
           <a:effectLst/>
@@ -6235,625 +4871,7 @@
       </p:sp>
       <p:sp>
         <p:nvSpPr>
-          <p:cNvPr id="15" name="Oval 14"/>
-          <p:cNvSpPr/>
-          <p:nvPr/>
-        </p:nvSpPr>
-        <p:spPr>
-          <a:xfrm>
-            <a:off x="1024128" y="2724912"/>
-            <a:ext cx="566928" cy="566928"/>
-          </a:xfrm>
-          <a:prstGeom prst="ellipse">
-            <a:avLst/>
-          </a:prstGeom>
-          <a:solidFill>
-            <a:srgbClr val="4CC9F0"/>
-          </a:solidFill>
-          <a:ln>
-            <a:noFill/>
-          </a:ln>
-          <a:effectLst/>
-        </p:spPr>
-        <p:style>
-          <a:lnRef idx="1">
-            <a:schemeClr val="accent1"/>
-          </a:lnRef>
-          <a:fillRef idx="3">
-            <a:schemeClr val="accent1"/>
-          </a:fillRef>
-          <a:effectRef idx="2">
-            <a:schemeClr val="accent1"/>
-          </a:effectRef>
-          <a:fontRef idx="minor">
-            <a:schemeClr val="lt1"/>
-          </a:fontRef>
-        </p:style>
-        <p:txBody>
-          <a:bodyPr rtlCol="0" anchor="ctr"/>
-          <a:lstStyle/>
-          <a:p>
-            <a:pPr algn="ctr"/>
-          </a:p>
-        </p:txBody>
-      </p:sp>
-      <p:sp>
-        <p:nvSpPr>
           <p:cNvPr id="16" name="TextBox 15"/>
-          <p:cNvSpPr txBox="1"/>
-          <p:nvPr/>
-        </p:nvSpPr>
-        <p:spPr>
-          <a:xfrm>
-            <a:off x="1024128" y="2724912"/>
-            <a:ext cx="566928" cy="566928"/>
-          </a:xfrm>
-          <a:prstGeom prst="rect">
-            <a:avLst/>
-          </a:prstGeom>
-          <a:noFill/>
-        </p:spPr>
-        <p:txBody>
-          <a:bodyPr wrap="square" anchor="ctr" lIns="0" rIns="0" tIns="0" bIns="0">
-            <a:spAutoFit/>
-          </a:bodyPr>
-          <a:lstStyle/>
-          <a:p>
-            <a:pPr algn="ctr">
-              <a:lnSpc>
-                <a:spcPct val="100000"/>
-              </a:lnSpc>
-            </a:pPr>
-            <a:r>
-              <a:rPr sz="2200" b="1">
-                <a:solidFill>
-                  <a:srgbClr val="001018"/>
-                </a:solidFill>
-                <a:latin typeface="Calibri"/>
-              </a:rPr>
-              <a:t>★</a:t>
-            </a:r>
-          </a:p>
-        </p:txBody>
-      </p:sp>
-      <p:sp>
-        <p:nvSpPr>
-          <p:cNvPr id="17" name="TextBox 16"/>
-          <p:cNvSpPr txBox="1"/>
-          <p:nvPr/>
-        </p:nvSpPr>
-        <p:spPr>
-          <a:xfrm>
-            <a:off x="1755648" y="2688336"/>
-            <a:ext cx="3931920" cy="457200"/>
-          </a:xfrm>
-          <a:prstGeom prst="rect">
-            <a:avLst/>
-          </a:prstGeom>
-          <a:noFill/>
-        </p:spPr>
-        <p:txBody>
-          <a:bodyPr wrap="square" anchor="t" lIns="0" rIns="0" tIns="0" bIns="0">
-            <a:spAutoFit/>
-          </a:bodyPr>
-          <a:lstStyle/>
-          <a:p>
-            <a:pPr algn="l">
-              <a:lnSpc>
-                <a:spcPct val="100000"/>
-              </a:lnSpc>
-            </a:pPr>
-            <a:r>
-              <a:rPr sz="1800" b="1">
-                <a:solidFill>
-                  <a:srgbClr val="E6EDF3"/>
-                </a:solidFill>
-                <a:latin typeface="Calibri"/>
-              </a:rPr>
-              <a:t>#12 Jan Kowalski</a:t>
-            </a:r>
-          </a:p>
-        </p:txBody>
-      </p:sp>
-      <p:sp>
-        <p:nvSpPr>
-          <p:cNvPr id="18" name="TextBox 17"/>
-          <p:cNvSpPr txBox="1"/>
-          <p:nvPr/>
-        </p:nvSpPr>
-        <p:spPr>
-          <a:xfrm>
-            <a:off x="1755648" y="3090672"/>
-            <a:ext cx="3931920" cy="365760"/>
-          </a:xfrm>
-          <a:prstGeom prst="rect">
-            <a:avLst/>
-          </a:prstGeom>
-          <a:noFill/>
-        </p:spPr>
-        <p:txBody>
-          <a:bodyPr wrap="square" anchor="t" lIns="0" rIns="0" tIns="0" bIns="0">
-            <a:spAutoFit/>
-          </a:bodyPr>
-          <a:lstStyle/>
-          <a:p>
-            <a:pPr algn="l">
-              <a:lnSpc>
-                <a:spcPct val="100000"/>
-              </a:lnSpc>
-            </a:pPr>
-            <a:r>
-              <a:rPr sz="1200" b="0">
-                <a:solidFill>
-                  <a:srgbClr val="8B97A5"/>
-                </a:solidFill>
-                <a:latin typeface="Calibri"/>
-              </a:rPr>
-              <a:t>3 gole · 2 asysty · 4 przejęcia</a:t>
-            </a:r>
-          </a:p>
-        </p:txBody>
-      </p:sp>
-      <p:sp>
-        <p:nvSpPr>
-          <p:cNvPr id="19" name="Rounded Rectangle 18"/>
-          <p:cNvSpPr/>
-          <p:nvPr/>
-        </p:nvSpPr>
-        <p:spPr>
-          <a:xfrm>
-            <a:off x="4956048" y="2843784"/>
-            <a:ext cx="914400" cy="457200"/>
-          </a:xfrm>
-          <a:prstGeom prst="roundRect">
-            <a:avLst>
-              <a:gd name="adj" fmla="val 20000"/>
-            </a:avLst>
-          </a:prstGeom>
-          <a:solidFill>
-            <a:srgbClr val="4CC9F0"/>
-          </a:solidFill>
-          <a:ln>
-            <a:noFill/>
-          </a:ln>
-          <a:effectLst/>
-        </p:spPr>
-        <p:style>
-          <a:lnRef idx="1">
-            <a:schemeClr val="accent1"/>
-          </a:lnRef>
-          <a:fillRef idx="3">
-            <a:schemeClr val="accent1"/>
-          </a:fillRef>
-          <a:effectRef idx="2">
-            <a:schemeClr val="accent1"/>
-          </a:effectRef>
-          <a:fontRef idx="minor">
-            <a:schemeClr val="lt1"/>
-          </a:fontRef>
-        </p:style>
-        <p:txBody>
-          <a:bodyPr rtlCol="0" anchor="ctr"/>
-          <a:lstStyle/>
-          <a:p>
-            <a:pPr algn="ctr"/>
-          </a:p>
-        </p:txBody>
-      </p:sp>
-      <p:sp>
-        <p:nvSpPr>
-          <p:cNvPr id="20" name="TextBox 19"/>
-          <p:cNvSpPr txBox="1"/>
-          <p:nvPr/>
-        </p:nvSpPr>
-        <p:spPr>
-          <a:xfrm>
-            <a:off x="4956048" y="2843784"/>
-            <a:ext cx="914400" cy="457200"/>
-          </a:xfrm>
-          <a:prstGeom prst="rect">
-            <a:avLst/>
-          </a:prstGeom>
-          <a:noFill/>
-        </p:spPr>
-        <p:txBody>
-          <a:bodyPr wrap="square" anchor="ctr" lIns="0" rIns="0" tIns="0" bIns="0">
-            <a:spAutoFit/>
-          </a:bodyPr>
-          <a:lstStyle/>
-          <a:p>
-            <a:pPr algn="ctr">
-              <a:lnSpc>
-                <a:spcPct val="100000"/>
-              </a:lnSpc>
-            </a:pPr>
-            <a:r>
-              <a:rPr sz="1500" b="1">
-                <a:solidFill>
-                  <a:srgbClr val="001018"/>
-                </a:solidFill>
-                <a:latin typeface="Calibri"/>
-              </a:rPr>
-              <a:t>98 pkt</a:t>
-            </a:r>
-          </a:p>
-        </p:txBody>
-      </p:sp>
-      <p:sp>
-        <p:nvSpPr>
-          <p:cNvPr id="21" name="Rounded Rectangle 20"/>
-          <p:cNvSpPr/>
-          <p:nvPr/>
-        </p:nvSpPr>
-        <p:spPr>
-          <a:xfrm>
-            <a:off x="795528" y="3758184"/>
-            <a:ext cx="5303520" cy="384048"/>
-          </a:xfrm>
-          <a:prstGeom prst="roundRect">
-            <a:avLst>
-              <a:gd name="adj" fmla="val 14000"/>
-            </a:avLst>
-          </a:prstGeom>
-          <a:solidFill>
-            <a:srgbClr val="1A2332"/>
-          </a:solidFill>
-          <a:ln>
-            <a:noFill/>
-          </a:ln>
-          <a:effectLst/>
-        </p:spPr>
-        <p:style>
-          <a:lnRef idx="1">
-            <a:schemeClr val="accent1"/>
-          </a:lnRef>
-          <a:fillRef idx="3">
-            <a:schemeClr val="accent1"/>
-          </a:fillRef>
-          <a:effectRef idx="2">
-            <a:schemeClr val="accent1"/>
-          </a:effectRef>
-          <a:fontRef idx="minor">
-            <a:schemeClr val="lt1"/>
-          </a:fontRef>
-        </p:style>
-        <p:txBody>
-          <a:bodyPr rtlCol="0" anchor="ctr"/>
-          <a:lstStyle/>
-          <a:p>
-            <a:pPr algn="ctr"/>
-          </a:p>
-        </p:txBody>
-      </p:sp>
-      <p:sp>
-        <p:nvSpPr>
-          <p:cNvPr id="22" name="TextBox 21"/>
-          <p:cNvSpPr txBox="1"/>
-          <p:nvPr/>
-        </p:nvSpPr>
-        <p:spPr>
-          <a:xfrm>
-            <a:off x="978408" y="3758184"/>
-            <a:ext cx="3931920" cy="384048"/>
-          </a:xfrm>
-          <a:prstGeom prst="rect">
-            <a:avLst/>
-          </a:prstGeom>
-          <a:noFill/>
-        </p:spPr>
-        <p:txBody>
-          <a:bodyPr wrap="square" anchor="ctr" lIns="0" rIns="0" tIns="0" bIns="0">
-            <a:spAutoFit/>
-          </a:bodyPr>
-          <a:lstStyle/>
-          <a:p>
-            <a:pPr algn="l">
-              <a:lnSpc>
-                <a:spcPct val="100000"/>
-              </a:lnSpc>
-            </a:pPr>
-            <a:r>
-              <a:rPr sz="1200" b="0">
-                <a:solidFill>
-                  <a:srgbClr val="E6EDF3"/>
-                </a:solidFill>
-                <a:latin typeface="Calibri"/>
-              </a:rPr>
-              <a:t>2.  #7 Nowak</a:t>
-            </a:r>
-          </a:p>
-        </p:txBody>
-      </p:sp>
-      <p:sp>
-        <p:nvSpPr>
-          <p:cNvPr id="23" name="TextBox 22"/>
-          <p:cNvSpPr txBox="1"/>
-          <p:nvPr/>
-        </p:nvSpPr>
-        <p:spPr>
-          <a:xfrm>
-            <a:off x="5047488" y="3758184"/>
-            <a:ext cx="914400" cy="384048"/>
-          </a:xfrm>
-          <a:prstGeom prst="rect">
-            <a:avLst/>
-          </a:prstGeom>
-          <a:noFill/>
-        </p:spPr>
-        <p:txBody>
-          <a:bodyPr wrap="square" anchor="ctr" lIns="0" rIns="0" tIns="0" bIns="0">
-            <a:spAutoFit/>
-          </a:bodyPr>
-          <a:lstStyle/>
-          <a:p>
-            <a:pPr algn="r">
-              <a:lnSpc>
-                <a:spcPct val="100000"/>
-              </a:lnSpc>
-            </a:pPr>
-            <a:r>
-              <a:rPr sz="1200" b="1">
-                <a:solidFill>
-                  <a:srgbClr val="8B97A5"/>
-                </a:solidFill>
-                <a:latin typeface="Calibri"/>
-              </a:rPr>
-              <a:t>81 pkt</a:t>
-            </a:r>
-          </a:p>
-        </p:txBody>
-      </p:sp>
-      <p:sp>
-        <p:nvSpPr>
-          <p:cNvPr id="24" name="Rounded Rectangle 23"/>
-          <p:cNvSpPr/>
-          <p:nvPr/>
-        </p:nvSpPr>
-        <p:spPr>
-          <a:xfrm>
-            <a:off x="795528" y="4215384"/>
-            <a:ext cx="5303520" cy="384048"/>
-          </a:xfrm>
-          <a:prstGeom prst="roundRect">
-            <a:avLst>
-              <a:gd name="adj" fmla="val 14000"/>
-            </a:avLst>
-          </a:prstGeom>
-          <a:solidFill>
-            <a:srgbClr val="1A2332"/>
-          </a:solidFill>
-          <a:ln>
-            <a:noFill/>
-          </a:ln>
-          <a:effectLst/>
-        </p:spPr>
-        <p:style>
-          <a:lnRef idx="1">
-            <a:schemeClr val="accent1"/>
-          </a:lnRef>
-          <a:fillRef idx="3">
-            <a:schemeClr val="accent1"/>
-          </a:fillRef>
-          <a:effectRef idx="2">
-            <a:schemeClr val="accent1"/>
-          </a:effectRef>
-          <a:fontRef idx="minor">
-            <a:schemeClr val="lt1"/>
-          </a:fontRef>
-        </p:style>
-        <p:txBody>
-          <a:bodyPr rtlCol="0" anchor="ctr"/>
-          <a:lstStyle/>
-          <a:p>
-            <a:pPr algn="ctr"/>
-          </a:p>
-        </p:txBody>
-      </p:sp>
-      <p:sp>
-        <p:nvSpPr>
-          <p:cNvPr id="25" name="TextBox 24"/>
-          <p:cNvSpPr txBox="1"/>
-          <p:nvPr/>
-        </p:nvSpPr>
-        <p:spPr>
-          <a:xfrm>
-            <a:off x="978408" y="4215384"/>
-            <a:ext cx="3931920" cy="384048"/>
-          </a:xfrm>
-          <a:prstGeom prst="rect">
-            <a:avLst/>
-          </a:prstGeom>
-          <a:noFill/>
-        </p:spPr>
-        <p:txBody>
-          <a:bodyPr wrap="square" anchor="ctr" lIns="0" rIns="0" tIns="0" bIns="0">
-            <a:spAutoFit/>
-          </a:bodyPr>
-          <a:lstStyle/>
-          <a:p>
-            <a:pPr algn="l">
-              <a:lnSpc>
-                <a:spcPct val="100000"/>
-              </a:lnSpc>
-            </a:pPr>
-            <a:r>
-              <a:rPr sz="1200" b="0">
-                <a:solidFill>
-                  <a:srgbClr val="E6EDF3"/>
-                </a:solidFill>
-                <a:latin typeface="Calibri"/>
-              </a:rPr>
-              <a:t>3.  #9 Wiśniewski</a:t>
-            </a:r>
-          </a:p>
-        </p:txBody>
-      </p:sp>
-      <p:sp>
-        <p:nvSpPr>
-          <p:cNvPr id="26" name="TextBox 25"/>
-          <p:cNvSpPr txBox="1"/>
-          <p:nvPr/>
-        </p:nvSpPr>
-        <p:spPr>
-          <a:xfrm>
-            <a:off x="5047488" y="4215384"/>
-            <a:ext cx="914400" cy="384048"/>
-          </a:xfrm>
-          <a:prstGeom prst="rect">
-            <a:avLst/>
-          </a:prstGeom>
-          <a:noFill/>
-        </p:spPr>
-        <p:txBody>
-          <a:bodyPr wrap="square" anchor="ctr" lIns="0" rIns="0" tIns="0" bIns="0">
-            <a:spAutoFit/>
-          </a:bodyPr>
-          <a:lstStyle/>
-          <a:p>
-            <a:pPr algn="r">
-              <a:lnSpc>
-                <a:spcPct val="100000"/>
-              </a:lnSpc>
-            </a:pPr>
-            <a:r>
-              <a:rPr sz="1200" b="1">
-                <a:solidFill>
-                  <a:srgbClr val="8B97A5"/>
-                </a:solidFill>
-                <a:latin typeface="Calibri"/>
-              </a:rPr>
-              <a:t>74 pkt</a:t>
-            </a:r>
-          </a:p>
-        </p:txBody>
-      </p:sp>
-      <p:sp>
-        <p:nvSpPr>
-          <p:cNvPr id="27" name="Rounded Rectangle 26"/>
-          <p:cNvSpPr/>
-          <p:nvPr/>
-        </p:nvSpPr>
-        <p:spPr>
-          <a:xfrm>
-            <a:off x="795528" y="4672584"/>
-            <a:ext cx="5303520" cy="384048"/>
-          </a:xfrm>
-          <a:prstGeom prst="roundRect">
-            <a:avLst>
-              <a:gd name="adj" fmla="val 14000"/>
-            </a:avLst>
-          </a:prstGeom>
-          <a:solidFill>
-            <a:srgbClr val="1A2332"/>
-          </a:solidFill>
-          <a:ln>
-            <a:noFill/>
-          </a:ln>
-          <a:effectLst/>
-        </p:spPr>
-        <p:style>
-          <a:lnRef idx="1">
-            <a:schemeClr val="accent1"/>
-          </a:lnRef>
-          <a:fillRef idx="3">
-            <a:schemeClr val="accent1"/>
-          </a:fillRef>
-          <a:effectRef idx="2">
-            <a:schemeClr val="accent1"/>
-          </a:effectRef>
-          <a:fontRef idx="minor">
-            <a:schemeClr val="lt1"/>
-          </a:fontRef>
-        </p:style>
-        <p:txBody>
-          <a:bodyPr rtlCol="0" anchor="ctr"/>
-          <a:lstStyle/>
-          <a:p>
-            <a:pPr algn="ctr"/>
-          </a:p>
-        </p:txBody>
-      </p:sp>
-      <p:sp>
-        <p:nvSpPr>
-          <p:cNvPr id="28" name="TextBox 27"/>
-          <p:cNvSpPr txBox="1"/>
-          <p:nvPr/>
-        </p:nvSpPr>
-        <p:spPr>
-          <a:xfrm>
-            <a:off x="978408" y="4672584"/>
-            <a:ext cx="3931920" cy="384048"/>
-          </a:xfrm>
-          <a:prstGeom prst="rect">
-            <a:avLst/>
-          </a:prstGeom>
-          <a:noFill/>
-        </p:spPr>
-        <p:txBody>
-          <a:bodyPr wrap="square" anchor="ctr" lIns="0" rIns="0" tIns="0" bIns="0">
-            <a:spAutoFit/>
-          </a:bodyPr>
-          <a:lstStyle/>
-          <a:p>
-            <a:pPr algn="l">
-              <a:lnSpc>
-                <a:spcPct val="100000"/>
-              </a:lnSpc>
-            </a:pPr>
-            <a:r>
-              <a:rPr sz="1200" b="0">
-                <a:solidFill>
-                  <a:srgbClr val="E6EDF3"/>
-                </a:solidFill>
-                <a:latin typeface="Calibri"/>
-              </a:rPr>
-              <a:t>4.  #4 Lewandowski</a:t>
-            </a:r>
-          </a:p>
-        </p:txBody>
-      </p:sp>
-      <p:sp>
-        <p:nvSpPr>
-          <p:cNvPr id="29" name="TextBox 28"/>
-          <p:cNvSpPr txBox="1"/>
-          <p:nvPr/>
-        </p:nvSpPr>
-        <p:spPr>
-          <a:xfrm>
-            <a:off x="5047488" y="4672584"/>
-            <a:ext cx="914400" cy="384048"/>
-          </a:xfrm>
-          <a:prstGeom prst="rect">
-            <a:avLst/>
-          </a:prstGeom>
-          <a:noFill/>
-        </p:spPr>
-        <p:txBody>
-          <a:bodyPr wrap="square" anchor="ctr" lIns="0" rIns="0" tIns="0" bIns="0">
-            <a:spAutoFit/>
-          </a:bodyPr>
-          <a:lstStyle/>
-          <a:p>
-            <a:pPr algn="r">
-              <a:lnSpc>
-                <a:spcPct val="100000"/>
-              </a:lnSpc>
-            </a:pPr>
-            <a:r>
-              <a:rPr sz="1200" b="1">
-                <a:solidFill>
-                  <a:srgbClr val="8B97A5"/>
-                </a:solidFill>
-                <a:latin typeface="Calibri"/>
-              </a:rPr>
-              <a:t>63 pkt</a:t>
-            </a:r>
-          </a:p>
-        </p:txBody>
-      </p:sp>
-      <p:sp>
-        <p:nvSpPr>
-          <p:cNvPr id="30" name="TextBox 29"/>
           <p:cNvSpPr txBox="1"/>
           <p:nvPr/>
         </p:nvSpPr>
@@ -12651,45 +10669,30 @@
           </a:p>
         </p:txBody>
       </p:sp>
-      <p:sp>
-        <p:nvSpPr>
-          <p:cNvPr id="16" name="TextBox 15"/>
-          <p:cNvSpPr txBox="1"/>
-          <p:nvPr/>
-        </p:nvSpPr>
-        <p:spPr>
-          <a:xfrm>
-            <a:off x="6702552" y="2350008"/>
-            <a:ext cx="1554480" cy="274320"/>
+      <p:pic>
+        <p:nvPicPr>
+          <p:cNvPr id="16" name="Picture 15" descr="asystent.png"/>
+          <p:cNvPicPr>
+            <a:picLocks noChangeAspect="1"/>
+          </p:cNvPicPr>
+          <p:nvPr/>
+        </p:nvPicPr>
+        <p:blipFill>
+          <a:blip r:embed="rId2"/>
+          <a:stretch>
+            <a:fillRect/>
+          </a:stretch>
+        </p:blipFill>
+        <p:spPr>
+          <a:xfrm>
+            <a:off x="6899457" y="2295144"/>
+            <a:ext cx="4351924" cy="3566159"/>
           </a:xfrm>
           <a:prstGeom prst="rect">
             <a:avLst/>
           </a:prstGeom>
-          <a:noFill/>
-        </p:spPr>
-        <p:txBody>
-          <a:bodyPr wrap="square" anchor="ctr" lIns="0" rIns="0" tIns="0" bIns="0">
-            <a:spAutoFit/>
-          </a:bodyPr>
-          <a:lstStyle/>
-          <a:p>
-            <a:pPr algn="l">
-              <a:lnSpc>
-                <a:spcPct val="100000"/>
-              </a:lnSpc>
-            </a:pPr>
-            <a:r>
-              <a:rPr sz="1000" b="1">
-                <a:solidFill>
-                  <a:srgbClr val="4CC9F0"/>
-                </a:solidFill>
-                <a:latin typeface="Calibri"/>
-              </a:rPr>
-              <a:t>WODA</a:t>
-            </a:r>
-          </a:p>
-        </p:txBody>
-      </p:sp>
+        </p:spPr>
+      </p:pic>
       <p:sp>
         <p:nvSpPr>
           <p:cNvPr id="17" name="Rounded Rectangle 16"/>
@@ -12698,18 +10701,16 @@
         </p:nvSpPr>
         <p:spPr>
           <a:xfrm>
-            <a:off x="6702552" y="2697479"/>
-            <a:ext cx="1554480" cy="384048"/>
+            <a:off x="6899457" y="2295144"/>
+            <a:ext cx="4351924" cy="3566159"/>
           </a:xfrm>
           <a:prstGeom prst="roundRect">
             <a:avLst>
-              <a:gd name="adj" fmla="val 18000"/>
+              <a:gd name="adj" fmla="val 1500"/>
             </a:avLst>
           </a:prstGeom>
-          <a:solidFill>
-            <a:srgbClr val="1A2332"/>
-          </a:solidFill>
-          <a:ln w="12700">
+          <a:noFill/>
+          <a:ln w="9525">
             <a:solidFill>
               <a:srgbClr val="1E2D3D"/>
             </a:solidFill>
@@ -12735,1801 +10736,6 @@
           <a:lstStyle/>
           <a:p>
             <a:pPr algn="ctr"/>
-          </a:p>
-        </p:txBody>
-      </p:sp>
-      <p:sp>
-        <p:nvSpPr>
-          <p:cNvPr id="18" name="Oval 17"/>
-          <p:cNvSpPr/>
-          <p:nvPr/>
-        </p:nvSpPr>
-        <p:spPr>
-          <a:xfrm>
-            <a:off x="6793992" y="2761487"/>
-            <a:ext cx="256032" cy="256032"/>
-          </a:xfrm>
-          <a:prstGeom prst="ellipse">
-            <a:avLst/>
-          </a:prstGeom>
-          <a:solidFill>
-            <a:srgbClr val="145366"/>
-          </a:solidFill>
-          <a:ln w="12700">
-            <a:solidFill>
-              <a:srgbClr val="4CC9F0"/>
-            </a:solidFill>
-          </a:ln>
-          <a:effectLst/>
-        </p:spPr>
-        <p:style>
-          <a:lnRef idx="1">
-            <a:schemeClr val="accent1"/>
-          </a:lnRef>
-          <a:fillRef idx="3">
-            <a:schemeClr val="accent1"/>
-          </a:fillRef>
-          <a:effectRef idx="2">
-            <a:schemeClr val="accent1"/>
-          </a:effectRef>
-          <a:fontRef idx="minor">
-            <a:schemeClr val="lt1"/>
-          </a:fontRef>
-        </p:style>
-        <p:txBody>
-          <a:bodyPr rtlCol="0" anchor="ctr"/>
-          <a:lstStyle/>
-          <a:p>
-            <a:pPr algn="ctr"/>
-          </a:p>
-        </p:txBody>
-      </p:sp>
-      <p:sp>
-        <p:nvSpPr>
-          <p:cNvPr id="19" name="TextBox 18"/>
-          <p:cNvSpPr txBox="1"/>
-          <p:nvPr/>
-        </p:nvSpPr>
-        <p:spPr>
-          <a:xfrm>
-            <a:off x="6793992" y="2761487"/>
-            <a:ext cx="256032" cy="256032"/>
-          </a:xfrm>
-          <a:prstGeom prst="rect">
-            <a:avLst/>
-          </a:prstGeom>
-          <a:noFill/>
-        </p:spPr>
-        <p:txBody>
-          <a:bodyPr wrap="square" anchor="ctr" lIns="0" rIns="0" tIns="0" bIns="0">
-            <a:spAutoFit/>
-          </a:bodyPr>
-          <a:lstStyle/>
-          <a:p>
-            <a:pPr algn="ctr">
-              <a:lnSpc>
-                <a:spcPct val="100000"/>
-              </a:lnSpc>
-            </a:pPr>
-            <a:r>
-              <a:rPr sz="1000" b="1">
-                <a:solidFill>
-                  <a:srgbClr val="4CC9F0"/>
-                </a:solidFill>
-                <a:latin typeface="Calibri"/>
-              </a:rPr>
-              <a:t>12</a:t>
-            </a:r>
-          </a:p>
-        </p:txBody>
-      </p:sp>
-      <p:sp>
-        <p:nvSpPr>
-          <p:cNvPr id="20" name="Rounded Rectangle 19"/>
-          <p:cNvSpPr/>
-          <p:nvPr/>
-        </p:nvSpPr>
-        <p:spPr>
-          <a:xfrm>
-            <a:off x="7196328" y="2843784"/>
-            <a:ext cx="640080" cy="109728"/>
-          </a:xfrm>
-          <a:prstGeom prst="roundRect">
-            <a:avLst>
-              <a:gd name="adj" fmla="val 50000"/>
-            </a:avLst>
-          </a:prstGeom>
-          <a:solidFill>
-            <a:srgbClr val="1E2D3D"/>
-          </a:solidFill>
-          <a:ln>
-            <a:noFill/>
-          </a:ln>
-          <a:effectLst/>
-        </p:spPr>
-        <p:style>
-          <a:lnRef idx="1">
-            <a:schemeClr val="accent1"/>
-          </a:lnRef>
-          <a:fillRef idx="3">
-            <a:schemeClr val="accent1"/>
-          </a:fillRef>
-          <a:effectRef idx="2">
-            <a:schemeClr val="accent1"/>
-          </a:effectRef>
-          <a:fontRef idx="minor">
-            <a:schemeClr val="lt1"/>
-          </a:fontRef>
-        </p:style>
-        <p:txBody>
-          <a:bodyPr rtlCol="0" anchor="ctr"/>
-          <a:lstStyle/>
-          <a:p>
-            <a:pPr algn="ctr"/>
-          </a:p>
-        </p:txBody>
-      </p:sp>
-      <p:sp>
-        <p:nvSpPr>
-          <p:cNvPr id="21" name="Rounded Rectangle 20"/>
-          <p:cNvSpPr/>
-          <p:nvPr/>
-        </p:nvSpPr>
-        <p:spPr>
-          <a:xfrm>
-            <a:off x="6702552" y="3154679"/>
-            <a:ext cx="1554480" cy="384048"/>
-          </a:xfrm>
-          <a:prstGeom prst="roundRect">
-            <a:avLst>
-              <a:gd name="adj" fmla="val 18000"/>
-            </a:avLst>
-          </a:prstGeom>
-          <a:solidFill>
-            <a:srgbClr val="1A2332"/>
-          </a:solidFill>
-          <a:ln w="12700">
-            <a:solidFill>
-              <a:srgbClr val="1E2D3D"/>
-            </a:solidFill>
-          </a:ln>
-          <a:effectLst/>
-        </p:spPr>
-        <p:style>
-          <a:lnRef idx="1">
-            <a:schemeClr val="accent1"/>
-          </a:lnRef>
-          <a:fillRef idx="3">
-            <a:schemeClr val="accent1"/>
-          </a:fillRef>
-          <a:effectRef idx="2">
-            <a:schemeClr val="accent1"/>
-          </a:effectRef>
-          <a:fontRef idx="minor">
-            <a:schemeClr val="lt1"/>
-          </a:fontRef>
-        </p:style>
-        <p:txBody>
-          <a:bodyPr rtlCol="0" anchor="ctr"/>
-          <a:lstStyle/>
-          <a:p>
-            <a:pPr algn="ctr"/>
-          </a:p>
-        </p:txBody>
-      </p:sp>
-      <p:sp>
-        <p:nvSpPr>
-          <p:cNvPr id="22" name="Oval 21"/>
-          <p:cNvSpPr/>
-          <p:nvPr/>
-        </p:nvSpPr>
-        <p:spPr>
-          <a:xfrm>
-            <a:off x="6793992" y="3218687"/>
-            <a:ext cx="256032" cy="256032"/>
-          </a:xfrm>
-          <a:prstGeom prst="ellipse">
-            <a:avLst/>
-          </a:prstGeom>
-          <a:solidFill>
-            <a:srgbClr val="145366"/>
-          </a:solidFill>
-          <a:ln w="12700">
-            <a:solidFill>
-              <a:srgbClr val="4CC9F0"/>
-            </a:solidFill>
-          </a:ln>
-          <a:effectLst/>
-        </p:spPr>
-        <p:style>
-          <a:lnRef idx="1">
-            <a:schemeClr val="accent1"/>
-          </a:lnRef>
-          <a:fillRef idx="3">
-            <a:schemeClr val="accent1"/>
-          </a:fillRef>
-          <a:effectRef idx="2">
-            <a:schemeClr val="accent1"/>
-          </a:effectRef>
-          <a:fontRef idx="minor">
-            <a:schemeClr val="lt1"/>
-          </a:fontRef>
-        </p:style>
-        <p:txBody>
-          <a:bodyPr rtlCol="0" anchor="ctr"/>
-          <a:lstStyle/>
-          <a:p>
-            <a:pPr algn="ctr"/>
-          </a:p>
-        </p:txBody>
-      </p:sp>
-      <p:sp>
-        <p:nvSpPr>
-          <p:cNvPr id="23" name="TextBox 22"/>
-          <p:cNvSpPr txBox="1"/>
-          <p:nvPr/>
-        </p:nvSpPr>
-        <p:spPr>
-          <a:xfrm>
-            <a:off x="6793992" y="3218687"/>
-            <a:ext cx="256032" cy="256032"/>
-          </a:xfrm>
-          <a:prstGeom prst="rect">
-            <a:avLst/>
-          </a:prstGeom>
-          <a:noFill/>
-        </p:spPr>
-        <p:txBody>
-          <a:bodyPr wrap="square" anchor="ctr" lIns="0" rIns="0" tIns="0" bIns="0">
-            <a:spAutoFit/>
-          </a:bodyPr>
-          <a:lstStyle/>
-          <a:p>
-            <a:pPr algn="ctr">
-              <a:lnSpc>
-                <a:spcPct val="100000"/>
-              </a:lnSpc>
-            </a:pPr>
-            <a:r>
-              <a:rPr sz="1000" b="1">
-                <a:solidFill>
-                  <a:srgbClr val="4CC9F0"/>
-                </a:solidFill>
-                <a:latin typeface="Calibri"/>
-              </a:rPr>
-              <a:t>7</a:t>
-            </a:r>
-          </a:p>
-        </p:txBody>
-      </p:sp>
-      <p:sp>
-        <p:nvSpPr>
-          <p:cNvPr id="24" name="Rounded Rectangle 23"/>
-          <p:cNvSpPr/>
-          <p:nvPr/>
-        </p:nvSpPr>
-        <p:spPr>
-          <a:xfrm>
-            <a:off x="7196328" y="3300984"/>
-            <a:ext cx="640080" cy="109728"/>
-          </a:xfrm>
-          <a:prstGeom prst="roundRect">
-            <a:avLst>
-              <a:gd name="adj" fmla="val 50000"/>
-            </a:avLst>
-          </a:prstGeom>
-          <a:solidFill>
-            <a:srgbClr val="1E2D3D"/>
-          </a:solidFill>
-          <a:ln>
-            <a:noFill/>
-          </a:ln>
-          <a:effectLst/>
-        </p:spPr>
-        <p:style>
-          <a:lnRef idx="1">
-            <a:schemeClr val="accent1"/>
-          </a:lnRef>
-          <a:fillRef idx="3">
-            <a:schemeClr val="accent1"/>
-          </a:fillRef>
-          <a:effectRef idx="2">
-            <a:schemeClr val="accent1"/>
-          </a:effectRef>
-          <a:fontRef idx="minor">
-            <a:schemeClr val="lt1"/>
-          </a:fontRef>
-        </p:style>
-        <p:txBody>
-          <a:bodyPr rtlCol="0" anchor="ctr"/>
-          <a:lstStyle/>
-          <a:p>
-            <a:pPr algn="ctr"/>
-          </a:p>
-        </p:txBody>
-      </p:sp>
-      <p:sp>
-        <p:nvSpPr>
-          <p:cNvPr id="25" name="Rounded Rectangle 24"/>
-          <p:cNvSpPr/>
-          <p:nvPr/>
-        </p:nvSpPr>
-        <p:spPr>
-          <a:xfrm>
-            <a:off x="6702552" y="3611879"/>
-            <a:ext cx="1554480" cy="384048"/>
-          </a:xfrm>
-          <a:prstGeom prst="roundRect">
-            <a:avLst>
-              <a:gd name="adj" fmla="val 18000"/>
-            </a:avLst>
-          </a:prstGeom>
-          <a:solidFill>
-            <a:srgbClr val="1A2332"/>
-          </a:solidFill>
-          <a:ln w="12700">
-            <a:solidFill>
-              <a:srgbClr val="1E2D3D"/>
-            </a:solidFill>
-          </a:ln>
-          <a:effectLst/>
-        </p:spPr>
-        <p:style>
-          <a:lnRef idx="1">
-            <a:schemeClr val="accent1"/>
-          </a:lnRef>
-          <a:fillRef idx="3">
-            <a:schemeClr val="accent1"/>
-          </a:fillRef>
-          <a:effectRef idx="2">
-            <a:schemeClr val="accent1"/>
-          </a:effectRef>
-          <a:fontRef idx="minor">
-            <a:schemeClr val="lt1"/>
-          </a:fontRef>
-        </p:style>
-        <p:txBody>
-          <a:bodyPr rtlCol="0" anchor="ctr"/>
-          <a:lstStyle/>
-          <a:p>
-            <a:pPr algn="ctr"/>
-          </a:p>
-        </p:txBody>
-      </p:sp>
-      <p:sp>
-        <p:nvSpPr>
-          <p:cNvPr id="26" name="Oval 25"/>
-          <p:cNvSpPr/>
-          <p:nvPr/>
-        </p:nvSpPr>
-        <p:spPr>
-          <a:xfrm>
-            <a:off x="6793992" y="3675887"/>
-            <a:ext cx="256032" cy="256032"/>
-          </a:xfrm>
-          <a:prstGeom prst="ellipse">
-            <a:avLst/>
-          </a:prstGeom>
-          <a:solidFill>
-            <a:srgbClr val="145366"/>
-          </a:solidFill>
-          <a:ln w="12700">
-            <a:solidFill>
-              <a:srgbClr val="4CC9F0"/>
-            </a:solidFill>
-          </a:ln>
-          <a:effectLst/>
-        </p:spPr>
-        <p:style>
-          <a:lnRef idx="1">
-            <a:schemeClr val="accent1"/>
-          </a:lnRef>
-          <a:fillRef idx="3">
-            <a:schemeClr val="accent1"/>
-          </a:fillRef>
-          <a:effectRef idx="2">
-            <a:schemeClr val="accent1"/>
-          </a:effectRef>
-          <a:fontRef idx="minor">
-            <a:schemeClr val="lt1"/>
-          </a:fontRef>
-        </p:style>
-        <p:txBody>
-          <a:bodyPr rtlCol="0" anchor="ctr"/>
-          <a:lstStyle/>
-          <a:p>
-            <a:pPr algn="ctr"/>
-          </a:p>
-        </p:txBody>
-      </p:sp>
-      <p:sp>
-        <p:nvSpPr>
-          <p:cNvPr id="27" name="TextBox 26"/>
-          <p:cNvSpPr txBox="1"/>
-          <p:nvPr/>
-        </p:nvSpPr>
-        <p:spPr>
-          <a:xfrm>
-            <a:off x="6793992" y="3675887"/>
-            <a:ext cx="256032" cy="256032"/>
-          </a:xfrm>
-          <a:prstGeom prst="rect">
-            <a:avLst/>
-          </a:prstGeom>
-          <a:noFill/>
-        </p:spPr>
-        <p:txBody>
-          <a:bodyPr wrap="square" anchor="ctr" lIns="0" rIns="0" tIns="0" bIns="0">
-            <a:spAutoFit/>
-          </a:bodyPr>
-          <a:lstStyle/>
-          <a:p>
-            <a:pPr algn="ctr">
-              <a:lnSpc>
-                <a:spcPct val="100000"/>
-              </a:lnSpc>
-            </a:pPr>
-            <a:r>
-              <a:rPr sz="1000" b="1">
-                <a:solidFill>
-                  <a:srgbClr val="4CC9F0"/>
-                </a:solidFill>
-                <a:latin typeface="Calibri"/>
-              </a:rPr>
-              <a:t>4</a:t>
-            </a:r>
-          </a:p>
-        </p:txBody>
-      </p:sp>
-      <p:sp>
-        <p:nvSpPr>
-          <p:cNvPr id="28" name="Rounded Rectangle 27"/>
-          <p:cNvSpPr/>
-          <p:nvPr/>
-        </p:nvSpPr>
-        <p:spPr>
-          <a:xfrm>
-            <a:off x="7196328" y="3758183"/>
-            <a:ext cx="640080" cy="109728"/>
-          </a:xfrm>
-          <a:prstGeom prst="roundRect">
-            <a:avLst>
-              <a:gd name="adj" fmla="val 50000"/>
-            </a:avLst>
-          </a:prstGeom>
-          <a:solidFill>
-            <a:srgbClr val="1E2D3D"/>
-          </a:solidFill>
-          <a:ln>
-            <a:noFill/>
-          </a:ln>
-          <a:effectLst/>
-        </p:spPr>
-        <p:style>
-          <a:lnRef idx="1">
-            <a:schemeClr val="accent1"/>
-          </a:lnRef>
-          <a:fillRef idx="3">
-            <a:schemeClr val="accent1"/>
-          </a:fillRef>
-          <a:effectRef idx="2">
-            <a:schemeClr val="accent1"/>
-          </a:effectRef>
-          <a:fontRef idx="minor">
-            <a:schemeClr val="lt1"/>
-          </a:fontRef>
-        </p:style>
-        <p:txBody>
-          <a:bodyPr rtlCol="0" anchor="ctr"/>
-          <a:lstStyle/>
-          <a:p>
-            <a:pPr algn="ctr"/>
-          </a:p>
-        </p:txBody>
-      </p:sp>
-      <p:sp>
-        <p:nvSpPr>
-          <p:cNvPr id="29" name="Rounded Rectangle 28"/>
-          <p:cNvSpPr/>
-          <p:nvPr/>
-        </p:nvSpPr>
-        <p:spPr>
-          <a:xfrm>
-            <a:off x="6702552" y="4069079"/>
-            <a:ext cx="1554480" cy="384048"/>
-          </a:xfrm>
-          <a:prstGeom prst="roundRect">
-            <a:avLst>
-              <a:gd name="adj" fmla="val 18000"/>
-            </a:avLst>
-          </a:prstGeom>
-          <a:solidFill>
-            <a:srgbClr val="1A2332"/>
-          </a:solidFill>
-          <a:ln w="12700">
-            <a:solidFill>
-              <a:srgbClr val="1E2D3D"/>
-            </a:solidFill>
-          </a:ln>
-          <a:effectLst/>
-        </p:spPr>
-        <p:style>
-          <a:lnRef idx="1">
-            <a:schemeClr val="accent1"/>
-          </a:lnRef>
-          <a:fillRef idx="3">
-            <a:schemeClr val="accent1"/>
-          </a:fillRef>
-          <a:effectRef idx="2">
-            <a:schemeClr val="accent1"/>
-          </a:effectRef>
-          <a:fontRef idx="minor">
-            <a:schemeClr val="lt1"/>
-          </a:fontRef>
-        </p:style>
-        <p:txBody>
-          <a:bodyPr rtlCol="0" anchor="ctr"/>
-          <a:lstStyle/>
-          <a:p>
-            <a:pPr algn="ctr"/>
-          </a:p>
-        </p:txBody>
-      </p:sp>
-      <p:sp>
-        <p:nvSpPr>
-          <p:cNvPr id="30" name="Oval 29"/>
-          <p:cNvSpPr/>
-          <p:nvPr/>
-        </p:nvSpPr>
-        <p:spPr>
-          <a:xfrm>
-            <a:off x="6793992" y="4133087"/>
-            <a:ext cx="256032" cy="256032"/>
-          </a:xfrm>
-          <a:prstGeom prst="ellipse">
-            <a:avLst/>
-          </a:prstGeom>
-          <a:solidFill>
-            <a:srgbClr val="145366"/>
-          </a:solidFill>
-          <a:ln w="12700">
-            <a:solidFill>
-              <a:srgbClr val="4CC9F0"/>
-            </a:solidFill>
-          </a:ln>
-          <a:effectLst/>
-        </p:spPr>
-        <p:style>
-          <a:lnRef idx="1">
-            <a:schemeClr val="accent1"/>
-          </a:lnRef>
-          <a:fillRef idx="3">
-            <a:schemeClr val="accent1"/>
-          </a:fillRef>
-          <a:effectRef idx="2">
-            <a:schemeClr val="accent1"/>
-          </a:effectRef>
-          <a:fontRef idx="minor">
-            <a:schemeClr val="lt1"/>
-          </a:fontRef>
-        </p:style>
-        <p:txBody>
-          <a:bodyPr rtlCol="0" anchor="ctr"/>
-          <a:lstStyle/>
-          <a:p>
-            <a:pPr algn="ctr"/>
-          </a:p>
-        </p:txBody>
-      </p:sp>
-      <p:sp>
-        <p:nvSpPr>
-          <p:cNvPr id="31" name="TextBox 30"/>
-          <p:cNvSpPr txBox="1"/>
-          <p:nvPr/>
-        </p:nvSpPr>
-        <p:spPr>
-          <a:xfrm>
-            <a:off x="6793992" y="4133087"/>
-            <a:ext cx="256032" cy="256032"/>
-          </a:xfrm>
-          <a:prstGeom prst="rect">
-            <a:avLst/>
-          </a:prstGeom>
-          <a:noFill/>
-        </p:spPr>
-        <p:txBody>
-          <a:bodyPr wrap="square" anchor="ctr" lIns="0" rIns="0" tIns="0" bIns="0">
-            <a:spAutoFit/>
-          </a:bodyPr>
-          <a:lstStyle/>
-          <a:p>
-            <a:pPr algn="ctr">
-              <a:lnSpc>
-                <a:spcPct val="100000"/>
-              </a:lnSpc>
-            </a:pPr>
-            <a:r>
-              <a:rPr sz="1000" b="1">
-                <a:solidFill>
-                  <a:srgbClr val="4CC9F0"/>
-                </a:solidFill>
-                <a:latin typeface="Calibri"/>
-              </a:rPr>
-              <a:t>9</a:t>
-            </a:r>
-          </a:p>
-        </p:txBody>
-      </p:sp>
-      <p:sp>
-        <p:nvSpPr>
-          <p:cNvPr id="32" name="Rounded Rectangle 31"/>
-          <p:cNvSpPr/>
-          <p:nvPr/>
-        </p:nvSpPr>
-        <p:spPr>
-          <a:xfrm>
-            <a:off x="7196328" y="4215383"/>
-            <a:ext cx="640080" cy="109728"/>
-          </a:xfrm>
-          <a:prstGeom prst="roundRect">
-            <a:avLst>
-              <a:gd name="adj" fmla="val 50000"/>
-            </a:avLst>
-          </a:prstGeom>
-          <a:solidFill>
-            <a:srgbClr val="1E2D3D"/>
-          </a:solidFill>
-          <a:ln>
-            <a:noFill/>
-          </a:ln>
-          <a:effectLst/>
-        </p:spPr>
-        <p:style>
-          <a:lnRef idx="1">
-            <a:schemeClr val="accent1"/>
-          </a:lnRef>
-          <a:fillRef idx="3">
-            <a:schemeClr val="accent1"/>
-          </a:fillRef>
-          <a:effectRef idx="2">
-            <a:schemeClr val="accent1"/>
-          </a:effectRef>
-          <a:fontRef idx="minor">
-            <a:schemeClr val="lt1"/>
-          </a:fontRef>
-        </p:style>
-        <p:txBody>
-          <a:bodyPr rtlCol="0" anchor="ctr"/>
-          <a:lstStyle/>
-          <a:p>
-            <a:pPr algn="ctr"/>
-          </a:p>
-        </p:txBody>
-      </p:sp>
-      <p:sp>
-        <p:nvSpPr>
-          <p:cNvPr id="33" name="Rounded Rectangle 32"/>
-          <p:cNvSpPr/>
-          <p:nvPr/>
-        </p:nvSpPr>
-        <p:spPr>
-          <a:xfrm>
-            <a:off x="8458200" y="2395727"/>
-            <a:ext cx="649224" cy="384048"/>
-          </a:xfrm>
-          <a:prstGeom prst="roundRect">
-            <a:avLst>
-              <a:gd name="adj" fmla="val 50000"/>
-            </a:avLst>
-          </a:prstGeom>
-          <a:solidFill>
-            <a:srgbClr val="4CC9F0"/>
-          </a:solidFill>
-          <a:ln>
-            <a:noFill/>
-          </a:ln>
-          <a:effectLst/>
-        </p:spPr>
-        <p:style>
-          <a:lnRef idx="1">
-            <a:schemeClr val="accent1"/>
-          </a:lnRef>
-          <a:fillRef idx="3">
-            <a:schemeClr val="accent1"/>
-          </a:fillRef>
-          <a:effectRef idx="2">
-            <a:schemeClr val="accent1"/>
-          </a:effectRef>
-          <a:fontRef idx="minor">
-            <a:schemeClr val="lt1"/>
-          </a:fontRef>
-        </p:style>
-        <p:txBody>
-          <a:bodyPr rtlCol="0" anchor="ctr"/>
-          <a:lstStyle/>
-          <a:p>
-            <a:pPr algn="ctr"/>
-          </a:p>
-        </p:txBody>
-      </p:sp>
-      <p:sp>
-        <p:nvSpPr>
-          <p:cNvPr id="34" name="TextBox 33"/>
-          <p:cNvSpPr txBox="1"/>
-          <p:nvPr/>
-        </p:nvSpPr>
-        <p:spPr>
-          <a:xfrm>
-            <a:off x="8458200" y="2395727"/>
-            <a:ext cx="649224" cy="384048"/>
-          </a:xfrm>
-          <a:prstGeom prst="rect">
-            <a:avLst/>
-          </a:prstGeom>
-          <a:noFill/>
-        </p:spPr>
-        <p:txBody>
-          <a:bodyPr wrap="square" anchor="ctr" lIns="0" rIns="0" tIns="0" bIns="0">
-            <a:spAutoFit/>
-          </a:bodyPr>
-          <a:lstStyle/>
-          <a:p>
-            <a:pPr algn="ctr">
-              <a:lnSpc>
-                <a:spcPct val="100000"/>
-              </a:lnSpc>
-            </a:pPr>
-            <a:r>
-              <a:rPr sz="950" b="1">
-                <a:solidFill>
-                  <a:srgbClr val="001018"/>
-                </a:solidFill>
-                <a:latin typeface="Calibri"/>
-              </a:rPr>
-              <a:t>GOL akcja</a:t>
-            </a:r>
-          </a:p>
-        </p:txBody>
-      </p:sp>
-      <p:sp>
-        <p:nvSpPr>
-          <p:cNvPr id="35" name="Rounded Rectangle 34"/>
-          <p:cNvSpPr/>
-          <p:nvPr/>
-        </p:nvSpPr>
-        <p:spPr>
-          <a:xfrm>
-            <a:off x="9217152" y="2395727"/>
-            <a:ext cx="649224" cy="384048"/>
-          </a:xfrm>
-          <a:prstGeom prst="roundRect">
-            <a:avLst>
-              <a:gd name="adj" fmla="val 50000"/>
-            </a:avLst>
-          </a:prstGeom>
-          <a:solidFill>
-            <a:srgbClr val="4CC9F0"/>
-          </a:solidFill>
-          <a:ln>
-            <a:noFill/>
-          </a:ln>
-          <a:effectLst/>
-        </p:spPr>
-        <p:style>
-          <a:lnRef idx="1">
-            <a:schemeClr val="accent1"/>
-          </a:lnRef>
-          <a:fillRef idx="3">
-            <a:schemeClr val="accent1"/>
-          </a:fillRef>
-          <a:effectRef idx="2">
-            <a:schemeClr val="accent1"/>
-          </a:effectRef>
-          <a:fontRef idx="minor">
-            <a:schemeClr val="lt1"/>
-          </a:fontRef>
-        </p:style>
-        <p:txBody>
-          <a:bodyPr rtlCol="0" anchor="ctr"/>
-          <a:lstStyle/>
-          <a:p>
-            <a:pPr algn="ctr"/>
-          </a:p>
-        </p:txBody>
-      </p:sp>
-      <p:sp>
-        <p:nvSpPr>
-          <p:cNvPr id="36" name="TextBox 35"/>
-          <p:cNvSpPr txBox="1"/>
-          <p:nvPr/>
-        </p:nvSpPr>
-        <p:spPr>
-          <a:xfrm>
-            <a:off x="9217152" y="2395727"/>
-            <a:ext cx="649224" cy="384048"/>
-          </a:xfrm>
-          <a:prstGeom prst="rect">
-            <a:avLst/>
-          </a:prstGeom>
-          <a:noFill/>
-        </p:spPr>
-        <p:txBody>
-          <a:bodyPr wrap="square" anchor="ctr" lIns="0" rIns="0" tIns="0" bIns="0">
-            <a:spAutoFit/>
-          </a:bodyPr>
-          <a:lstStyle/>
-          <a:p>
-            <a:pPr algn="ctr">
-              <a:lnSpc>
-                <a:spcPct val="100000"/>
-              </a:lnSpc>
-            </a:pPr>
-            <a:r>
-              <a:rPr sz="950" b="1">
-                <a:solidFill>
-                  <a:srgbClr val="001018"/>
-                </a:solidFill>
-                <a:latin typeface="Calibri"/>
-              </a:rPr>
-              <a:t>GOL kontra</a:t>
-            </a:r>
-          </a:p>
-        </p:txBody>
-      </p:sp>
-      <p:sp>
-        <p:nvSpPr>
-          <p:cNvPr id="37" name="Rounded Rectangle 36"/>
-          <p:cNvSpPr/>
-          <p:nvPr/>
-        </p:nvSpPr>
-        <p:spPr>
-          <a:xfrm>
-            <a:off x="9976104" y="2395727"/>
-            <a:ext cx="649224" cy="384048"/>
-          </a:xfrm>
-          <a:prstGeom prst="roundRect">
-            <a:avLst>
-              <a:gd name="adj" fmla="val 50000"/>
-            </a:avLst>
-          </a:prstGeom>
-          <a:solidFill>
-            <a:srgbClr val="1A2332"/>
-          </a:solidFill>
-          <a:ln w="12700">
-            <a:solidFill>
-              <a:srgbClr val="1E2D3D"/>
-            </a:solidFill>
-          </a:ln>
-          <a:effectLst/>
-        </p:spPr>
-        <p:style>
-          <a:lnRef idx="1">
-            <a:schemeClr val="accent1"/>
-          </a:lnRef>
-          <a:fillRef idx="3">
-            <a:schemeClr val="accent1"/>
-          </a:fillRef>
-          <a:effectRef idx="2">
-            <a:schemeClr val="accent1"/>
-          </a:effectRef>
-          <a:fontRef idx="minor">
-            <a:schemeClr val="lt1"/>
-          </a:fontRef>
-        </p:style>
-        <p:txBody>
-          <a:bodyPr rtlCol="0" anchor="ctr"/>
-          <a:lstStyle/>
-          <a:p>
-            <a:pPr algn="ctr"/>
-          </a:p>
-        </p:txBody>
-      </p:sp>
-      <p:sp>
-        <p:nvSpPr>
-          <p:cNvPr id="38" name="TextBox 37"/>
-          <p:cNvSpPr txBox="1"/>
-          <p:nvPr/>
-        </p:nvSpPr>
-        <p:spPr>
-          <a:xfrm>
-            <a:off x="9976104" y="2395727"/>
-            <a:ext cx="649224" cy="384048"/>
-          </a:xfrm>
-          <a:prstGeom prst="rect">
-            <a:avLst/>
-          </a:prstGeom>
-          <a:noFill/>
-        </p:spPr>
-        <p:txBody>
-          <a:bodyPr wrap="square" anchor="ctr" lIns="0" rIns="0" tIns="0" bIns="0">
-            <a:spAutoFit/>
-          </a:bodyPr>
-          <a:lstStyle/>
-          <a:p>
-            <a:pPr algn="ctr">
-              <a:lnSpc>
-                <a:spcPct val="100000"/>
-              </a:lnSpc>
-            </a:pPr>
-            <a:r>
-              <a:rPr sz="950" b="1">
-                <a:solidFill>
-                  <a:srgbClr val="E6EDF3"/>
-                </a:solidFill>
-                <a:latin typeface="Calibri"/>
-              </a:rPr>
-              <a:t>Asysta</a:t>
-            </a:r>
-          </a:p>
-        </p:txBody>
-      </p:sp>
-      <p:sp>
-        <p:nvSpPr>
-          <p:cNvPr id="39" name="Rounded Rectangle 38"/>
-          <p:cNvSpPr/>
-          <p:nvPr/>
-        </p:nvSpPr>
-        <p:spPr>
-          <a:xfrm>
-            <a:off x="10735056" y="2395727"/>
-            <a:ext cx="649224" cy="384048"/>
-          </a:xfrm>
-          <a:prstGeom prst="roundRect">
-            <a:avLst>
-              <a:gd name="adj" fmla="val 50000"/>
-            </a:avLst>
-          </a:prstGeom>
-          <a:solidFill>
-            <a:srgbClr val="1A2332"/>
-          </a:solidFill>
-          <a:ln w="12700">
-            <a:solidFill>
-              <a:srgbClr val="1E2D3D"/>
-            </a:solidFill>
-          </a:ln>
-          <a:effectLst/>
-        </p:spPr>
-        <p:style>
-          <a:lnRef idx="1">
-            <a:schemeClr val="accent1"/>
-          </a:lnRef>
-          <a:fillRef idx="3">
-            <a:schemeClr val="accent1"/>
-          </a:fillRef>
-          <a:effectRef idx="2">
-            <a:schemeClr val="accent1"/>
-          </a:effectRef>
-          <a:fontRef idx="minor">
-            <a:schemeClr val="lt1"/>
-          </a:fontRef>
-        </p:style>
-        <p:txBody>
-          <a:bodyPr rtlCol="0" anchor="ctr"/>
-          <a:lstStyle/>
-          <a:p>
-            <a:pPr algn="ctr"/>
-          </a:p>
-        </p:txBody>
-      </p:sp>
-      <p:sp>
-        <p:nvSpPr>
-          <p:cNvPr id="40" name="TextBox 39"/>
-          <p:cNvSpPr txBox="1"/>
-          <p:nvPr/>
-        </p:nvSpPr>
-        <p:spPr>
-          <a:xfrm>
-            <a:off x="10735056" y="2395727"/>
-            <a:ext cx="649224" cy="384048"/>
-          </a:xfrm>
-          <a:prstGeom prst="rect">
-            <a:avLst/>
-          </a:prstGeom>
-          <a:noFill/>
-        </p:spPr>
-        <p:txBody>
-          <a:bodyPr wrap="square" anchor="ctr" lIns="0" rIns="0" tIns="0" bIns="0">
-            <a:spAutoFit/>
-          </a:bodyPr>
-          <a:lstStyle/>
-          <a:p>
-            <a:pPr algn="ctr">
-              <a:lnSpc>
-                <a:spcPct val="100000"/>
-              </a:lnSpc>
-            </a:pPr>
-            <a:r>
-              <a:rPr sz="950" b="1">
-                <a:solidFill>
-                  <a:srgbClr val="E6EDF3"/>
-                </a:solidFill>
-                <a:latin typeface="Calibri"/>
-              </a:rPr>
-              <a:t>Obrona</a:t>
-            </a:r>
-          </a:p>
-        </p:txBody>
-      </p:sp>
-      <p:sp>
-        <p:nvSpPr>
-          <p:cNvPr id="41" name="Rounded Rectangle 40"/>
-          <p:cNvSpPr/>
-          <p:nvPr/>
-        </p:nvSpPr>
-        <p:spPr>
-          <a:xfrm>
-            <a:off x="8458200" y="2871215"/>
-            <a:ext cx="649224" cy="384048"/>
-          </a:xfrm>
-          <a:prstGeom prst="roundRect">
-            <a:avLst>
-              <a:gd name="adj" fmla="val 50000"/>
-            </a:avLst>
-          </a:prstGeom>
-          <a:solidFill>
-            <a:srgbClr val="1A2332"/>
-          </a:solidFill>
-          <a:ln w="12700">
-            <a:solidFill>
-              <a:srgbClr val="1E2D3D"/>
-            </a:solidFill>
-          </a:ln>
-          <a:effectLst/>
-        </p:spPr>
-        <p:style>
-          <a:lnRef idx="1">
-            <a:schemeClr val="accent1"/>
-          </a:lnRef>
-          <a:fillRef idx="3">
-            <a:schemeClr val="accent1"/>
-          </a:fillRef>
-          <a:effectRef idx="2">
-            <a:schemeClr val="accent1"/>
-          </a:effectRef>
-          <a:fontRef idx="minor">
-            <a:schemeClr val="lt1"/>
-          </a:fontRef>
-        </p:style>
-        <p:txBody>
-          <a:bodyPr rtlCol="0" anchor="ctr"/>
-          <a:lstStyle/>
-          <a:p>
-            <a:pPr algn="ctr"/>
-          </a:p>
-        </p:txBody>
-      </p:sp>
-      <p:sp>
-        <p:nvSpPr>
-          <p:cNvPr id="42" name="TextBox 41"/>
-          <p:cNvSpPr txBox="1"/>
-          <p:nvPr/>
-        </p:nvSpPr>
-        <p:spPr>
-          <a:xfrm>
-            <a:off x="8458200" y="2871215"/>
-            <a:ext cx="649224" cy="384048"/>
-          </a:xfrm>
-          <a:prstGeom prst="rect">
-            <a:avLst/>
-          </a:prstGeom>
-          <a:noFill/>
-        </p:spPr>
-        <p:txBody>
-          <a:bodyPr wrap="square" anchor="ctr" lIns="0" rIns="0" tIns="0" bIns="0">
-            <a:spAutoFit/>
-          </a:bodyPr>
-          <a:lstStyle/>
-          <a:p>
-            <a:pPr algn="ctr">
-              <a:lnSpc>
-                <a:spcPct val="100000"/>
-              </a:lnSpc>
-            </a:pPr>
-            <a:r>
-              <a:rPr sz="950" b="1">
-                <a:solidFill>
-                  <a:srgbClr val="E6EDF3"/>
-                </a:solidFill>
-                <a:latin typeface="Calibri"/>
-              </a:rPr>
-              <a:t>Strata</a:t>
-            </a:r>
-          </a:p>
-        </p:txBody>
-      </p:sp>
-      <p:sp>
-        <p:nvSpPr>
-          <p:cNvPr id="43" name="Rounded Rectangle 42"/>
-          <p:cNvSpPr/>
-          <p:nvPr/>
-        </p:nvSpPr>
-        <p:spPr>
-          <a:xfrm>
-            <a:off x="9217152" y="2871215"/>
-            <a:ext cx="649224" cy="384048"/>
-          </a:xfrm>
-          <a:prstGeom prst="roundRect">
-            <a:avLst>
-              <a:gd name="adj" fmla="val 50000"/>
-            </a:avLst>
-          </a:prstGeom>
-          <a:solidFill>
-            <a:srgbClr val="1A2332"/>
-          </a:solidFill>
-          <a:ln w="12700">
-            <a:solidFill>
-              <a:srgbClr val="1E2D3D"/>
-            </a:solidFill>
-          </a:ln>
-          <a:effectLst/>
-        </p:spPr>
-        <p:style>
-          <a:lnRef idx="1">
-            <a:schemeClr val="accent1"/>
-          </a:lnRef>
-          <a:fillRef idx="3">
-            <a:schemeClr val="accent1"/>
-          </a:fillRef>
-          <a:effectRef idx="2">
-            <a:schemeClr val="accent1"/>
-          </a:effectRef>
-          <a:fontRef idx="minor">
-            <a:schemeClr val="lt1"/>
-          </a:fontRef>
-        </p:style>
-        <p:txBody>
-          <a:bodyPr rtlCol="0" anchor="ctr"/>
-          <a:lstStyle/>
-          <a:p>
-            <a:pPr algn="ctr"/>
-          </a:p>
-        </p:txBody>
-      </p:sp>
-      <p:sp>
-        <p:nvSpPr>
-          <p:cNvPr id="44" name="TextBox 43"/>
-          <p:cNvSpPr txBox="1"/>
-          <p:nvPr/>
-        </p:nvSpPr>
-        <p:spPr>
-          <a:xfrm>
-            <a:off x="9217152" y="2871215"/>
-            <a:ext cx="649224" cy="384048"/>
-          </a:xfrm>
-          <a:prstGeom prst="rect">
-            <a:avLst/>
-          </a:prstGeom>
-          <a:noFill/>
-        </p:spPr>
-        <p:txBody>
-          <a:bodyPr wrap="square" anchor="ctr" lIns="0" rIns="0" tIns="0" bIns="0">
-            <a:spAutoFit/>
-          </a:bodyPr>
-          <a:lstStyle/>
-          <a:p>
-            <a:pPr algn="ctr">
-              <a:lnSpc>
-                <a:spcPct val="100000"/>
-              </a:lnSpc>
-            </a:pPr>
-            <a:r>
-              <a:rPr sz="950" b="1">
-                <a:solidFill>
-                  <a:srgbClr val="E6EDF3"/>
-                </a:solidFill>
-                <a:latin typeface="Calibri"/>
-              </a:rPr>
-              <a:t>Niecelny</a:t>
-            </a:r>
-          </a:p>
-        </p:txBody>
-      </p:sp>
-      <p:sp>
-        <p:nvSpPr>
-          <p:cNvPr id="45" name="Rounded Rectangle 44"/>
-          <p:cNvSpPr/>
-          <p:nvPr/>
-        </p:nvSpPr>
-        <p:spPr>
-          <a:xfrm>
-            <a:off x="9976104" y="2871215"/>
-            <a:ext cx="649224" cy="384048"/>
-          </a:xfrm>
-          <a:prstGeom prst="roundRect">
-            <a:avLst>
-              <a:gd name="adj" fmla="val 50000"/>
-            </a:avLst>
-          </a:prstGeom>
-          <a:solidFill>
-            <a:srgbClr val="1A2332"/>
-          </a:solidFill>
-          <a:ln w="12700">
-            <a:solidFill>
-              <a:srgbClr val="1E2D3D"/>
-            </a:solidFill>
-          </a:ln>
-          <a:effectLst/>
-        </p:spPr>
-        <p:style>
-          <a:lnRef idx="1">
-            <a:schemeClr val="accent1"/>
-          </a:lnRef>
-          <a:fillRef idx="3">
-            <a:schemeClr val="accent1"/>
-          </a:fillRef>
-          <a:effectRef idx="2">
-            <a:schemeClr val="accent1"/>
-          </a:effectRef>
-          <a:fontRef idx="minor">
-            <a:schemeClr val="lt1"/>
-          </a:fontRef>
-        </p:style>
-        <p:txBody>
-          <a:bodyPr rtlCol="0" anchor="ctr"/>
-          <a:lstStyle/>
-          <a:p>
-            <a:pPr algn="ctr"/>
-          </a:p>
-        </p:txBody>
-      </p:sp>
-      <p:sp>
-        <p:nvSpPr>
-          <p:cNvPr id="46" name="TextBox 45"/>
-          <p:cNvSpPr txBox="1"/>
-          <p:nvPr/>
-        </p:nvSpPr>
-        <p:spPr>
-          <a:xfrm>
-            <a:off x="9976104" y="2871215"/>
-            <a:ext cx="649224" cy="384048"/>
-          </a:xfrm>
-          <a:prstGeom prst="rect">
-            <a:avLst/>
-          </a:prstGeom>
-          <a:noFill/>
-        </p:spPr>
-        <p:txBody>
-          <a:bodyPr wrap="square" anchor="ctr" lIns="0" rIns="0" tIns="0" bIns="0">
-            <a:spAutoFit/>
-          </a:bodyPr>
-          <a:lstStyle/>
-          <a:p>
-            <a:pPr algn="ctr">
-              <a:lnSpc>
-                <a:spcPct val="100000"/>
-              </a:lnSpc>
-            </a:pPr>
-            <a:r>
-              <a:rPr sz="950" b="1">
-                <a:solidFill>
-                  <a:srgbClr val="E6EDF3"/>
-                </a:solidFill>
-                <a:latin typeface="Calibri"/>
-              </a:rPr>
-              <a:t>Wykl.</a:t>
-            </a:r>
-          </a:p>
-        </p:txBody>
-      </p:sp>
-      <p:sp>
-        <p:nvSpPr>
-          <p:cNvPr id="47" name="Rounded Rectangle 46"/>
-          <p:cNvSpPr/>
-          <p:nvPr/>
-        </p:nvSpPr>
-        <p:spPr>
-          <a:xfrm>
-            <a:off x="10735056" y="2871215"/>
-            <a:ext cx="649224" cy="384048"/>
-          </a:xfrm>
-          <a:prstGeom prst="roundRect">
-            <a:avLst>
-              <a:gd name="adj" fmla="val 50000"/>
-            </a:avLst>
-          </a:prstGeom>
-          <a:solidFill>
-            <a:srgbClr val="1A2332"/>
-          </a:solidFill>
-          <a:ln w="12700">
-            <a:solidFill>
-              <a:srgbClr val="1E2D3D"/>
-            </a:solidFill>
-          </a:ln>
-          <a:effectLst/>
-        </p:spPr>
-        <p:style>
-          <a:lnRef idx="1">
-            <a:schemeClr val="accent1"/>
-          </a:lnRef>
-          <a:fillRef idx="3">
-            <a:schemeClr val="accent1"/>
-          </a:fillRef>
-          <a:effectRef idx="2">
-            <a:schemeClr val="accent1"/>
-          </a:effectRef>
-          <a:fontRef idx="minor">
-            <a:schemeClr val="lt1"/>
-          </a:fontRef>
-        </p:style>
-        <p:txBody>
-          <a:bodyPr rtlCol="0" anchor="ctr"/>
-          <a:lstStyle/>
-          <a:p>
-            <a:pPr algn="ctr"/>
-          </a:p>
-        </p:txBody>
-      </p:sp>
-      <p:sp>
-        <p:nvSpPr>
-          <p:cNvPr id="48" name="TextBox 47"/>
-          <p:cNvSpPr txBox="1"/>
-          <p:nvPr/>
-        </p:nvSpPr>
-        <p:spPr>
-          <a:xfrm>
-            <a:off x="10735056" y="2871215"/>
-            <a:ext cx="649224" cy="384048"/>
-          </a:xfrm>
-          <a:prstGeom prst="rect">
-            <a:avLst/>
-          </a:prstGeom>
-          <a:noFill/>
-        </p:spPr>
-        <p:txBody>
-          <a:bodyPr wrap="square" anchor="ctr" lIns="0" rIns="0" tIns="0" bIns="0">
-            <a:spAutoFit/>
-          </a:bodyPr>
-          <a:lstStyle/>
-          <a:p>
-            <a:pPr algn="ctr">
-              <a:lnSpc>
-                <a:spcPct val="100000"/>
-              </a:lnSpc>
-            </a:pPr>
-            <a:r>
-              <a:rPr sz="950" b="1">
-                <a:solidFill>
-                  <a:srgbClr val="E6EDF3"/>
-                </a:solidFill>
-                <a:latin typeface="Calibri"/>
-              </a:rPr>
-              <a:t>Karny</a:t>
-            </a:r>
-          </a:p>
-        </p:txBody>
-      </p:sp>
-      <p:sp>
-        <p:nvSpPr>
-          <p:cNvPr id="49" name="Rounded Rectangle 48"/>
-          <p:cNvSpPr/>
-          <p:nvPr/>
-        </p:nvSpPr>
-        <p:spPr>
-          <a:xfrm>
-            <a:off x="8458200" y="3346703"/>
-            <a:ext cx="649224" cy="384048"/>
-          </a:xfrm>
-          <a:prstGeom prst="roundRect">
-            <a:avLst>
-              <a:gd name="adj" fmla="val 50000"/>
-            </a:avLst>
-          </a:prstGeom>
-          <a:solidFill>
-            <a:srgbClr val="1A2332"/>
-          </a:solidFill>
-          <a:ln w="12700">
-            <a:solidFill>
-              <a:srgbClr val="1E2D3D"/>
-            </a:solidFill>
-          </a:ln>
-          <a:effectLst/>
-        </p:spPr>
-        <p:style>
-          <a:lnRef idx="1">
-            <a:schemeClr val="accent1"/>
-          </a:lnRef>
-          <a:fillRef idx="3">
-            <a:schemeClr val="accent1"/>
-          </a:fillRef>
-          <a:effectRef idx="2">
-            <a:schemeClr val="accent1"/>
-          </a:effectRef>
-          <a:fontRef idx="minor">
-            <a:schemeClr val="lt1"/>
-          </a:fontRef>
-        </p:style>
-        <p:txBody>
-          <a:bodyPr rtlCol="0" anchor="ctr"/>
-          <a:lstStyle/>
-          <a:p>
-            <a:pPr algn="ctr"/>
-          </a:p>
-        </p:txBody>
-      </p:sp>
-      <p:sp>
-        <p:nvSpPr>
-          <p:cNvPr id="50" name="TextBox 49"/>
-          <p:cNvSpPr txBox="1"/>
-          <p:nvPr/>
-        </p:nvSpPr>
-        <p:spPr>
-          <a:xfrm>
-            <a:off x="8458200" y="3346703"/>
-            <a:ext cx="649224" cy="384048"/>
-          </a:xfrm>
-          <a:prstGeom prst="rect">
-            <a:avLst/>
-          </a:prstGeom>
-          <a:noFill/>
-        </p:spPr>
-        <p:txBody>
-          <a:bodyPr wrap="square" anchor="ctr" lIns="0" rIns="0" tIns="0" bIns="0">
-            <a:spAutoFit/>
-          </a:bodyPr>
-          <a:lstStyle/>
-          <a:p>
-            <a:pPr algn="ctr">
-              <a:lnSpc>
-                <a:spcPct val="100000"/>
-              </a:lnSpc>
-            </a:pPr>
-            <a:r>
-              <a:rPr sz="950" b="1">
-                <a:solidFill>
-                  <a:srgbClr val="E6EDF3"/>
-                </a:solidFill>
-                <a:latin typeface="Calibri"/>
-              </a:rPr>
-              <a:t>Przejęcie</a:t>
-            </a:r>
-          </a:p>
-        </p:txBody>
-      </p:sp>
-      <p:sp>
-        <p:nvSpPr>
-          <p:cNvPr id="51" name="Rounded Rectangle 50"/>
-          <p:cNvSpPr/>
-          <p:nvPr/>
-        </p:nvSpPr>
-        <p:spPr>
-          <a:xfrm>
-            <a:off x="9217152" y="3346703"/>
-            <a:ext cx="649224" cy="384048"/>
-          </a:xfrm>
-          <a:prstGeom prst="roundRect">
-            <a:avLst>
-              <a:gd name="adj" fmla="val 50000"/>
-            </a:avLst>
-          </a:prstGeom>
-          <a:solidFill>
-            <a:srgbClr val="1A2332"/>
-          </a:solidFill>
-          <a:ln w="12700">
-            <a:solidFill>
-              <a:srgbClr val="1E2D3D"/>
-            </a:solidFill>
-          </a:ln>
-          <a:effectLst/>
-        </p:spPr>
-        <p:style>
-          <a:lnRef idx="1">
-            <a:schemeClr val="accent1"/>
-          </a:lnRef>
-          <a:fillRef idx="3">
-            <a:schemeClr val="accent1"/>
-          </a:fillRef>
-          <a:effectRef idx="2">
-            <a:schemeClr val="accent1"/>
-          </a:effectRef>
-          <a:fontRef idx="minor">
-            <a:schemeClr val="lt1"/>
-          </a:fontRef>
-        </p:style>
-        <p:txBody>
-          <a:bodyPr rtlCol="0" anchor="ctr"/>
-          <a:lstStyle/>
-          <a:p>
-            <a:pPr algn="ctr"/>
-          </a:p>
-        </p:txBody>
-      </p:sp>
-      <p:sp>
-        <p:nvSpPr>
-          <p:cNvPr id="52" name="TextBox 51"/>
-          <p:cNvSpPr txBox="1"/>
-          <p:nvPr/>
-        </p:nvSpPr>
-        <p:spPr>
-          <a:xfrm>
-            <a:off x="9217152" y="3346703"/>
-            <a:ext cx="649224" cy="384048"/>
-          </a:xfrm>
-          <a:prstGeom prst="rect">
-            <a:avLst/>
-          </a:prstGeom>
-          <a:noFill/>
-        </p:spPr>
-        <p:txBody>
-          <a:bodyPr wrap="square" anchor="ctr" lIns="0" rIns="0" tIns="0" bIns="0">
-            <a:spAutoFit/>
-          </a:bodyPr>
-          <a:lstStyle/>
-          <a:p>
-            <a:pPr algn="ctr">
-              <a:lnSpc>
-                <a:spcPct val="100000"/>
-              </a:lnSpc>
-            </a:pPr>
-            <a:r>
-              <a:rPr sz="950" b="1">
-                <a:solidFill>
-                  <a:srgbClr val="E6EDF3"/>
-                </a:solidFill>
-                <a:latin typeface="Calibri"/>
-              </a:rPr>
-              <a:t>Blok</a:t>
-            </a:r>
-          </a:p>
-        </p:txBody>
-      </p:sp>
-      <p:sp>
-        <p:nvSpPr>
-          <p:cNvPr id="53" name="Rounded Rectangle 52"/>
-          <p:cNvSpPr/>
-          <p:nvPr/>
-        </p:nvSpPr>
-        <p:spPr>
-          <a:xfrm>
-            <a:off x="9976104" y="3346703"/>
-            <a:ext cx="649224" cy="384048"/>
-          </a:xfrm>
-          <a:prstGeom prst="roundRect">
-            <a:avLst>
-              <a:gd name="adj" fmla="val 50000"/>
-            </a:avLst>
-          </a:prstGeom>
-          <a:solidFill>
-            <a:srgbClr val="1A2332"/>
-          </a:solidFill>
-          <a:ln w="12700">
-            <a:solidFill>
-              <a:srgbClr val="1E2D3D"/>
-            </a:solidFill>
-          </a:ln>
-          <a:effectLst/>
-        </p:spPr>
-        <p:style>
-          <a:lnRef idx="1">
-            <a:schemeClr val="accent1"/>
-          </a:lnRef>
-          <a:fillRef idx="3">
-            <a:schemeClr val="accent1"/>
-          </a:fillRef>
-          <a:effectRef idx="2">
-            <a:schemeClr val="accent1"/>
-          </a:effectRef>
-          <a:fontRef idx="minor">
-            <a:schemeClr val="lt1"/>
-          </a:fontRef>
-        </p:style>
-        <p:txBody>
-          <a:bodyPr rtlCol="0" anchor="ctr"/>
-          <a:lstStyle/>
-          <a:p>
-            <a:pPr algn="ctr"/>
-          </a:p>
-        </p:txBody>
-      </p:sp>
-      <p:sp>
-        <p:nvSpPr>
-          <p:cNvPr id="54" name="TextBox 53"/>
-          <p:cNvSpPr txBox="1"/>
-          <p:nvPr/>
-        </p:nvSpPr>
-        <p:spPr>
-          <a:xfrm>
-            <a:off x="9976104" y="3346703"/>
-            <a:ext cx="649224" cy="384048"/>
-          </a:xfrm>
-          <a:prstGeom prst="rect">
-            <a:avLst/>
-          </a:prstGeom>
-          <a:noFill/>
-        </p:spPr>
-        <p:txBody>
-          <a:bodyPr wrap="square" anchor="ctr" lIns="0" rIns="0" tIns="0" bIns="0">
-            <a:spAutoFit/>
-          </a:bodyPr>
-          <a:lstStyle/>
-          <a:p>
-            <a:pPr algn="ctr">
-              <a:lnSpc>
-                <a:spcPct val="100000"/>
-              </a:lnSpc>
-            </a:pPr>
-            <a:r>
-              <a:rPr sz="950" b="1">
-                <a:solidFill>
-                  <a:srgbClr val="E6EDF3"/>
-                </a:solidFill>
-                <a:latin typeface="Calibri"/>
-              </a:rPr>
-              <a:t>Centra</a:t>
-            </a:r>
-          </a:p>
-        </p:txBody>
-      </p:sp>
-      <p:sp>
-        <p:nvSpPr>
-          <p:cNvPr id="55" name="Rounded Rectangle 54"/>
-          <p:cNvSpPr/>
-          <p:nvPr/>
-        </p:nvSpPr>
-        <p:spPr>
-          <a:xfrm>
-            <a:off x="10735056" y="3346703"/>
-            <a:ext cx="649224" cy="384048"/>
-          </a:xfrm>
-          <a:prstGeom prst="roundRect">
-            <a:avLst>
-              <a:gd name="adj" fmla="val 50000"/>
-            </a:avLst>
-          </a:prstGeom>
-          <a:solidFill>
-            <a:srgbClr val="1A2332"/>
-          </a:solidFill>
-          <a:ln w="12700">
-            <a:solidFill>
-              <a:srgbClr val="1E2D3D"/>
-            </a:solidFill>
-          </a:ln>
-          <a:effectLst/>
-        </p:spPr>
-        <p:style>
-          <a:lnRef idx="1">
-            <a:schemeClr val="accent1"/>
-          </a:lnRef>
-          <a:fillRef idx="3">
-            <a:schemeClr val="accent1"/>
-          </a:fillRef>
-          <a:effectRef idx="2">
-            <a:schemeClr val="accent1"/>
-          </a:effectRef>
-          <a:fontRef idx="minor">
-            <a:schemeClr val="lt1"/>
-          </a:fontRef>
-        </p:style>
-        <p:txBody>
-          <a:bodyPr rtlCol="0" anchor="ctr"/>
-          <a:lstStyle/>
-          <a:p>
-            <a:pPr algn="ctr"/>
-          </a:p>
-        </p:txBody>
-      </p:sp>
-      <p:sp>
-        <p:nvSpPr>
-          <p:cNvPr id="56" name="TextBox 55"/>
-          <p:cNvSpPr txBox="1"/>
-          <p:nvPr/>
-        </p:nvSpPr>
-        <p:spPr>
-          <a:xfrm>
-            <a:off x="10735056" y="3346703"/>
-            <a:ext cx="649224" cy="384048"/>
-          </a:xfrm>
-          <a:prstGeom prst="rect">
-            <a:avLst/>
-          </a:prstGeom>
-          <a:noFill/>
-        </p:spPr>
-        <p:txBody>
-          <a:bodyPr wrap="square" anchor="ctr" lIns="0" rIns="0" tIns="0" bIns="0">
-            <a:spAutoFit/>
-          </a:bodyPr>
-          <a:lstStyle/>
-          <a:p>
-            <a:pPr algn="ctr">
-              <a:lnSpc>
-                <a:spcPct val="100000"/>
-              </a:lnSpc>
-            </a:pPr>
-            <a:r>
-              <a:rPr sz="950" b="1">
-                <a:solidFill>
-                  <a:srgbClr val="E6EDF3"/>
-                </a:solidFill>
-                <a:latin typeface="Calibri"/>
-              </a:rPr>
-              <a:t>5m</a:t>
-            </a:r>
-          </a:p>
-        </p:txBody>
-      </p:sp>
-      <p:sp>
-        <p:nvSpPr>
-          <p:cNvPr id="57" name="Rounded Rectangle 56"/>
-          <p:cNvSpPr/>
-          <p:nvPr/>
-        </p:nvSpPr>
-        <p:spPr>
-          <a:xfrm>
-            <a:off x="8458200" y="3931920"/>
-            <a:ext cx="2926079" cy="457200"/>
-          </a:xfrm>
-          <a:prstGeom prst="roundRect">
-            <a:avLst>
-              <a:gd name="adj" fmla="val 12000"/>
-            </a:avLst>
-          </a:prstGeom>
-          <a:solidFill>
-            <a:srgbClr val="102A33"/>
-          </a:solidFill>
-          <a:ln w="15875">
-            <a:solidFill>
-              <a:srgbClr val="4CC9F0"/>
-            </a:solidFill>
-          </a:ln>
-          <a:effectLst/>
-        </p:spPr>
-        <p:style>
-          <a:lnRef idx="1">
-            <a:schemeClr val="accent1"/>
-          </a:lnRef>
-          <a:fillRef idx="3">
-            <a:schemeClr val="accent1"/>
-          </a:fillRef>
-          <a:effectRef idx="2">
-            <a:schemeClr val="accent1"/>
-          </a:effectRef>
-          <a:fontRef idx="minor">
-            <a:schemeClr val="lt1"/>
-          </a:fontRef>
-        </p:style>
-        <p:txBody>
-          <a:bodyPr rtlCol="0" anchor="ctr"/>
-          <a:lstStyle/>
-          <a:p>
-            <a:pPr algn="ctr"/>
-          </a:p>
-        </p:txBody>
-      </p:sp>
-      <p:sp>
-        <p:nvSpPr>
-          <p:cNvPr id="58" name="TextBox 57"/>
-          <p:cNvSpPr txBox="1"/>
-          <p:nvPr/>
-        </p:nvSpPr>
-        <p:spPr>
-          <a:xfrm>
-            <a:off x="8458200" y="3931920"/>
-            <a:ext cx="2926079" cy="457200"/>
-          </a:xfrm>
-          <a:prstGeom prst="rect">
-            <a:avLst/>
-          </a:prstGeom>
-          <a:noFill/>
-        </p:spPr>
-        <p:txBody>
-          <a:bodyPr wrap="square" anchor="ctr" lIns="0" rIns="0" tIns="0" bIns="0">
-            <a:spAutoFit/>
-          </a:bodyPr>
-          <a:lstStyle/>
-          <a:p>
-            <a:pPr algn="ctr">
-              <a:lnSpc>
-                <a:spcPct val="100000"/>
-              </a:lnSpc>
-            </a:pPr>
-            <a:r>
-              <a:rPr sz="1200" b="1">
-                <a:solidFill>
-                  <a:srgbClr val="4CC9F0"/>
-                </a:solidFill>
-                <a:latin typeface="Calibri"/>
-              </a:rPr>
-              <a:t>🎤  Komenda głosem</a:t>
-            </a:r>
           </a:p>
         </p:txBody>
       </p:sp>
@@ -16904,45 +13110,30 @@
           </a:p>
         </p:txBody>
       </p:sp>
-      <p:sp>
-        <p:nvSpPr>
-          <p:cNvPr id="14" name="TextBox 13"/>
-          <p:cNvSpPr txBox="1"/>
-          <p:nvPr/>
-        </p:nvSpPr>
-        <p:spPr>
-          <a:xfrm>
-            <a:off x="731520" y="2395728"/>
-            <a:ext cx="1554480" cy="274320"/>
+      <p:pic>
+        <p:nvPicPr>
+          <p:cNvPr id="14" name="Picture 13" descr="asystent.png"/>
+          <p:cNvPicPr>
+            <a:picLocks noChangeAspect="1"/>
+          </p:cNvPicPr>
+          <p:nvPr/>
+        </p:nvPicPr>
+        <p:blipFill>
+          <a:blip r:embed="rId2"/>
+          <a:stretch>
+            <a:fillRect/>
+          </a:stretch>
+        </p:blipFill>
+        <p:spPr>
+          <a:xfrm>
+            <a:off x="1372839" y="2340864"/>
+            <a:ext cx="4240336" cy="3474720"/>
           </a:xfrm>
           <a:prstGeom prst="rect">
             <a:avLst/>
           </a:prstGeom>
-          <a:noFill/>
-        </p:spPr>
-        <p:txBody>
-          <a:bodyPr wrap="square" anchor="ctr" lIns="0" rIns="0" tIns="0" bIns="0">
-            <a:spAutoFit/>
-          </a:bodyPr>
-          <a:lstStyle/>
-          <a:p>
-            <a:pPr algn="l">
-              <a:lnSpc>
-                <a:spcPct val="100000"/>
-              </a:lnSpc>
-            </a:pPr>
-            <a:r>
-              <a:rPr sz="1000" b="1">
-                <a:solidFill>
-                  <a:srgbClr val="4CC9F0"/>
-                </a:solidFill>
-                <a:latin typeface="Calibri"/>
-              </a:rPr>
-              <a:t>WODA</a:t>
-            </a:r>
-          </a:p>
-        </p:txBody>
-      </p:sp>
+        </p:spPr>
+      </p:pic>
       <p:sp>
         <p:nvSpPr>
           <p:cNvPr id="15" name="Rounded Rectangle 14"/>
@@ -16951,18 +13142,16 @@
         </p:nvSpPr>
         <p:spPr>
           <a:xfrm>
-            <a:off x="731520" y="2743200"/>
-            <a:ext cx="1554480" cy="384048"/>
+            <a:off x="1372839" y="2340864"/>
+            <a:ext cx="4240336" cy="3474720"/>
           </a:xfrm>
           <a:prstGeom prst="roundRect">
             <a:avLst>
-              <a:gd name="adj" fmla="val 18000"/>
+              <a:gd name="adj" fmla="val 1500"/>
             </a:avLst>
           </a:prstGeom>
-          <a:solidFill>
-            <a:srgbClr val="1A2332"/>
-          </a:solidFill>
-          <a:ln w="12700">
+          <a:noFill/>
+          <a:ln w="9525">
             <a:solidFill>
               <a:srgbClr val="1E2D3D"/>
             </a:solidFill>
@@ -16993,1802 +13182,7 @@
       </p:sp>
       <p:sp>
         <p:nvSpPr>
-          <p:cNvPr id="16" name="Oval 15"/>
-          <p:cNvSpPr/>
-          <p:nvPr/>
-        </p:nvSpPr>
-        <p:spPr>
-          <a:xfrm>
-            <a:off x="822960" y="2807208"/>
-            <a:ext cx="256032" cy="256032"/>
-          </a:xfrm>
-          <a:prstGeom prst="ellipse">
-            <a:avLst/>
-          </a:prstGeom>
-          <a:solidFill>
-            <a:srgbClr val="145366"/>
-          </a:solidFill>
-          <a:ln w="12700">
-            <a:solidFill>
-              <a:srgbClr val="4CC9F0"/>
-            </a:solidFill>
-          </a:ln>
-          <a:effectLst/>
-        </p:spPr>
-        <p:style>
-          <a:lnRef idx="1">
-            <a:schemeClr val="accent1"/>
-          </a:lnRef>
-          <a:fillRef idx="3">
-            <a:schemeClr val="accent1"/>
-          </a:fillRef>
-          <a:effectRef idx="2">
-            <a:schemeClr val="accent1"/>
-          </a:effectRef>
-          <a:fontRef idx="minor">
-            <a:schemeClr val="lt1"/>
-          </a:fontRef>
-        </p:style>
-        <p:txBody>
-          <a:bodyPr rtlCol="0" anchor="ctr"/>
-          <a:lstStyle/>
-          <a:p>
-            <a:pPr algn="ctr"/>
-          </a:p>
-        </p:txBody>
-      </p:sp>
-      <p:sp>
-        <p:nvSpPr>
-          <p:cNvPr id="17" name="TextBox 16"/>
-          <p:cNvSpPr txBox="1"/>
-          <p:nvPr/>
-        </p:nvSpPr>
-        <p:spPr>
-          <a:xfrm>
-            <a:off x="822960" y="2807208"/>
-            <a:ext cx="256032" cy="256032"/>
-          </a:xfrm>
-          <a:prstGeom prst="rect">
-            <a:avLst/>
-          </a:prstGeom>
-          <a:noFill/>
-        </p:spPr>
-        <p:txBody>
-          <a:bodyPr wrap="square" anchor="ctr" lIns="0" rIns="0" tIns="0" bIns="0">
-            <a:spAutoFit/>
-          </a:bodyPr>
-          <a:lstStyle/>
-          <a:p>
-            <a:pPr algn="ctr">
-              <a:lnSpc>
-                <a:spcPct val="100000"/>
-              </a:lnSpc>
-            </a:pPr>
-            <a:r>
-              <a:rPr sz="1000" b="1">
-                <a:solidFill>
-                  <a:srgbClr val="4CC9F0"/>
-                </a:solidFill>
-                <a:latin typeface="Calibri"/>
-              </a:rPr>
-              <a:t>12</a:t>
-            </a:r>
-          </a:p>
-        </p:txBody>
-      </p:sp>
-      <p:sp>
-        <p:nvSpPr>
-          <p:cNvPr id="18" name="Rounded Rectangle 17"/>
-          <p:cNvSpPr/>
-          <p:nvPr/>
-        </p:nvSpPr>
-        <p:spPr>
-          <a:xfrm>
-            <a:off x="1225295" y="2889504"/>
-            <a:ext cx="640080" cy="109728"/>
-          </a:xfrm>
-          <a:prstGeom prst="roundRect">
-            <a:avLst>
-              <a:gd name="adj" fmla="val 50000"/>
-            </a:avLst>
-          </a:prstGeom>
-          <a:solidFill>
-            <a:srgbClr val="1E2D3D"/>
-          </a:solidFill>
-          <a:ln>
-            <a:noFill/>
-          </a:ln>
-          <a:effectLst/>
-        </p:spPr>
-        <p:style>
-          <a:lnRef idx="1">
-            <a:schemeClr val="accent1"/>
-          </a:lnRef>
-          <a:fillRef idx="3">
-            <a:schemeClr val="accent1"/>
-          </a:fillRef>
-          <a:effectRef idx="2">
-            <a:schemeClr val="accent1"/>
-          </a:effectRef>
-          <a:fontRef idx="minor">
-            <a:schemeClr val="lt1"/>
-          </a:fontRef>
-        </p:style>
-        <p:txBody>
-          <a:bodyPr rtlCol="0" anchor="ctr"/>
-          <a:lstStyle/>
-          <a:p>
-            <a:pPr algn="ctr"/>
-          </a:p>
-        </p:txBody>
-      </p:sp>
-      <p:sp>
-        <p:nvSpPr>
-          <p:cNvPr id="19" name="Rounded Rectangle 18"/>
-          <p:cNvSpPr/>
-          <p:nvPr/>
-        </p:nvSpPr>
-        <p:spPr>
-          <a:xfrm>
-            <a:off x="731520" y="3200400"/>
-            <a:ext cx="1554480" cy="384048"/>
-          </a:xfrm>
-          <a:prstGeom prst="roundRect">
-            <a:avLst>
-              <a:gd name="adj" fmla="val 18000"/>
-            </a:avLst>
-          </a:prstGeom>
-          <a:solidFill>
-            <a:srgbClr val="1A2332"/>
-          </a:solidFill>
-          <a:ln w="12700">
-            <a:solidFill>
-              <a:srgbClr val="1E2D3D"/>
-            </a:solidFill>
-          </a:ln>
-          <a:effectLst/>
-        </p:spPr>
-        <p:style>
-          <a:lnRef idx="1">
-            <a:schemeClr val="accent1"/>
-          </a:lnRef>
-          <a:fillRef idx="3">
-            <a:schemeClr val="accent1"/>
-          </a:fillRef>
-          <a:effectRef idx="2">
-            <a:schemeClr val="accent1"/>
-          </a:effectRef>
-          <a:fontRef idx="minor">
-            <a:schemeClr val="lt1"/>
-          </a:fontRef>
-        </p:style>
-        <p:txBody>
-          <a:bodyPr rtlCol="0" anchor="ctr"/>
-          <a:lstStyle/>
-          <a:p>
-            <a:pPr algn="ctr"/>
-          </a:p>
-        </p:txBody>
-      </p:sp>
-      <p:sp>
-        <p:nvSpPr>
-          <p:cNvPr id="20" name="Oval 19"/>
-          <p:cNvSpPr/>
-          <p:nvPr/>
-        </p:nvSpPr>
-        <p:spPr>
-          <a:xfrm>
-            <a:off x="822960" y="3264408"/>
-            <a:ext cx="256032" cy="256032"/>
-          </a:xfrm>
-          <a:prstGeom prst="ellipse">
-            <a:avLst/>
-          </a:prstGeom>
-          <a:solidFill>
-            <a:srgbClr val="145366"/>
-          </a:solidFill>
-          <a:ln w="12700">
-            <a:solidFill>
-              <a:srgbClr val="4CC9F0"/>
-            </a:solidFill>
-          </a:ln>
-          <a:effectLst/>
-        </p:spPr>
-        <p:style>
-          <a:lnRef idx="1">
-            <a:schemeClr val="accent1"/>
-          </a:lnRef>
-          <a:fillRef idx="3">
-            <a:schemeClr val="accent1"/>
-          </a:fillRef>
-          <a:effectRef idx="2">
-            <a:schemeClr val="accent1"/>
-          </a:effectRef>
-          <a:fontRef idx="minor">
-            <a:schemeClr val="lt1"/>
-          </a:fontRef>
-        </p:style>
-        <p:txBody>
-          <a:bodyPr rtlCol="0" anchor="ctr"/>
-          <a:lstStyle/>
-          <a:p>
-            <a:pPr algn="ctr"/>
-          </a:p>
-        </p:txBody>
-      </p:sp>
-      <p:sp>
-        <p:nvSpPr>
-          <p:cNvPr id="21" name="TextBox 20"/>
-          <p:cNvSpPr txBox="1"/>
-          <p:nvPr/>
-        </p:nvSpPr>
-        <p:spPr>
-          <a:xfrm>
-            <a:off x="822960" y="3264408"/>
-            <a:ext cx="256032" cy="256032"/>
-          </a:xfrm>
-          <a:prstGeom prst="rect">
-            <a:avLst/>
-          </a:prstGeom>
-          <a:noFill/>
-        </p:spPr>
-        <p:txBody>
-          <a:bodyPr wrap="square" anchor="ctr" lIns="0" rIns="0" tIns="0" bIns="0">
-            <a:spAutoFit/>
-          </a:bodyPr>
-          <a:lstStyle/>
-          <a:p>
-            <a:pPr algn="ctr">
-              <a:lnSpc>
-                <a:spcPct val="100000"/>
-              </a:lnSpc>
-            </a:pPr>
-            <a:r>
-              <a:rPr sz="1000" b="1">
-                <a:solidFill>
-                  <a:srgbClr val="4CC9F0"/>
-                </a:solidFill>
-                <a:latin typeface="Calibri"/>
-              </a:rPr>
-              <a:t>7</a:t>
-            </a:r>
-          </a:p>
-        </p:txBody>
-      </p:sp>
-      <p:sp>
-        <p:nvSpPr>
-          <p:cNvPr id="22" name="Rounded Rectangle 21"/>
-          <p:cNvSpPr/>
-          <p:nvPr/>
-        </p:nvSpPr>
-        <p:spPr>
-          <a:xfrm>
-            <a:off x="1225295" y="3346704"/>
-            <a:ext cx="640080" cy="109728"/>
-          </a:xfrm>
-          <a:prstGeom prst="roundRect">
-            <a:avLst>
-              <a:gd name="adj" fmla="val 50000"/>
-            </a:avLst>
-          </a:prstGeom>
-          <a:solidFill>
-            <a:srgbClr val="1E2D3D"/>
-          </a:solidFill>
-          <a:ln>
-            <a:noFill/>
-          </a:ln>
-          <a:effectLst/>
-        </p:spPr>
-        <p:style>
-          <a:lnRef idx="1">
-            <a:schemeClr val="accent1"/>
-          </a:lnRef>
-          <a:fillRef idx="3">
-            <a:schemeClr val="accent1"/>
-          </a:fillRef>
-          <a:effectRef idx="2">
-            <a:schemeClr val="accent1"/>
-          </a:effectRef>
-          <a:fontRef idx="minor">
-            <a:schemeClr val="lt1"/>
-          </a:fontRef>
-        </p:style>
-        <p:txBody>
-          <a:bodyPr rtlCol="0" anchor="ctr"/>
-          <a:lstStyle/>
-          <a:p>
-            <a:pPr algn="ctr"/>
-          </a:p>
-        </p:txBody>
-      </p:sp>
-      <p:sp>
-        <p:nvSpPr>
-          <p:cNvPr id="23" name="Rounded Rectangle 22"/>
-          <p:cNvSpPr/>
-          <p:nvPr/>
-        </p:nvSpPr>
-        <p:spPr>
-          <a:xfrm>
-            <a:off x="731520" y="3657600"/>
-            <a:ext cx="1554480" cy="384048"/>
-          </a:xfrm>
-          <a:prstGeom prst="roundRect">
-            <a:avLst>
-              <a:gd name="adj" fmla="val 18000"/>
-            </a:avLst>
-          </a:prstGeom>
-          <a:solidFill>
-            <a:srgbClr val="1A2332"/>
-          </a:solidFill>
-          <a:ln w="12700">
-            <a:solidFill>
-              <a:srgbClr val="1E2D3D"/>
-            </a:solidFill>
-          </a:ln>
-          <a:effectLst/>
-        </p:spPr>
-        <p:style>
-          <a:lnRef idx="1">
-            <a:schemeClr val="accent1"/>
-          </a:lnRef>
-          <a:fillRef idx="3">
-            <a:schemeClr val="accent1"/>
-          </a:fillRef>
-          <a:effectRef idx="2">
-            <a:schemeClr val="accent1"/>
-          </a:effectRef>
-          <a:fontRef idx="minor">
-            <a:schemeClr val="lt1"/>
-          </a:fontRef>
-        </p:style>
-        <p:txBody>
-          <a:bodyPr rtlCol="0" anchor="ctr"/>
-          <a:lstStyle/>
-          <a:p>
-            <a:pPr algn="ctr"/>
-          </a:p>
-        </p:txBody>
-      </p:sp>
-      <p:sp>
-        <p:nvSpPr>
-          <p:cNvPr id="24" name="Oval 23"/>
-          <p:cNvSpPr/>
-          <p:nvPr/>
-        </p:nvSpPr>
-        <p:spPr>
-          <a:xfrm>
-            <a:off x="822960" y="3721608"/>
-            <a:ext cx="256032" cy="256032"/>
-          </a:xfrm>
-          <a:prstGeom prst="ellipse">
-            <a:avLst/>
-          </a:prstGeom>
-          <a:solidFill>
-            <a:srgbClr val="145366"/>
-          </a:solidFill>
-          <a:ln w="12700">
-            <a:solidFill>
-              <a:srgbClr val="4CC9F0"/>
-            </a:solidFill>
-          </a:ln>
-          <a:effectLst/>
-        </p:spPr>
-        <p:style>
-          <a:lnRef idx="1">
-            <a:schemeClr val="accent1"/>
-          </a:lnRef>
-          <a:fillRef idx="3">
-            <a:schemeClr val="accent1"/>
-          </a:fillRef>
-          <a:effectRef idx="2">
-            <a:schemeClr val="accent1"/>
-          </a:effectRef>
-          <a:fontRef idx="minor">
-            <a:schemeClr val="lt1"/>
-          </a:fontRef>
-        </p:style>
-        <p:txBody>
-          <a:bodyPr rtlCol="0" anchor="ctr"/>
-          <a:lstStyle/>
-          <a:p>
-            <a:pPr algn="ctr"/>
-          </a:p>
-        </p:txBody>
-      </p:sp>
-      <p:sp>
-        <p:nvSpPr>
-          <p:cNvPr id="25" name="TextBox 24"/>
-          <p:cNvSpPr txBox="1"/>
-          <p:nvPr/>
-        </p:nvSpPr>
-        <p:spPr>
-          <a:xfrm>
-            <a:off x="822960" y="3721608"/>
-            <a:ext cx="256032" cy="256032"/>
-          </a:xfrm>
-          <a:prstGeom prst="rect">
-            <a:avLst/>
-          </a:prstGeom>
-          <a:noFill/>
-        </p:spPr>
-        <p:txBody>
-          <a:bodyPr wrap="square" anchor="ctr" lIns="0" rIns="0" tIns="0" bIns="0">
-            <a:spAutoFit/>
-          </a:bodyPr>
-          <a:lstStyle/>
-          <a:p>
-            <a:pPr algn="ctr">
-              <a:lnSpc>
-                <a:spcPct val="100000"/>
-              </a:lnSpc>
-            </a:pPr>
-            <a:r>
-              <a:rPr sz="1000" b="1">
-                <a:solidFill>
-                  <a:srgbClr val="4CC9F0"/>
-                </a:solidFill>
-                <a:latin typeface="Calibri"/>
-              </a:rPr>
-              <a:t>4</a:t>
-            </a:r>
-          </a:p>
-        </p:txBody>
-      </p:sp>
-      <p:sp>
-        <p:nvSpPr>
-          <p:cNvPr id="26" name="Rounded Rectangle 25"/>
-          <p:cNvSpPr/>
-          <p:nvPr/>
-        </p:nvSpPr>
-        <p:spPr>
-          <a:xfrm>
-            <a:off x="1225295" y="3803904"/>
-            <a:ext cx="640080" cy="109728"/>
-          </a:xfrm>
-          <a:prstGeom prst="roundRect">
-            <a:avLst>
-              <a:gd name="adj" fmla="val 50000"/>
-            </a:avLst>
-          </a:prstGeom>
-          <a:solidFill>
-            <a:srgbClr val="1E2D3D"/>
-          </a:solidFill>
-          <a:ln>
-            <a:noFill/>
-          </a:ln>
-          <a:effectLst/>
-        </p:spPr>
-        <p:style>
-          <a:lnRef idx="1">
-            <a:schemeClr val="accent1"/>
-          </a:lnRef>
-          <a:fillRef idx="3">
-            <a:schemeClr val="accent1"/>
-          </a:fillRef>
-          <a:effectRef idx="2">
-            <a:schemeClr val="accent1"/>
-          </a:effectRef>
-          <a:fontRef idx="minor">
-            <a:schemeClr val="lt1"/>
-          </a:fontRef>
-        </p:style>
-        <p:txBody>
-          <a:bodyPr rtlCol="0" anchor="ctr"/>
-          <a:lstStyle/>
-          <a:p>
-            <a:pPr algn="ctr"/>
-          </a:p>
-        </p:txBody>
-      </p:sp>
-      <p:sp>
-        <p:nvSpPr>
-          <p:cNvPr id="27" name="Rounded Rectangle 26"/>
-          <p:cNvSpPr/>
-          <p:nvPr/>
-        </p:nvSpPr>
-        <p:spPr>
-          <a:xfrm>
-            <a:off x="731520" y="4114800"/>
-            <a:ext cx="1554480" cy="384048"/>
-          </a:xfrm>
-          <a:prstGeom prst="roundRect">
-            <a:avLst>
-              <a:gd name="adj" fmla="val 18000"/>
-            </a:avLst>
-          </a:prstGeom>
-          <a:solidFill>
-            <a:srgbClr val="1A2332"/>
-          </a:solidFill>
-          <a:ln w="12700">
-            <a:solidFill>
-              <a:srgbClr val="1E2D3D"/>
-            </a:solidFill>
-          </a:ln>
-          <a:effectLst/>
-        </p:spPr>
-        <p:style>
-          <a:lnRef idx="1">
-            <a:schemeClr val="accent1"/>
-          </a:lnRef>
-          <a:fillRef idx="3">
-            <a:schemeClr val="accent1"/>
-          </a:fillRef>
-          <a:effectRef idx="2">
-            <a:schemeClr val="accent1"/>
-          </a:effectRef>
-          <a:fontRef idx="minor">
-            <a:schemeClr val="lt1"/>
-          </a:fontRef>
-        </p:style>
-        <p:txBody>
-          <a:bodyPr rtlCol="0" anchor="ctr"/>
-          <a:lstStyle/>
-          <a:p>
-            <a:pPr algn="ctr"/>
-          </a:p>
-        </p:txBody>
-      </p:sp>
-      <p:sp>
-        <p:nvSpPr>
-          <p:cNvPr id="28" name="Oval 27"/>
-          <p:cNvSpPr/>
-          <p:nvPr/>
-        </p:nvSpPr>
-        <p:spPr>
-          <a:xfrm>
-            <a:off x="822960" y="4178808"/>
-            <a:ext cx="256032" cy="256032"/>
-          </a:xfrm>
-          <a:prstGeom prst="ellipse">
-            <a:avLst/>
-          </a:prstGeom>
-          <a:solidFill>
-            <a:srgbClr val="145366"/>
-          </a:solidFill>
-          <a:ln w="12700">
-            <a:solidFill>
-              <a:srgbClr val="4CC9F0"/>
-            </a:solidFill>
-          </a:ln>
-          <a:effectLst/>
-        </p:spPr>
-        <p:style>
-          <a:lnRef idx="1">
-            <a:schemeClr val="accent1"/>
-          </a:lnRef>
-          <a:fillRef idx="3">
-            <a:schemeClr val="accent1"/>
-          </a:fillRef>
-          <a:effectRef idx="2">
-            <a:schemeClr val="accent1"/>
-          </a:effectRef>
-          <a:fontRef idx="minor">
-            <a:schemeClr val="lt1"/>
-          </a:fontRef>
-        </p:style>
-        <p:txBody>
-          <a:bodyPr rtlCol="0" anchor="ctr"/>
-          <a:lstStyle/>
-          <a:p>
-            <a:pPr algn="ctr"/>
-          </a:p>
-        </p:txBody>
-      </p:sp>
-      <p:sp>
-        <p:nvSpPr>
-          <p:cNvPr id="29" name="TextBox 28"/>
-          <p:cNvSpPr txBox="1"/>
-          <p:nvPr/>
-        </p:nvSpPr>
-        <p:spPr>
-          <a:xfrm>
-            <a:off x="822960" y="4178808"/>
-            <a:ext cx="256032" cy="256032"/>
-          </a:xfrm>
-          <a:prstGeom prst="rect">
-            <a:avLst/>
-          </a:prstGeom>
-          <a:noFill/>
-        </p:spPr>
-        <p:txBody>
-          <a:bodyPr wrap="square" anchor="ctr" lIns="0" rIns="0" tIns="0" bIns="0">
-            <a:spAutoFit/>
-          </a:bodyPr>
-          <a:lstStyle/>
-          <a:p>
-            <a:pPr algn="ctr">
-              <a:lnSpc>
-                <a:spcPct val="100000"/>
-              </a:lnSpc>
-            </a:pPr>
-            <a:r>
-              <a:rPr sz="1000" b="1">
-                <a:solidFill>
-                  <a:srgbClr val="4CC9F0"/>
-                </a:solidFill>
-                <a:latin typeface="Calibri"/>
-              </a:rPr>
-              <a:t>9</a:t>
-            </a:r>
-          </a:p>
-        </p:txBody>
-      </p:sp>
-      <p:sp>
-        <p:nvSpPr>
-          <p:cNvPr id="30" name="Rounded Rectangle 29"/>
-          <p:cNvSpPr/>
-          <p:nvPr/>
-        </p:nvSpPr>
-        <p:spPr>
-          <a:xfrm>
-            <a:off x="1225295" y="4261104"/>
-            <a:ext cx="640080" cy="109728"/>
-          </a:xfrm>
-          <a:prstGeom prst="roundRect">
-            <a:avLst>
-              <a:gd name="adj" fmla="val 50000"/>
-            </a:avLst>
-          </a:prstGeom>
-          <a:solidFill>
-            <a:srgbClr val="1E2D3D"/>
-          </a:solidFill>
-          <a:ln>
-            <a:noFill/>
-          </a:ln>
-          <a:effectLst/>
-        </p:spPr>
-        <p:style>
-          <a:lnRef idx="1">
-            <a:schemeClr val="accent1"/>
-          </a:lnRef>
-          <a:fillRef idx="3">
-            <a:schemeClr val="accent1"/>
-          </a:fillRef>
-          <a:effectRef idx="2">
-            <a:schemeClr val="accent1"/>
-          </a:effectRef>
-          <a:fontRef idx="minor">
-            <a:schemeClr val="lt1"/>
-          </a:fontRef>
-        </p:style>
-        <p:txBody>
-          <a:bodyPr rtlCol="0" anchor="ctr"/>
-          <a:lstStyle/>
-          <a:p>
-            <a:pPr algn="ctr"/>
-          </a:p>
-        </p:txBody>
-      </p:sp>
-      <p:sp>
-        <p:nvSpPr>
-          <p:cNvPr id="31" name="Rounded Rectangle 30"/>
-          <p:cNvSpPr/>
-          <p:nvPr/>
-        </p:nvSpPr>
-        <p:spPr>
-          <a:xfrm>
-            <a:off x="2487168" y="2441448"/>
-            <a:ext cx="843534" cy="384048"/>
-          </a:xfrm>
-          <a:prstGeom prst="roundRect">
-            <a:avLst>
-              <a:gd name="adj" fmla="val 50000"/>
-            </a:avLst>
-          </a:prstGeom>
-          <a:solidFill>
-            <a:srgbClr val="4CC9F0"/>
-          </a:solidFill>
-          <a:ln>
-            <a:noFill/>
-          </a:ln>
-          <a:effectLst/>
-        </p:spPr>
-        <p:style>
-          <a:lnRef idx="1">
-            <a:schemeClr val="accent1"/>
-          </a:lnRef>
-          <a:fillRef idx="3">
-            <a:schemeClr val="accent1"/>
-          </a:fillRef>
-          <a:effectRef idx="2">
-            <a:schemeClr val="accent1"/>
-          </a:effectRef>
-          <a:fontRef idx="minor">
-            <a:schemeClr val="lt1"/>
-          </a:fontRef>
-        </p:style>
-        <p:txBody>
-          <a:bodyPr rtlCol="0" anchor="ctr"/>
-          <a:lstStyle/>
-          <a:p>
-            <a:pPr algn="ctr"/>
-          </a:p>
-        </p:txBody>
-      </p:sp>
-      <p:sp>
-        <p:nvSpPr>
-          <p:cNvPr id="32" name="TextBox 31"/>
-          <p:cNvSpPr txBox="1"/>
-          <p:nvPr/>
-        </p:nvSpPr>
-        <p:spPr>
-          <a:xfrm>
-            <a:off x="2487168" y="2441448"/>
-            <a:ext cx="843534" cy="384048"/>
-          </a:xfrm>
-          <a:prstGeom prst="rect">
-            <a:avLst/>
-          </a:prstGeom>
-          <a:noFill/>
-        </p:spPr>
-        <p:txBody>
-          <a:bodyPr wrap="square" anchor="ctr" lIns="0" rIns="0" tIns="0" bIns="0">
-            <a:spAutoFit/>
-          </a:bodyPr>
-          <a:lstStyle/>
-          <a:p>
-            <a:pPr algn="ctr">
-              <a:lnSpc>
-                <a:spcPct val="100000"/>
-              </a:lnSpc>
-            </a:pPr>
-            <a:r>
-              <a:rPr sz="950" b="1">
-                <a:solidFill>
-                  <a:srgbClr val="001018"/>
-                </a:solidFill>
-                <a:latin typeface="Calibri"/>
-              </a:rPr>
-              <a:t>GOL akcja</a:t>
-            </a:r>
-          </a:p>
-        </p:txBody>
-      </p:sp>
-      <p:sp>
-        <p:nvSpPr>
-          <p:cNvPr id="33" name="Rounded Rectangle 32"/>
-          <p:cNvSpPr/>
-          <p:nvPr/>
-        </p:nvSpPr>
-        <p:spPr>
-          <a:xfrm>
-            <a:off x="3440430" y="2441448"/>
-            <a:ext cx="843534" cy="384048"/>
-          </a:xfrm>
-          <a:prstGeom prst="roundRect">
-            <a:avLst>
-              <a:gd name="adj" fmla="val 50000"/>
-            </a:avLst>
-          </a:prstGeom>
-          <a:solidFill>
-            <a:srgbClr val="4CC9F0"/>
-          </a:solidFill>
-          <a:ln>
-            <a:noFill/>
-          </a:ln>
-          <a:effectLst/>
-        </p:spPr>
-        <p:style>
-          <a:lnRef idx="1">
-            <a:schemeClr val="accent1"/>
-          </a:lnRef>
-          <a:fillRef idx="3">
-            <a:schemeClr val="accent1"/>
-          </a:fillRef>
-          <a:effectRef idx="2">
-            <a:schemeClr val="accent1"/>
-          </a:effectRef>
-          <a:fontRef idx="minor">
-            <a:schemeClr val="lt1"/>
-          </a:fontRef>
-        </p:style>
-        <p:txBody>
-          <a:bodyPr rtlCol="0" anchor="ctr"/>
-          <a:lstStyle/>
-          <a:p>
-            <a:pPr algn="ctr"/>
-          </a:p>
-        </p:txBody>
-      </p:sp>
-      <p:sp>
-        <p:nvSpPr>
-          <p:cNvPr id="34" name="TextBox 33"/>
-          <p:cNvSpPr txBox="1"/>
-          <p:nvPr/>
-        </p:nvSpPr>
-        <p:spPr>
-          <a:xfrm>
-            <a:off x="3440430" y="2441448"/>
-            <a:ext cx="843534" cy="384048"/>
-          </a:xfrm>
-          <a:prstGeom prst="rect">
-            <a:avLst/>
-          </a:prstGeom>
-          <a:noFill/>
-        </p:spPr>
-        <p:txBody>
-          <a:bodyPr wrap="square" anchor="ctr" lIns="0" rIns="0" tIns="0" bIns="0">
-            <a:spAutoFit/>
-          </a:bodyPr>
-          <a:lstStyle/>
-          <a:p>
-            <a:pPr algn="ctr">
-              <a:lnSpc>
-                <a:spcPct val="100000"/>
-              </a:lnSpc>
-            </a:pPr>
-            <a:r>
-              <a:rPr sz="950" b="1">
-                <a:solidFill>
-                  <a:srgbClr val="001018"/>
-                </a:solidFill>
-                <a:latin typeface="Calibri"/>
-              </a:rPr>
-              <a:t>GOL kontra</a:t>
-            </a:r>
-          </a:p>
-        </p:txBody>
-      </p:sp>
-      <p:sp>
-        <p:nvSpPr>
-          <p:cNvPr id="35" name="Rounded Rectangle 34"/>
-          <p:cNvSpPr/>
-          <p:nvPr/>
-        </p:nvSpPr>
-        <p:spPr>
-          <a:xfrm>
-            <a:off x="4393692" y="2441448"/>
-            <a:ext cx="843534" cy="384048"/>
-          </a:xfrm>
-          <a:prstGeom prst="roundRect">
-            <a:avLst>
-              <a:gd name="adj" fmla="val 50000"/>
-            </a:avLst>
-          </a:prstGeom>
-          <a:solidFill>
-            <a:srgbClr val="1A2332"/>
-          </a:solidFill>
-          <a:ln w="12700">
-            <a:solidFill>
-              <a:srgbClr val="1E2D3D"/>
-            </a:solidFill>
-          </a:ln>
-          <a:effectLst/>
-        </p:spPr>
-        <p:style>
-          <a:lnRef idx="1">
-            <a:schemeClr val="accent1"/>
-          </a:lnRef>
-          <a:fillRef idx="3">
-            <a:schemeClr val="accent1"/>
-          </a:fillRef>
-          <a:effectRef idx="2">
-            <a:schemeClr val="accent1"/>
-          </a:effectRef>
-          <a:fontRef idx="minor">
-            <a:schemeClr val="lt1"/>
-          </a:fontRef>
-        </p:style>
-        <p:txBody>
-          <a:bodyPr rtlCol="0" anchor="ctr"/>
-          <a:lstStyle/>
-          <a:p>
-            <a:pPr algn="ctr"/>
-          </a:p>
-        </p:txBody>
-      </p:sp>
-      <p:sp>
-        <p:nvSpPr>
-          <p:cNvPr id="36" name="TextBox 35"/>
-          <p:cNvSpPr txBox="1"/>
-          <p:nvPr/>
-        </p:nvSpPr>
-        <p:spPr>
-          <a:xfrm>
-            <a:off x="4393692" y="2441448"/>
-            <a:ext cx="843534" cy="384048"/>
-          </a:xfrm>
-          <a:prstGeom prst="rect">
-            <a:avLst/>
-          </a:prstGeom>
-          <a:noFill/>
-        </p:spPr>
-        <p:txBody>
-          <a:bodyPr wrap="square" anchor="ctr" lIns="0" rIns="0" tIns="0" bIns="0">
-            <a:spAutoFit/>
-          </a:bodyPr>
-          <a:lstStyle/>
-          <a:p>
-            <a:pPr algn="ctr">
-              <a:lnSpc>
-                <a:spcPct val="100000"/>
-              </a:lnSpc>
-            </a:pPr>
-            <a:r>
-              <a:rPr sz="950" b="1">
-                <a:solidFill>
-                  <a:srgbClr val="E6EDF3"/>
-                </a:solidFill>
-                <a:latin typeface="Calibri"/>
-              </a:rPr>
-              <a:t>Asysta</a:t>
-            </a:r>
-          </a:p>
-        </p:txBody>
-      </p:sp>
-      <p:sp>
-        <p:nvSpPr>
-          <p:cNvPr id="37" name="Rounded Rectangle 36"/>
-          <p:cNvSpPr/>
-          <p:nvPr/>
-        </p:nvSpPr>
-        <p:spPr>
-          <a:xfrm>
-            <a:off x="5346954" y="2441448"/>
-            <a:ext cx="843534" cy="384048"/>
-          </a:xfrm>
-          <a:prstGeom prst="roundRect">
-            <a:avLst>
-              <a:gd name="adj" fmla="val 50000"/>
-            </a:avLst>
-          </a:prstGeom>
-          <a:solidFill>
-            <a:srgbClr val="1A2332"/>
-          </a:solidFill>
-          <a:ln w="12700">
-            <a:solidFill>
-              <a:srgbClr val="1E2D3D"/>
-            </a:solidFill>
-          </a:ln>
-          <a:effectLst/>
-        </p:spPr>
-        <p:style>
-          <a:lnRef idx="1">
-            <a:schemeClr val="accent1"/>
-          </a:lnRef>
-          <a:fillRef idx="3">
-            <a:schemeClr val="accent1"/>
-          </a:fillRef>
-          <a:effectRef idx="2">
-            <a:schemeClr val="accent1"/>
-          </a:effectRef>
-          <a:fontRef idx="minor">
-            <a:schemeClr val="lt1"/>
-          </a:fontRef>
-        </p:style>
-        <p:txBody>
-          <a:bodyPr rtlCol="0" anchor="ctr"/>
-          <a:lstStyle/>
-          <a:p>
-            <a:pPr algn="ctr"/>
-          </a:p>
-        </p:txBody>
-      </p:sp>
-      <p:sp>
-        <p:nvSpPr>
-          <p:cNvPr id="38" name="TextBox 37"/>
-          <p:cNvSpPr txBox="1"/>
-          <p:nvPr/>
-        </p:nvSpPr>
-        <p:spPr>
-          <a:xfrm>
-            <a:off x="5346954" y="2441448"/>
-            <a:ext cx="843534" cy="384048"/>
-          </a:xfrm>
-          <a:prstGeom prst="rect">
-            <a:avLst/>
-          </a:prstGeom>
-          <a:noFill/>
-        </p:spPr>
-        <p:txBody>
-          <a:bodyPr wrap="square" anchor="ctr" lIns="0" rIns="0" tIns="0" bIns="0">
-            <a:spAutoFit/>
-          </a:bodyPr>
-          <a:lstStyle/>
-          <a:p>
-            <a:pPr algn="ctr">
-              <a:lnSpc>
-                <a:spcPct val="100000"/>
-              </a:lnSpc>
-            </a:pPr>
-            <a:r>
-              <a:rPr sz="950" b="1">
-                <a:solidFill>
-                  <a:srgbClr val="E6EDF3"/>
-                </a:solidFill>
-                <a:latin typeface="Calibri"/>
-              </a:rPr>
-              <a:t>Obrona</a:t>
-            </a:r>
-          </a:p>
-        </p:txBody>
-      </p:sp>
-      <p:sp>
-        <p:nvSpPr>
-          <p:cNvPr id="39" name="Rounded Rectangle 38"/>
-          <p:cNvSpPr/>
-          <p:nvPr/>
-        </p:nvSpPr>
-        <p:spPr>
-          <a:xfrm>
-            <a:off x="2487168" y="2916936"/>
-            <a:ext cx="843534" cy="384048"/>
-          </a:xfrm>
-          <a:prstGeom prst="roundRect">
-            <a:avLst>
-              <a:gd name="adj" fmla="val 50000"/>
-            </a:avLst>
-          </a:prstGeom>
-          <a:solidFill>
-            <a:srgbClr val="1A2332"/>
-          </a:solidFill>
-          <a:ln w="12700">
-            <a:solidFill>
-              <a:srgbClr val="1E2D3D"/>
-            </a:solidFill>
-          </a:ln>
-          <a:effectLst/>
-        </p:spPr>
-        <p:style>
-          <a:lnRef idx="1">
-            <a:schemeClr val="accent1"/>
-          </a:lnRef>
-          <a:fillRef idx="3">
-            <a:schemeClr val="accent1"/>
-          </a:fillRef>
-          <a:effectRef idx="2">
-            <a:schemeClr val="accent1"/>
-          </a:effectRef>
-          <a:fontRef idx="minor">
-            <a:schemeClr val="lt1"/>
-          </a:fontRef>
-        </p:style>
-        <p:txBody>
-          <a:bodyPr rtlCol="0" anchor="ctr"/>
-          <a:lstStyle/>
-          <a:p>
-            <a:pPr algn="ctr"/>
-          </a:p>
-        </p:txBody>
-      </p:sp>
-      <p:sp>
-        <p:nvSpPr>
-          <p:cNvPr id="40" name="TextBox 39"/>
-          <p:cNvSpPr txBox="1"/>
-          <p:nvPr/>
-        </p:nvSpPr>
-        <p:spPr>
-          <a:xfrm>
-            <a:off x="2487168" y="2916936"/>
-            <a:ext cx="843534" cy="384048"/>
-          </a:xfrm>
-          <a:prstGeom prst="rect">
-            <a:avLst/>
-          </a:prstGeom>
-          <a:noFill/>
-        </p:spPr>
-        <p:txBody>
-          <a:bodyPr wrap="square" anchor="ctr" lIns="0" rIns="0" tIns="0" bIns="0">
-            <a:spAutoFit/>
-          </a:bodyPr>
-          <a:lstStyle/>
-          <a:p>
-            <a:pPr algn="ctr">
-              <a:lnSpc>
-                <a:spcPct val="100000"/>
-              </a:lnSpc>
-            </a:pPr>
-            <a:r>
-              <a:rPr sz="950" b="1">
-                <a:solidFill>
-                  <a:srgbClr val="E6EDF3"/>
-                </a:solidFill>
-                <a:latin typeface="Calibri"/>
-              </a:rPr>
-              <a:t>Strata</a:t>
-            </a:r>
-          </a:p>
-        </p:txBody>
-      </p:sp>
-      <p:sp>
-        <p:nvSpPr>
-          <p:cNvPr id="41" name="Rounded Rectangle 40"/>
-          <p:cNvSpPr/>
-          <p:nvPr/>
-        </p:nvSpPr>
-        <p:spPr>
-          <a:xfrm>
-            <a:off x="3440430" y="2916936"/>
-            <a:ext cx="843534" cy="384048"/>
-          </a:xfrm>
-          <a:prstGeom prst="roundRect">
-            <a:avLst>
-              <a:gd name="adj" fmla="val 50000"/>
-            </a:avLst>
-          </a:prstGeom>
-          <a:solidFill>
-            <a:srgbClr val="1A2332"/>
-          </a:solidFill>
-          <a:ln w="12700">
-            <a:solidFill>
-              <a:srgbClr val="1E2D3D"/>
-            </a:solidFill>
-          </a:ln>
-          <a:effectLst/>
-        </p:spPr>
-        <p:style>
-          <a:lnRef idx="1">
-            <a:schemeClr val="accent1"/>
-          </a:lnRef>
-          <a:fillRef idx="3">
-            <a:schemeClr val="accent1"/>
-          </a:fillRef>
-          <a:effectRef idx="2">
-            <a:schemeClr val="accent1"/>
-          </a:effectRef>
-          <a:fontRef idx="minor">
-            <a:schemeClr val="lt1"/>
-          </a:fontRef>
-        </p:style>
-        <p:txBody>
-          <a:bodyPr rtlCol="0" anchor="ctr"/>
-          <a:lstStyle/>
-          <a:p>
-            <a:pPr algn="ctr"/>
-          </a:p>
-        </p:txBody>
-      </p:sp>
-      <p:sp>
-        <p:nvSpPr>
-          <p:cNvPr id="42" name="TextBox 41"/>
-          <p:cNvSpPr txBox="1"/>
-          <p:nvPr/>
-        </p:nvSpPr>
-        <p:spPr>
-          <a:xfrm>
-            <a:off x="3440430" y="2916936"/>
-            <a:ext cx="843534" cy="384048"/>
-          </a:xfrm>
-          <a:prstGeom prst="rect">
-            <a:avLst/>
-          </a:prstGeom>
-          <a:noFill/>
-        </p:spPr>
-        <p:txBody>
-          <a:bodyPr wrap="square" anchor="ctr" lIns="0" rIns="0" tIns="0" bIns="0">
-            <a:spAutoFit/>
-          </a:bodyPr>
-          <a:lstStyle/>
-          <a:p>
-            <a:pPr algn="ctr">
-              <a:lnSpc>
-                <a:spcPct val="100000"/>
-              </a:lnSpc>
-            </a:pPr>
-            <a:r>
-              <a:rPr sz="950" b="1">
-                <a:solidFill>
-                  <a:srgbClr val="E6EDF3"/>
-                </a:solidFill>
-                <a:latin typeface="Calibri"/>
-              </a:rPr>
-              <a:t>Niecelny</a:t>
-            </a:r>
-          </a:p>
-        </p:txBody>
-      </p:sp>
-      <p:sp>
-        <p:nvSpPr>
-          <p:cNvPr id="43" name="Rounded Rectangle 42"/>
-          <p:cNvSpPr/>
-          <p:nvPr/>
-        </p:nvSpPr>
-        <p:spPr>
-          <a:xfrm>
-            <a:off x="4393692" y="2916936"/>
-            <a:ext cx="843534" cy="384048"/>
-          </a:xfrm>
-          <a:prstGeom prst="roundRect">
-            <a:avLst>
-              <a:gd name="adj" fmla="val 50000"/>
-            </a:avLst>
-          </a:prstGeom>
-          <a:solidFill>
-            <a:srgbClr val="1A2332"/>
-          </a:solidFill>
-          <a:ln w="12700">
-            <a:solidFill>
-              <a:srgbClr val="1E2D3D"/>
-            </a:solidFill>
-          </a:ln>
-          <a:effectLst/>
-        </p:spPr>
-        <p:style>
-          <a:lnRef idx="1">
-            <a:schemeClr val="accent1"/>
-          </a:lnRef>
-          <a:fillRef idx="3">
-            <a:schemeClr val="accent1"/>
-          </a:fillRef>
-          <a:effectRef idx="2">
-            <a:schemeClr val="accent1"/>
-          </a:effectRef>
-          <a:fontRef idx="minor">
-            <a:schemeClr val="lt1"/>
-          </a:fontRef>
-        </p:style>
-        <p:txBody>
-          <a:bodyPr rtlCol="0" anchor="ctr"/>
-          <a:lstStyle/>
-          <a:p>
-            <a:pPr algn="ctr"/>
-          </a:p>
-        </p:txBody>
-      </p:sp>
-      <p:sp>
-        <p:nvSpPr>
-          <p:cNvPr id="44" name="TextBox 43"/>
-          <p:cNvSpPr txBox="1"/>
-          <p:nvPr/>
-        </p:nvSpPr>
-        <p:spPr>
-          <a:xfrm>
-            <a:off x="4393692" y="2916936"/>
-            <a:ext cx="843534" cy="384048"/>
-          </a:xfrm>
-          <a:prstGeom prst="rect">
-            <a:avLst/>
-          </a:prstGeom>
-          <a:noFill/>
-        </p:spPr>
-        <p:txBody>
-          <a:bodyPr wrap="square" anchor="ctr" lIns="0" rIns="0" tIns="0" bIns="0">
-            <a:spAutoFit/>
-          </a:bodyPr>
-          <a:lstStyle/>
-          <a:p>
-            <a:pPr algn="ctr">
-              <a:lnSpc>
-                <a:spcPct val="100000"/>
-              </a:lnSpc>
-            </a:pPr>
-            <a:r>
-              <a:rPr sz="950" b="1">
-                <a:solidFill>
-                  <a:srgbClr val="E6EDF3"/>
-                </a:solidFill>
-                <a:latin typeface="Calibri"/>
-              </a:rPr>
-              <a:t>Wykl.</a:t>
-            </a:r>
-          </a:p>
-        </p:txBody>
-      </p:sp>
-      <p:sp>
-        <p:nvSpPr>
-          <p:cNvPr id="45" name="Rounded Rectangle 44"/>
-          <p:cNvSpPr/>
-          <p:nvPr/>
-        </p:nvSpPr>
-        <p:spPr>
-          <a:xfrm>
-            <a:off x="5346954" y="2916936"/>
-            <a:ext cx="843534" cy="384048"/>
-          </a:xfrm>
-          <a:prstGeom prst="roundRect">
-            <a:avLst>
-              <a:gd name="adj" fmla="val 50000"/>
-            </a:avLst>
-          </a:prstGeom>
-          <a:solidFill>
-            <a:srgbClr val="1A2332"/>
-          </a:solidFill>
-          <a:ln w="12700">
-            <a:solidFill>
-              <a:srgbClr val="1E2D3D"/>
-            </a:solidFill>
-          </a:ln>
-          <a:effectLst/>
-        </p:spPr>
-        <p:style>
-          <a:lnRef idx="1">
-            <a:schemeClr val="accent1"/>
-          </a:lnRef>
-          <a:fillRef idx="3">
-            <a:schemeClr val="accent1"/>
-          </a:fillRef>
-          <a:effectRef idx="2">
-            <a:schemeClr val="accent1"/>
-          </a:effectRef>
-          <a:fontRef idx="minor">
-            <a:schemeClr val="lt1"/>
-          </a:fontRef>
-        </p:style>
-        <p:txBody>
-          <a:bodyPr rtlCol="0" anchor="ctr"/>
-          <a:lstStyle/>
-          <a:p>
-            <a:pPr algn="ctr"/>
-          </a:p>
-        </p:txBody>
-      </p:sp>
-      <p:sp>
-        <p:nvSpPr>
-          <p:cNvPr id="46" name="TextBox 45"/>
-          <p:cNvSpPr txBox="1"/>
-          <p:nvPr/>
-        </p:nvSpPr>
-        <p:spPr>
-          <a:xfrm>
-            <a:off x="5346954" y="2916936"/>
-            <a:ext cx="843534" cy="384048"/>
-          </a:xfrm>
-          <a:prstGeom prst="rect">
-            <a:avLst/>
-          </a:prstGeom>
-          <a:noFill/>
-        </p:spPr>
-        <p:txBody>
-          <a:bodyPr wrap="square" anchor="ctr" lIns="0" rIns="0" tIns="0" bIns="0">
-            <a:spAutoFit/>
-          </a:bodyPr>
-          <a:lstStyle/>
-          <a:p>
-            <a:pPr algn="ctr">
-              <a:lnSpc>
-                <a:spcPct val="100000"/>
-              </a:lnSpc>
-            </a:pPr>
-            <a:r>
-              <a:rPr sz="950" b="1">
-                <a:solidFill>
-                  <a:srgbClr val="E6EDF3"/>
-                </a:solidFill>
-                <a:latin typeface="Calibri"/>
-              </a:rPr>
-              <a:t>Karny</a:t>
-            </a:r>
-          </a:p>
-        </p:txBody>
-      </p:sp>
-      <p:sp>
-        <p:nvSpPr>
-          <p:cNvPr id="47" name="Rounded Rectangle 46"/>
-          <p:cNvSpPr/>
-          <p:nvPr/>
-        </p:nvSpPr>
-        <p:spPr>
-          <a:xfrm>
-            <a:off x="2487168" y="3392424"/>
-            <a:ext cx="843534" cy="384048"/>
-          </a:xfrm>
-          <a:prstGeom prst="roundRect">
-            <a:avLst>
-              <a:gd name="adj" fmla="val 50000"/>
-            </a:avLst>
-          </a:prstGeom>
-          <a:solidFill>
-            <a:srgbClr val="1A2332"/>
-          </a:solidFill>
-          <a:ln w="12700">
-            <a:solidFill>
-              <a:srgbClr val="1E2D3D"/>
-            </a:solidFill>
-          </a:ln>
-          <a:effectLst/>
-        </p:spPr>
-        <p:style>
-          <a:lnRef idx="1">
-            <a:schemeClr val="accent1"/>
-          </a:lnRef>
-          <a:fillRef idx="3">
-            <a:schemeClr val="accent1"/>
-          </a:fillRef>
-          <a:effectRef idx="2">
-            <a:schemeClr val="accent1"/>
-          </a:effectRef>
-          <a:fontRef idx="minor">
-            <a:schemeClr val="lt1"/>
-          </a:fontRef>
-        </p:style>
-        <p:txBody>
-          <a:bodyPr rtlCol="0" anchor="ctr"/>
-          <a:lstStyle/>
-          <a:p>
-            <a:pPr algn="ctr"/>
-          </a:p>
-        </p:txBody>
-      </p:sp>
-      <p:sp>
-        <p:nvSpPr>
-          <p:cNvPr id="48" name="TextBox 47"/>
-          <p:cNvSpPr txBox="1"/>
-          <p:nvPr/>
-        </p:nvSpPr>
-        <p:spPr>
-          <a:xfrm>
-            <a:off x="2487168" y="3392424"/>
-            <a:ext cx="843534" cy="384048"/>
-          </a:xfrm>
-          <a:prstGeom prst="rect">
-            <a:avLst/>
-          </a:prstGeom>
-          <a:noFill/>
-        </p:spPr>
-        <p:txBody>
-          <a:bodyPr wrap="square" anchor="ctr" lIns="0" rIns="0" tIns="0" bIns="0">
-            <a:spAutoFit/>
-          </a:bodyPr>
-          <a:lstStyle/>
-          <a:p>
-            <a:pPr algn="ctr">
-              <a:lnSpc>
-                <a:spcPct val="100000"/>
-              </a:lnSpc>
-            </a:pPr>
-            <a:r>
-              <a:rPr sz="950" b="1">
-                <a:solidFill>
-                  <a:srgbClr val="E6EDF3"/>
-                </a:solidFill>
-                <a:latin typeface="Calibri"/>
-              </a:rPr>
-              <a:t>Przejęcie</a:t>
-            </a:r>
-          </a:p>
-        </p:txBody>
-      </p:sp>
-      <p:sp>
-        <p:nvSpPr>
-          <p:cNvPr id="49" name="Rounded Rectangle 48"/>
-          <p:cNvSpPr/>
-          <p:nvPr/>
-        </p:nvSpPr>
-        <p:spPr>
-          <a:xfrm>
-            <a:off x="3440430" y="3392424"/>
-            <a:ext cx="843534" cy="384048"/>
-          </a:xfrm>
-          <a:prstGeom prst="roundRect">
-            <a:avLst>
-              <a:gd name="adj" fmla="val 50000"/>
-            </a:avLst>
-          </a:prstGeom>
-          <a:solidFill>
-            <a:srgbClr val="1A2332"/>
-          </a:solidFill>
-          <a:ln w="12700">
-            <a:solidFill>
-              <a:srgbClr val="1E2D3D"/>
-            </a:solidFill>
-          </a:ln>
-          <a:effectLst/>
-        </p:spPr>
-        <p:style>
-          <a:lnRef idx="1">
-            <a:schemeClr val="accent1"/>
-          </a:lnRef>
-          <a:fillRef idx="3">
-            <a:schemeClr val="accent1"/>
-          </a:fillRef>
-          <a:effectRef idx="2">
-            <a:schemeClr val="accent1"/>
-          </a:effectRef>
-          <a:fontRef idx="minor">
-            <a:schemeClr val="lt1"/>
-          </a:fontRef>
-        </p:style>
-        <p:txBody>
-          <a:bodyPr rtlCol="0" anchor="ctr"/>
-          <a:lstStyle/>
-          <a:p>
-            <a:pPr algn="ctr"/>
-          </a:p>
-        </p:txBody>
-      </p:sp>
-      <p:sp>
-        <p:nvSpPr>
-          <p:cNvPr id="50" name="TextBox 49"/>
-          <p:cNvSpPr txBox="1"/>
-          <p:nvPr/>
-        </p:nvSpPr>
-        <p:spPr>
-          <a:xfrm>
-            <a:off x="3440430" y="3392424"/>
-            <a:ext cx="843534" cy="384048"/>
-          </a:xfrm>
-          <a:prstGeom prst="rect">
-            <a:avLst/>
-          </a:prstGeom>
-          <a:noFill/>
-        </p:spPr>
-        <p:txBody>
-          <a:bodyPr wrap="square" anchor="ctr" lIns="0" rIns="0" tIns="0" bIns="0">
-            <a:spAutoFit/>
-          </a:bodyPr>
-          <a:lstStyle/>
-          <a:p>
-            <a:pPr algn="ctr">
-              <a:lnSpc>
-                <a:spcPct val="100000"/>
-              </a:lnSpc>
-            </a:pPr>
-            <a:r>
-              <a:rPr sz="950" b="1">
-                <a:solidFill>
-                  <a:srgbClr val="E6EDF3"/>
-                </a:solidFill>
-                <a:latin typeface="Calibri"/>
-              </a:rPr>
-              <a:t>Blok</a:t>
-            </a:r>
-          </a:p>
-        </p:txBody>
-      </p:sp>
-      <p:sp>
-        <p:nvSpPr>
-          <p:cNvPr id="51" name="Rounded Rectangle 50"/>
-          <p:cNvSpPr/>
-          <p:nvPr/>
-        </p:nvSpPr>
-        <p:spPr>
-          <a:xfrm>
-            <a:off x="4393692" y="3392424"/>
-            <a:ext cx="843534" cy="384048"/>
-          </a:xfrm>
-          <a:prstGeom prst="roundRect">
-            <a:avLst>
-              <a:gd name="adj" fmla="val 50000"/>
-            </a:avLst>
-          </a:prstGeom>
-          <a:solidFill>
-            <a:srgbClr val="1A2332"/>
-          </a:solidFill>
-          <a:ln w="12700">
-            <a:solidFill>
-              <a:srgbClr val="1E2D3D"/>
-            </a:solidFill>
-          </a:ln>
-          <a:effectLst/>
-        </p:spPr>
-        <p:style>
-          <a:lnRef idx="1">
-            <a:schemeClr val="accent1"/>
-          </a:lnRef>
-          <a:fillRef idx="3">
-            <a:schemeClr val="accent1"/>
-          </a:fillRef>
-          <a:effectRef idx="2">
-            <a:schemeClr val="accent1"/>
-          </a:effectRef>
-          <a:fontRef idx="minor">
-            <a:schemeClr val="lt1"/>
-          </a:fontRef>
-        </p:style>
-        <p:txBody>
-          <a:bodyPr rtlCol="0" anchor="ctr"/>
-          <a:lstStyle/>
-          <a:p>
-            <a:pPr algn="ctr"/>
-          </a:p>
-        </p:txBody>
-      </p:sp>
-      <p:sp>
-        <p:nvSpPr>
-          <p:cNvPr id="52" name="TextBox 51"/>
-          <p:cNvSpPr txBox="1"/>
-          <p:nvPr/>
-        </p:nvSpPr>
-        <p:spPr>
-          <a:xfrm>
-            <a:off x="4393692" y="3392424"/>
-            <a:ext cx="843534" cy="384048"/>
-          </a:xfrm>
-          <a:prstGeom prst="rect">
-            <a:avLst/>
-          </a:prstGeom>
-          <a:noFill/>
-        </p:spPr>
-        <p:txBody>
-          <a:bodyPr wrap="square" anchor="ctr" lIns="0" rIns="0" tIns="0" bIns="0">
-            <a:spAutoFit/>
-          </a:bodyPr>
-          <a:lstStyle/>
-          <a:p>
-            <a:pPr algn="ctr">
-              <a:lnSpc>
-                <a:spcPct val="100000"/>
-              </a:lnSpc>
-            </a:pPr>
-            <a:r>
-              <a:rPr sz="950" b="1">
-                <a:solidFill>
-                  <a:srgbClr val="E6EDF3"/>
-                </a:solidFill>
-                <a:latin typeface="Calibri"/>
-              </a:rPr>
-              <a:t>Centra</a:t>
-            </a:r>
-          </a:p>
-        </p:txBody>
-      </p:sp>
-      <p:sp>
-        <p:nvSpPr>
-          <p:cNvPr id="53" name="Rounded Rectangle 52"/>
-          <p:cNvSpPr/>
-          <p:nvPr/>
-        </p:nvSpPr>
-        <p:spPr>
-          <a:xfrm>
-            <a:off x="5346954" y="3392424"/>
-            <a:ext cx="843534" cy="384048"/>
-          </a:xfrm>
-          <a:prstGeom prst="roundRect">
-            <a:avLst>
-              <a:gd name="adj" fmla="val 50000"/>
-            </a:avLst>
-          </a:prstGeom>
-          <a:solidFill>
-            <a:srgbClr val="1A2332"/>
-          </a:solidFill>
-          <a:ln w="12700">
-            <a:solidFill>
-              <a:srgbClr val="1E2D3D"/>
-            </a:solidFill>
-          </a:ln>
-          <a:effectLst/>
-        </p:spPr>
-        <p:style>
-          <a:lnRef idx="1">
-            <a:schemeClr val="accent1"/>
-          </a:lnRef>
-          <a:fillRef idx="3">
-            <a:schemeClr val="accent1"/>
-          </a:fillRef>
-          <a:effectRef idx="2">
-            <a:schemeClr val="accent1"/>
-          </a:effectRef>
-          <a:fontRef idx="minor">
-            <a:schemeClr val="lt1"/>
-          </a:fontRef>
-        </p:style>
-        <p:txBody>
-          <a:bodyPr rtlCol="0" anchor="ctr"/>
-          <a:lstStyle/>
-          <a:p>
-            <a:pPr algn="ctr"/>
-          </a:p>
-        </p:txBody>
-      </p:sp>
-      <p:sp>
-        <p:nvSpPr>
-          <p:cNvPr id="54" name="TextBox 53"/>
-          <p:cNvSpPr txBox="1"/>
-          <p:nvPr/>
-        </p:nvSpPr>
-        <p:spPr>
-          <a:xfrm>
-            <a:off x="5346954" y="3392424"/>
-            <a:ext cx="843534" cy="384048"/>
-          </a:xfrm>
-          <a:prstGeom prst="rect">
-            <a:avLst/>
-          </a:prstGeom>
-          <a:noFill/>
-        </p:spPr>
-        <p:txBody>
-          <a:bodyPr wrap="square" anchor="ctr" lIns="0" rIns="0" tIns="0" bIns="0">
-            <a:spAutoFit/>
-          </a:bodyPr>
-          <a:lstStyle/>
-          <a:p>
-            <a:pPr algn="ctr">
-              <a:lnSpc>
-                <a:spcPct val="100000"/>
-              </a:lnSpc>
-            </a:pPr>
-            <a:r>
-              <a:rPr sz="950" b="1">
-                <a:solidFill>
-                  <a:srgbClr val="E6EDF3"/>
-                </a:solidFill>
-                <a:latin typeface="Calibri"/>
-              </a:rPr>
-              <a:t>5m</a:t>
-            </a:r>
-          </a:p>
-        </p:txBody>
-      </p:sp>
-      <p:sp>
-        <p:nvSpPr>
-          <p:cNvPr id="55" name="Rounded Rectangle 54"/>
-          <p:cNvSpPr/>
-          <p:nvPr/>
-        </p:nvSpPr>
-        <p:spPr>
-          <a:xfrm>
-            <a:off x="2487168" y="3977640"/>
-            <a:ext cx="3703320" cy="457200"/>
-          </a:xfrm>
-          <a:prstGeom prst="roundRect">
-            <a:avLst>
-              <a:gd name="adj" fmla="val 12000"/>
-            </a:avLst>
-          </a:prstGeom>
-          <a:solidFill>
-            <a:srgbClr val="102A33"/>
-          </a:solidFill>
-          <a:ln w="15875">
-            <a:solidFill>
-              <a:srgbClr val="4CC9F0"/>
-            </a:solidFill>
-          </a:ln>
-          <a:effectLst/>
-        </p:spPr>
-        <p:style>
-          <a:lnRef idx="1">
-            <a:schemeClr val="accent1"/>
-          </a:lnRef>
-          <a:fillRef idx="3">
-            <a:schemeClr val="accent1"/>
-          </a:fillRef>
-          <a:effectRef idx="2">
-            <a:schemeClr val="accent1"/>
-          </a:effectRef>
-          <a:fontRef idx="minor">
-            <a:schemeClr val="lt1"/>
-          </a:fontRef>
-        </p:style>
-        <p:txBody>
-          <a:bodyPr rtlCol="0" anchor="ctr"/>
-          <a:lstStyle/>
-          <a:p>
-            <a:pPr algn="ctr"/>
-          </a:p>
-        </p:txBody>
-      </p:sp>
-      <p:sp>
-        <p:nvSpPr>
-          <p:cNvPr id="56" name="TextBox 55"/>
-          <p:cNvSpPr txBox="1"/>
-          <p:nvPr/>
-        </p:nvSpPr>
-        <p:spPr>
-          <a:xfrm>
-            <a:off x="2487168" y="3977640"/>
-            <a:ext cx="3703320" cy="457200"/>
-          </a:xfrm>
-          <a:prstGeom prst="rect">
-            <a:avLst/>
-          </a:prstGeom>
-          <a:noFill/>
-        </p:spPr>
-        <p:txBody>
-          <a:bodyPr wrap="square" anchor="ctr" lIns="0" rIns="0" tIns="0" bIns="0">
-            <a:spAutoFit/>
-          </a:bodyPr>
-          <a:lstStyle/>
-          <a:p>
-            <a:pPr algn="ctr">
-              <a:lnSpc>
-                <a:spcPct val="100000"/>
-              </a:lnSpc>
-            </a:pPr>
-            <a:r>
-              <a:rPr sz="1200" b="1">
-                <a:solidFill>
-                  <a:srgbClr val="4CC9F0"/>
-                </a:solidFill>
-                <a:latin typeface="Calibri"/>
-              </a:rPr>
-              <a:t>🎤  Komenda głosem</a:t>
-            </a:r>
-          </a:p>
-        </p:txBody>
-      </p:sp>
-      <p:sp>
-        <p:nvSpPr>
-          <p:cNvPr id="57" name="TextBox 56"/>
+          <p:cNvPr id="16" name="TextBox 15"/>
           <p:cNvSpPr txBox="1"/>
           <p:nvPr/>
         </p:nvSpPr>
@@ -23347,7 +17741,7 @@
                 </a:solidFill>
                 <a:latin typeface="Calibri"/>
               </a:rPr>
-              <a:t>Skuteczność ataku wg kwarty</a:t>
+              <a:t>Statystyki — filtry, tabela, wykresy</a:t>
             </a:r>
           </a:p>
         </p:txBody>
@@ -23484,27 +17878,51 @@
           </a:p>
         </p:txBody>
       </p:sp>
-      <p:sp>
-        <p:nvSpPr>
-          <p:cNvPr id="14" name="Rounded Rectangle 13"/>
+      <p:pic>
+        <p:nvPicPr>
+          <p:cNvPr id="14" name="Picture 13" descr="stats.png"/>
+          <p:cNvPicPr>
+            <a:picLocks noChangeAspect="1"/>
+          </p:cNvPicPr>
+          <p:nvPr/>
+        </p:nvPicPr>
+        <p:blipFill>
+          <a:blip r:embed="rId2"/>
+          <a:stretch>
+            <a:fillRect/>
+          </a:stretch>
+        </p:blipFill>
+        <p:spPr>
+          <a:xfrm>
+            <a:off x="1074746" y="2340864"/>
+            <a:ext cx="4653642" cy="3474720"/>
+          </a:xfrm>
+          <a:prstGeom prst="rect">
+            <a:avLst/>
+          </a:prstGeom>
+        </p:spPr>
+      </p:pic>
+      <p:sp>
+        <p:nvSpPr>
+          <p:cNvPr id="15" name="Rounded Rectangle 14"/>
           <p:cNvSpPr/>
           <p:nvPr/>
         </p:nvSpPr>
         <p:spPr>
           <a:xfrm>
-            <a:off x="1043787" y="3703320"/>
-            <a:ext cx="395020" cy="1783080"/>
+            <a:off x="1074746" y="2340864"/>
+            <a:ext cx="4653642" cy="3474720"/>
           </a:xfrm>
           <a:prstGeom prst="roundRect">
             <a:avLst>
-              <a:gd name="adj" fmla="val 12000"/>
+              <a:gd name="adj" fmla="val 1500"/>
             </a:avLst>
           </a:prstGeom>
-          <a:solidFill>
-            <a:srgbClr val="4CC9F0"/>
-          </a:solidFill>
-          <a:ln>
-            <a:noFill/>
+          <a:noFill/>
+          <a:ln w="9525">
+            <a:solidFill>
+              <a:srgbClr val="1E2D3D"/>
+            </a:solidFill>
           </a:ln>
           <a:effectLst/>
         </p:spPr>
@@ -23532,373 +17950,7 @@
       </p:sp>
       <p:sp>
         <p:nvSpPr>
-          <p:cNvPr id="15" name="Rounded Rectangle 14"/>
-          <p:cNvSpPr/>
-          <p:nvPr/>
-        </p:nvSpPr>
-        <p:spPr>
-          <a:xfrm>
-            <a:off x="1661007" y="2811779"/>
-            <a:ext cx="395020" cy="2674620"/>
-          </a:xfrm>
-          <a:prstGeom prst="roundRect">
-            <a:avLst>
-              <a:gd name="adj" fmla="val 12000"/>
-            </a:avLst>
-          </a:prstGeom>
-          <a:solidFill>
-            <a:srgbClr val="4CC9F0"/>
-          </a:solidFill>
-          <a:ln>
-            <a:noFill/>
-          </a:ln>
-          <a:effectLst/>
-        </p:spPr>
-        <p:style>
-          <a:lnRef idx="1">
-            <a:schemeClr val="accent1"/>
-          </a:lnRef>
-          <a:fillRef idx="3">
-            <a:schemeClr val="accent1"/>
-          </a:fillRef>
-          <a:effectRef idx="2">
-            <a:schemeClr val="accent1"/>
-          </a:effectRef>
-          <a:fontRef idx="minor">
-            <a:schemeClr val="lt1"/>
-          </a:fontRef>
-        </p:style>
-        <p:txBody>
-          <a:bodyPr rtlCol="0" anchor="ctr"/>
-          <a:lstStyle/>
-          <a:p>
-            <a:pPr algn="ctr"/>
-          </a:p>
-        </p:txBody>
-      </p:sp>
-      <p:sp>
-        <p:nvSpPr>
-          <p:cNvPr id="16" name="Rounded Rectangle 15"/>
-          <p:cNvSpPr/>
-          <p:nvPr/>
-        </p:nvSpPr>
-        <p:spPr>
-          <a:xfrm>
-            <a:off x="2278227" y="4000500"/>
-            <a:ext cx="395020" cy="1485900"/>
-          </a:xfrm>
-          <a:prstGeom prst="roundRect">
-            <a:avLst>
-              <a:gd name="adj" fmla="val 12000"/>
-            </a:avLst>
-          </a:prstGeom>
-          <a:solidFill>
-            <a:srgbClr val="4CC9F0"/>
-          </a:solidFill>
-          <a:ln>
-            <a:noFill/>
-          </a:ln>
-          <a:effectLst/>
-        </p:spPr>
-        <p:style>
-          <a:lnRef idx="1">
-            <a:schemeClr val="accent1"/>
-          </a:lnRef>
-          <a:fillRef idx="3">
-            <a:schemeClr val="accent1"/>
-          </a:fillRef>
-          <a:effectRef idx="2">
-            <a:schemeClr val="accent1"/>
-          </a:effectRef>
-          <a:fontRef idx="minor">
-            <a:schemeClr val="lt1"/>
-          </a:fontRef>
-        </p:style>
-        <p:txBody>
-          <a:bodyPr rtlCol="0" anchor="ctr"/>
-          <a:lstStyle/>
-          <a:p>
-            <a:pPr algn="ctr"/>
-          </a:p>
-        </p:txBody>
-      </p:sp>
-      <p:sp>
-        <p:nvSpPr>
-          <p:cNvPr id="17" name="Rounded Rectangle 16"/>
-          <p:cNvSpPr/>
-          <p:nvPr/>
-        </p:nvSpPr>
-        <p:spPr>
-          <a:xfrm>
-            <a:off x="2895447" y="3108960"/>
-            <a:ext cx="395020" cy="2377440"/>
-          </a:xfrm>
-          <a:prstGeom prst="roundRect">
-            <a:avLst>
-              <a:gd name="adj" fmla="val 12000"/>
-            </a:avLst>
-          </a:prstGeom>
-          <a:solidFill>
-            <a:srgbClr val="4CC9F0"/>
-          </a:solidFill>
-          <a:ln>
-            <a:noFill/>
-          </a:ln>
-          <a:effectLst/>
-        </p:spPr>
-        <p:style>
-          <a:lnRef idx="1">
-            <a:schemeClr val="accent1"/>
-          </a:lnRef>
-          <a:fillRef idx="3">
-            <a:schemeClr val="accent1"/>
-          </a:fillRef>
-          <a:effectRef idx="2">
-            <a:schemeClr val="accent1"/>
-          </a:effectRef>
-          <a:fontRef idx="minor">
-            <a:schemeClr val="lt1"/>
-          </a:fontRef>
-        </p:style>
-        <p:txBody>
-          <a:bodyPr rtlCol="0" anchor="ctr"/>
-          <a:lstStyle/>
-          <a:p>
-            <a:pPr algn="ctr"/>
-          </a:p>
-        </p:txBody>
-      </p:sp>
-      <p:sp>
-        <p:nvSpPr>
-          <p:cNvPr id="18" name="Rounded Rectangle 17"/>
-          <p:cNvSpPr/>
-          <p:nvPr/>
-        </p:nvSpPr>
-        <p:spPr>
-          <a:xfrm>
-            <a:off x="3512667" y="3406140"/>
-            <a:ext cx="395020" cy="2080260"/>
-          </a:xfrm>
-          <a:prstGeom prst="roundRect">
-            <a:avLst>
-              <a:gd name="adj" fmla="val 12000"/>
-            </a:avLst>
-          </a:prstGeom>
-          <a:solidFill>
-            <a:srgbClr val="4CC9F0"/>
-          </a:solidFill>
-          <a:ln>
-            <a:noFill/>
-          </a:ln>
-          <a:effectLst/>
-        </p:spPr>
-        <p:style>
-          <a:lnRef idx="1">
-            <a:schemeClr val="accent1"/>
-          </a:lnRef>
-          <a:fillRef idx="3">
-            <a:schemeClr val="accent1"/>
-          </a:fillRef>
-          <a:effectRef idx="2">
-            <a:schemeClr val="accent1"/>
-          </a:effectRef>
-          <a:fontRef idx="minor">
-            <a:schemeClr val="lt1"/>
-          </a:fontRef>
-        </p:style>
-        <p:txBody>
-          <a:bodyPr rtlCol="0" anchor="ctr"/>
-          <a:lstStyle/>
-          <a:p>
-            <a:pPr algn="ctr"/>
-          </a:p>
-        </p:txBody>
-      </p:sp>
-      <p:sp>
-        <p:nvSpPr>
-          <p:cNvPr id="19" name="Rounded Rectangle 18"/>
-          <p:cNvSpPr/>
-          <p:nvPr/>
-        </p:nvSpPr>
-        <p:spPr>
-          <a:xfrm>
-            <a:off x="4129887" y="2514600"/>
-            <a:ext cx="395020" cy="2971800"/>
-          </a:xfrm>
-          <a:prstGeom prst="roundRect">
-            <a:avLst>
-              <a:gd name="adj" fmla="val 12000"/>
-            </a:avLst>
-          </a:prstGeom>
-          <a:solidFill>
-            <a:srgbClr val="4CC9F0"/>
-          </a:solidFill>
-          <a:ln>
-            <a:noFill/>
-          </a:ln>
-          <a:effectLst/>
-        </p:spPr>
-        <p:style>
-          <a:lnRef idx="1">
-            <a:schemeClr val="accent1"/>
-          </a:lnRef>
-          <a:fillRef idx="3">
-            <a:schemeClr val="accent1"/>
-          </a:fillRef>
-          <a:effectRef idx="2">
-            <a:schemeClr val="accent1"/>
-          </a:effectRef>
-          <a:fontRef idx="minor">
-            <a:schemeClr val="lt1"/>
-          </a:fontRef>
-        </p:style>
-        <p:txBody>
-          <a:bodyPr rtlCol="0" anchor="ctr"/>
-          <a:lstStyle/>
-          <a:p>
-            <a:pPr algn="ctr"/>
-          </a:p>
-        </p:txBody>
-      </p:sp>
-      <p:sp>
-        <p:nvSpPr>
-          <p:cNvPr id="20" name="Rounded Rectangle 19"/>
-          <p:cNvSpPr/>
-          <p:nvPr/>
-        </p:nvSpPr>
-        <p:spPr>
-          <a:xfrm>
-            <a:off x="4747107" y="3703320"/>
-            <a:ext cx="395020" cy="1783080"/>
-          </a:xfrm>
-          <a:prstGeom prst="roundRect">
-            <a:avLst>
-              <a:gd name="adj" fmla="val 12000"/>
-            </a:avLst>
-          </a:prstGeom>
-          <a:solidFill>
-            <a:srgbClr val="4CC9F0"/>
-          </a:solidFill>
-          <a:ln>
-            <a:noFill/>
-          </a:ln>
-          <a:effectLst/>
-        </p:spPr>
-        <p:style>
-          <a:lnRef idx="1">
-            <a:schemeClr val="accent1"/>
-          </a:lnRef>
-          <a:fillRef idx="3">
-            <a:schemeClr val="accent1"/>
-          </a:fillRef>
-          <a:effectRef idx="2">
-            <a:schemeClr val="accent1"/>
-          </a:effectRef>
-          <a:fontRef idx="minor">
-            <a:schemeClr val="lt1"/>
-          </a:fontRef>
-        </p:style>
-        <p:txBody>
-          <a:bodyPr rtlCol="0" anchor="ctr"/>
-          <a:lstStyle/>
-          <a:p>
-            <a:pPr algn="ctr"/>
-          </a:p>
-        </p:txBody>
-      </p:sp>
-      <p:sp>
-        <p:nvSpPr>
-          <p:cNvPr id="21" name="Rounded Rectangle 20"/>
-          <p:cNvSpPr/>
-          <p:nvPr/>
-        </p:nvSpPr>
-        <p:spPr>
-          <a:xfrm>
-            <a:off x="5364327" y="2811779"/>
-            <a:ext cx="395020" cy="2674620"/>
-          </a:xfrm>
-          <a:prstGeom prst="roundRect">
-            <a:avLst>
-              <a:gd name="adj" fmla="val 12000"/>
-            </a:avLst>
-          </a:prstGeom>
-          <a:solidFill>
-            <a:srgbClr val="4CC9F0"/>
-          </a:solidFill>
-          <a:ln>
-            <a:noFill/>
-          </a:ln>
-          <a:effectLst/>
-        </p:spPr>
-        <p:style>
-          <a:lnRef idx="1">
-            <a:schemeClr val="accent1"/>
-          </a:lnRef>
-          <a:fillRef idx="3">
-            <a:schemeClr val="accent1"/>
-          </a:fillRef>
-          <a:effectRef idx="2">
-            <a:schemeClr val="accent1"/>
-          </a:effectRef>
-          <a:fontRef idx="minor">
-            <a:schemeClr val="lt1"/>
-          </a:fontRef>
-        </p:style>
-        <p:txBody>
-          <a:bodyPr rtlCol="0" anchor="ctr"/>
-          <a:lstStyle/>
-          <a:p>
-            <a:pPr algn="ctr"/>
-          </a:p>
-        </p:txBody>
-      </p:sp>
-      <p:sp>
-        <p:nvSpPr>
-          <p:cNvPr id="22" name="Rectangle 21"/>
-          <p:cNvSpPr/>
-          <p:nvPr/>
-        </p:nvSpPr>
-        <p:spPr>
-          <a:xfrm>
-            <a:off x="886968" y="5486400"/>
-            <a:ext cx="5029200" cy="18288"/>
-          </a:xfrm>
-          <a:prstGeom prst="rect">
-            <a:avLst/>
-          </a:prstGeom>
-          <a:solidFill>
-            <a:srgbClr val="1E2D3D"/>
-          </a:solidFill>
-          <a:ln>
-            <a:noFill/>
-          </a:ln>
-          <a:effectLst/>
-        </p:spPr>
-        <p:style>
-          <a:lnRef idx="1">
-            <a:schemeClr val="accent1"/>
-          </a:lnRef>
-          <a:fillRef idx="3">
-            <a:schemeClr val="accent1"/>
-          </a:fillRef>
-          <a:effectRef idx="2">
-            <a:schemeClr val="accent1"/>
-          </a:effectRef>
-          <a:fontRef idx="minor">
-            <a:schemeClr val="lt1"/>
-          </a:fontRef>
-        </p:style>
-        <p:txBody>
-          <a:bodyPr rtlCol="0" anchor="ctr"/>
-          <a:lstStyle/>
-          <a:p>
-            <a:pPr algn="ctr"/>
-          </a:p>
-        </p:txBody>
-      </p:sp>
-      <p:sp>
-        <p:nvSpPr>
-          <p:cNvPr id="23" name="TextBox 22"/>
+          <p:cNvPr id="16" name="TextBox 15"/>
           <p:cNvSpPr txBox="1"/>
           <p:nvPr/>
         </p:nvSpPr>

--- a/marketing/Cap-Track-PZPW.pptx
+++ b/marketing/Cap-Track-PZPW.pptx
@@ -4039,8 +4039,8 @@
         </p:blipFill>
         <p:spPr>
           <a:xfrm>
-            <a:off x="1214472" y="2340864"/>
-            <a:ext cx="5105711" cy="3474720"/>
+            <a:off x="1639948" y="2340864"/>
+            <a:ext cx="4254759" cy="3474720"/>
           </a:xfrm>
           <a:prstGeom prst="rect">
             <a:avLst/>
@@ -4055,8 +4055,8 @@
         </p:nvSpPr>
         <p:spPr>
           <a:xfrm>
-            <a:off x="1214472" y="2340864"/>
-            <a:ext cx="5105711" cy="3474720"/>
+            <a:off x="1639948" y="2340864"/>
+            <a:ext cx="4254759" cy="3474720"/>
           </a:xfrm>
           <a:prstGeom prst="roundRect">
             <a:avLst>
@@ -4815,8 +4815,8 @@
         </p:blipFill>
         <p:spPr>
           <a:xfrm>
-            <a:off x="676656" y="2415844"/>
-            <a:ext cx="5541264" cy="3324758"/>
+            <a:off x="676656" y="2457726"/>
+            <a:ext cx="5541264" cy="3240995"/>
           </a:xfrm>
           <a:prstGeom prst="rect">
             <a:avLst/>
@@ -4831,8 +4831,8 @@
         </p:nvSpPr>
         <p:spPr>
           <a:xfrm>
-            <a:off x="676656" y="2415844"/>
-            <a:ext cx="5541264" cy="3324758"/>
+            <a:off x="676656" y="2457726"/>
+            <a:ext cx="5541264" cy="3240995"/>
           </a:xfrm>
           <a:prstGeom prst="roundRect">
             <a:avLst>
@@ -10685,8 +10685,8 @@
         </p:blipFill>
         <p:spPr>
           <a:xfrm>
-            <a:off x="6899457" y="2295144"/>
-            <a:ext cx="4351924" cy="3566159"/>
+            <a:off x="6892056" y="2295144"/>
+            <a:ext cx="4366726" cy="3566159"/>
           </a:xfrm>
           <a:prstGeom prst="rect">
             <a:avLst/>
@@ -10701,8 +10701,8 @@
         </p:nvSpPr>
         <p:spPr>
           <a:xfrm>
-            <a:off x="6899457" y="2295144"/>
-            <a:ext cx="4351924" cy="3566159"/>
+            <a:off x="6892056" y="2295144"/>
+            <a:ext cx="4366726" cy="3566159"/>
           </a:xfrm>
           <a:prstGeom prst="roundRect">
             <a:avLst>
@@ -13126,8 +13126,8 @@
         </p:blipFill>
         <p:spPr>
           <a:xfrm>
-            <a:off x="1372839" y="2340864"/>
-            <a:ext cx="4240336" cy="3474720"/>
+            <a:off x="1365628" y="2340864"/>
+            <a:ext cx="4254759" cy="3474720"/>
           </a:xfrm>
           <a:prstGeom prst="rect">
             <a:avLst/>
@@ -13142,8 +13142,8 @@
         </p:nvSpPr>
         <p:spPr>
           <a:xfrm>
-            <a:off x="1372839" y="2340864"/>
-            <a:ext cx="4240336" cy="3474720"/>
+            <a:off x="1365628" y="2340864"/>
+            <a:ext cx="4254759" cy="3474720"/>
           </a:xfrm>
           <a:prstGeom prst="roundRect">
             <a:avLst>
@@ -17894,8 +17894,8 @@
         </p:blipFill>
         <p:spPr>
           <a:xfrm>
-            <a:off x="1074746" y="2340864"/>
-            <a:ext cx="4653642" cy="3474720"/>
+            <a:off x="1274188" y="2340864"/>
+            <a:ext cx="4254759" cy="3474720"/>
           </a:xfrm>
           <a:prstGeom prst="rect">
             <a:avLst/>
@@ -17910,8 +17910,8 @@
         </p:nvSpPr>
         <p:spPr>
           <a:xfrm>
-            <a:off x="1074746" y="2340864"/>
-            <a:ext cx="4653642" cy="3474720"/>
+            <a:off x="1274188" y="2340864"/>
+            <a:ext cx="4254759" cy="3474720"/>
           </a:xfrm>
           <a:prstGeom prst="roundRect">
             <a:avLst>
